--- a/Martigale Protocol(Detailed).pptx
+++ b/Martigale Protocol(Detailed).pptx
@@ -5,7 +5,7 @@
     <p:sldMasterId id="2147483758" r:id="rId1"/>
   </p:sldMasterIdLst>
   <p:notesMasterIdLst>
-    <p:notesMasterId r:id="rId20"/>
+    <p:notesMasterId r:id="rId23"/>
   </p:notesMasterIdLst>
   <p:sldIdLst>
     <p:sldId id="256" r:id="rId2"/>
@@ -14,18 +14,21 @@
     <p:sldId id="272" r:id="rId5"/>
     <p:sldId id="280" r:id="rId6"/>
     <p:sldId id="293" r:id="rId7"/>
-    <p:sldId id="294" r:id="rId8"/>
-    <p:sldId id="277" r:id="rId9"/>
-    <p:sldId id="276" r:id="rId10"/>
-    <p:sldId id="295" r:id="rId11"/>
-    <p:sldId id="299" r:id="rId12"/>
-    <p:sldId id="300" r:id="rId13"/>
-    <p:sldId id="301" r:id="rId14"/>
-    <p:sldId id="297" r:id="rId15"/>
-    <p:sldId id="298" r:id="rId16"/>
-    <p:sldId id="296" r:id="rId17"/>
-    <p:sldId id="302" r:id="rId18"/>
-    <p:sldId id="304" r:id="rId19"/>
+    <p:sldId id="305" r:id="rId8"/>
+    <p:sldId id="294" r:id="rId9"/>
+    <p:sldId id="277" r:id="rId10"/>
+    <p:sldId id="276" r:id="rId11"/>
+    <p:sldId id="295" r:id="rId12"/>
+    <p:sldId id="299" r:id="rId13"/>
+    <p:sldId id="300" r:id="rId14"/>
+    <p:sldId id="301" r:id="rId15"/>
+    <p:sldId id="297" r:id="rId16"/>
+    <p:sldId id="298" r:id="rId17"/>
+    <p:sldId id="296" r:id="rId18"/>
+    <p:sldId id="302" r:id="rId19"/>
+    <p:sldId id="304" r:id="rId20"/>
+    <p:sldId id="306" r:id="rId21"/>
+    <p:sldId id="307" r:id="rId22"/>
   </p:sldIdLst>
   <p:sldSz cx="12192000" cy="6858000"/>
   <p:notesSz cx="6858000" cy="9144000"/>
@@ -15712,7 +15715,7 @@
           <a:p>
             <a:fld id="{3D0D5AE7-B727-42C0-81FD-A4556D1D54A8}" type="datetimeFigureOut">
               <a:rPr lang="en-US" smtClean="0"/>
-              <a:t>3/16/2026</a:t>
+              <a:t>3/17/2026</a:t>
             </a:fld>
             <a:endParaRPr lang="en-US"/>
           </a:p>
@@ -16110,7 +16113,7 @@
           <a:p>
             <a:fld id="{C128FA71-3A18-48C0-980F-4B68F7F63042}" type="datetime1">
               <a:rPr lang="en-US" smtClean="0"/>
-              <a:t>3/16/2026</a:t>
+              <a:t>3/17/2026</a:t>
             </a:fld>
             <a:endParaRPr lang="en-US"/>
           </a:p>
@@ -16280,7 +16283,7 @@
           <a:p>
             <a:fld id="{7104EDB3-C0E8-45F8-9E1D-1B6C8D1880C0}" type="datetime1">
               <a:rPr lang="en-US" smtClean="0"/>
-              <a:t>3/16/2026</a:t>
+              <a:t>3/17/2026</a:t>
             </a:fld>
             <a:endParaRPr lang="en-US"/>
           </a:p>
@@ -16460,7 +16463,7 @@
           <a:p>
             <a:fld id="{9CF0EC4B-54ED-4041-B552-9BA760FA3DBA}" type="datetime1">
               <a:rPr lang="en-US" smtClean="0"/>
-              <a:t>3/16/2026</a:t>
+              <a:t>3/17/2026</a:t>
             </a:fld>
             <a:endParaRPr lang="en-US"/>
           </a:p>
@@ -16630,7 +16633,7 @@
           <a:p>
             <a:fld id="{51C1210E-201E-4473-82AC-2466F5386C38}" type="datetime1">
               <a:rPr lang="en-US" smtClean="0"/>
-              <a:t>3/16/2026</a:t>
+              <a:t>3/17/2026</a:t>
             </a:fld>
             <a:endParaRPr lang="en-US"/>
           </a:p>
@@ -16876,7 +16879,7 @@
           <a:p>
             <a:fld id="{B01EA198-6CAB-4B8F-B93F-1F9C8C4B6CE7}" type="datetime1">
               <a:rPr lang="en-US" smtClean="0"/>
-              <a:t>3/16/2026</a:t>
+              <a:t>3/17/2026</a:t>
             </a:fld>
             <a:endParaRPr lang="en-US"/>
           </a:p>
@@ -17108,7 +17111,7 @@
           <a:p>
             <a:fld id="{CA06041F-4525-44D5-AA4F-332294BF1F56}" type="datetime1">
               <a:rPr lang="en-US" smtClean="0"/>
-              <a:t>3/16/2026</a:t>
+              <a:t>3/17/2026</a:t>
             </a:fld>
             <a:endParaRPr lang="en-US"/>
           </a:p>
@@ -17475,7 +17478,7 @@
           <a:p>
             <a:fld id="{F9557091-BBDF-4EB9-BA6B-2BB67AC4FC0F}" type="datetime1">
               <a:rPr lang="en-US" smtClean="0"/>
-              <a:t>3/16/2026</a:t>
+              <a:t>3/17/2026</a:t>
             </a:fld>
             <a:endParaRPr lang="en-US"/>
           </a:p>
@@ -17593,7 +17596,7 @@
           <a:p>
             <a:fld id="{2D6B226B-77A6-410C-9796-083F278E0125}" type="datetime1">
               <a:rPr lang="en-US" smtClean="0"/>
-              <a:t>3/16/2026</a:t>
+              <a:t>3/17/2026</a:t>
             </a:fld>
             <a:endParaRPr lang="en-US"/>
           </a:p>
@@ -17688,7 +17691,7 @@
           <a:p>
             <a:fld id="{A23A578B-D289-4C40-8593-3D356C49DA58}" type="datetime1">
               <a:rPr lang="en-US" smtClean="0"/>
-              <a:t>3/16/2026</a:t>
+              <a:t>3/17/2026</a:t>
             </a:fld>
             <a:endParaRPr lang="en-US"/>
           </a:p>
@@ -17965,7 +17968,7 @@
           <a:p>
             <a:fld id="{713DFAE3-14DB-48A7-A80F-80DDB072CE3D}" type="datetime1">
               <a:rPr lang="en-US" smtClean="0"/>
-              <a:t>3/16/2026</a:t>
+              <a:t>3/17/2026</a:t>
             </a:fld>
             <a:endParaRPr lang="en-US"/>
           </a:p>
@@ -18222,7 +18225,7 @@
           <a:p>
             <a:fld id="{92C5EAEF-6478-4102-8F5D-A5FE9FC97ACB}" type="datetime1">
               <a:rPr lang="en-US" smtClean="0"/>
-              <a:t>3/16/2026</a:t>
+              <a:t>3/17/2026</a:t>
             </a:fld>
             <a:endParaRPr lang="en-US"/>
           </a:p>
@@ -18435,7 +18438,7 @@
           <a:p>
             <a:fld id="{67F45AC6-C491-4585-A584-9CE2AF7D5500}" type="datetime1">
               <a:rPr lang="en-US" smtClean="0"/>
-              <a:t>3/16/2026</a:t>
+              <a:t>3/17/2026</a:t>
             </a:fld>
             <a:endParaRPr lang="en-US"/>
           </a:p>
@@ -19159,6 +19162,1422 @@
           <p:cNvPr id="2" name="Title 1">
             <a:extLst>
               <a:ext uri="{FF2B5EF4-FFF2-40B4-BE49-F238E27FC236}">
+                <a16:creationId xmlns:a16="http://schemas.microsoft.com/office/drawing/2014/main" id="{06495D84-7197-9E06-A96E-BBD7A76329B0}"/>
+              </a:ext>
+            </a:extLst>
+          </p:cNvPr>
+          <p:cNvSpPr>
+            <a:spLocks noGrp="1"/>
+          </p:cNvSpPr>
+          <p:nvPr>
+            <p:ph type="title"/>
+          </p:nvPr>
+        </p:nvSpPr>
+        <p:spPr/>
+        <p:txBody>
+          <a:bodyPr/>
+          <a:lstStyle/>
+          <a:p>
+            <a:r>
+              <a:rPr lang="en-US" dirty="0"/>
+              <a:t>Model </a:t>
+            </a:r>
+            <a:r>
+              <a:rPr lang="en-US" dirty="0">
+                <a:latin typeface="Abadi" panose="020B0604020104020204" pitchFamily="34" charset="0"/>
+              </a:rPr>
+              <a:t>Ⅴ</a:t>
+            </a:r>
+            <a:r>
+              <a:rPr lang="en-US" altLang="zh-CN" dirty="0"/>
+              <a:t>——Liquidation</a:t>
+            </a:r>
+            <a:endParaRPr lang="en-US" dirty="0"/>
+          </a:p>
+        </p:txBody>
+      </p:sp>
+      <p:sp>
+        <p:nvSpPr>
+          <p:cNvPr id="4" name="Rounded Rectangle 3">
+            <a:extLst>
+              <a:ext uri="{FF2B5EF4-FFF2-40B4-BE49-F238E27FC236}">
+                <a16:creationId xmlns:a16="http://schemas.microsoft.com/office/drawing/2014/main" id="{42C8E76A-10E7-3760-6D84-B7E3ED9A8BEF}"/>
+              </a:ext>
+            </a:extLst>
+          </p:cNvPr>
+          <p:cNvSpPr/>
+          <p:nvPr/>
+        </p:nvSpPr>
+        <p:spPr>
+          <a:xfrm>
+            <a:off x="7664382" y="1679337"/>
+            <a:ext cx="2677884" cy="865414"/>
+          </a:xfrm>
+          <a:prstGeom prst="roundRect">
+            <a:avLst/>
+          </a:prstGeom>
+          <a:solidFill>
+            <a:schemeClr val="accent6"/>
+          </a:solidFill>
+        </p:spPr>
+        <p:style>
+          <a:lnRef idx="2">
+            <a:schemeClr val="accent1">
+              <a:shade val="15000"/>
+            </a:schemeClr>
+          </a:lnRef>
+          <a:fillRef idx="1">
+            <a:schemeClr val="accent1"/>
+          </a:fillRef>
+          <a:effectRef idx="0">
+            <a:schemeClr val="accent1"/>
+          </a:effectRef>
+          <a:fontRef idx="minor">
+            <a:schemeClr val="lt1"/>
+          </a:fontRef>
+        </p:style>
+        <p:txBody>
+          <a:bodyPr rtlCol="0" anchor="ctr"/>
+          <a:lstStyle/>
+          <a:p>
+            <a:pPr algn="ctr"/>
+            <a:r>
+              <a:rPr lang="en-US" dirty="0"/>
+              <a:t>Keeper</a:t>
+            </a:r>
+          </a:p>
+        </p:txBody>
+      </p:sp>
+      <p:sp>
+        <p:nvSpPr>
+          <p:cNvPr id="5" name="Rounded Rectangle 4">
+            <a:extLst>
+              <a:ext uri="{FF2B5EF4-FFF2-40B4-BE49-F238E27FC236}">
+                <a16:creationId xmlns:a16="http://schemas.microsoft.com/office/drawing/2014/main" id="{38444ACA-2414-4E78-262D-F78D0A36DE01}"/>
+              </a:ext>
+            </a:extLst>
+          </p:cNvPr>
+          <p:cNvSpPr/>
+          <p:nvPr/>
+        </p:nvSpPr>
+        <p:spPr>
+          <a:xfrm>
+            <a:off x="2316772" y="1692258"/>
+            <a:ext cx="2865665" cy="865414"/>
+          </a:xfrm>
+          <a:prstGeom prst="roundRect">
+            <a:avLst/>
+          </a:prstGeom>
+          <a:solidFill>
+            <a:schemeClr val="accent4"/>
+          </a:solidFill>
+        </p:spPr>
+        <p:style>
+          <a:lnRef idx="2">
+            <a:schemeClr val="accent1">
+              <a:shade val="15000"/>
+            </a:schemeClr>
+          </a:lnRef>
+          <a:fillRef idx="1">
+            <a:schemeClr val="accent1"/>
+          </a:fillRef>
+          <a:effectRef idx="0">
+            <a:schemeClr val="accent1"/>
+          </a:effectRef>
+          <a:fontRef idx="minor">
+            <a:schemeClr val="lt1"/>
+          </a:fontRef>
+        </p:style>
+        <p:txBody>
+          <a:bodyPr rtlCol="0" anchor="ctr"/>
+          <a:lstStyle/>
+          <a:p>
+            <a:pPr algn="ctr"/>
+            <a:endParaRPr lang="en-US" dirty="0"/>
+          </a:p>
+        </p:txBody>
+      </p:sp>
+      <p:sp>
+        <p:nvSpPr>
+          <p:cNvPr id="6" name="Rounded Rectangle 5">
+            <a:extLst>
+              <a:ext uri="{FF2B5EF4-FFF2-40B4-BE49-F238E27FC236}">
+                <a16:creationId xmlns:a16="http://schemas.microsoft.com/office/drawing/2014/main" id="{1D8CA94B-B8AD-F6C6-706E-D996349E92A5}"/>
+              </a:ext>
+            </a:extLst>
+          </p:cNvPr>
+          <p:cNvSpPr/>
+          <p:nvPr/>
+        </p:nvSpPr>
+        <p:spPr>
+          <a:xfrm>
+            <a:off x="2358203" y="3675631"/>
+            <a:ext cx="5225143" cy="2423345"/>
+          </a:xfrm>
+          <a:prstGeom prst="roundRect">
+            <a:avLst/>
+          </a:prstGeom>
+          <a:solidFill>
+            <a:schemeClr val="accent2"/>
+          </a:solidFill>
+          <a:ln>
+            <a:solidFill>
+              <a:schemeClr val="tx1"/>
+            </a:solidFill>
+          </a:ln>
+        </p:spPr>
+        <p:style>
+          <a:lnRef idx="2">
+            <a:schemeClr val="accent1">
+              <a:shade val="15000"/>
+            </a:schemeClr>
+          </a:lnRef>
+          <a:fillRef idx="1">
+            <a:schemeClr val="accent1"/>
+          </a:fillRef>
+          <a:effectRef idx="0">
+            <a:schemeClr val="accent1"/>
+          </a:effectRef>
+          <a:fontRef idx="minor">
+            <a:schemeClr val="lt1"/>
+          </a:fontRef>
+        </p:style>
+        <p:txBody>
+          <a:bodyPr rtlCol="0" anchor="ctr"/>
+          <a:lstStyle/>
+          <a:p>
+            <a:pPr algn="ctr"/>
+            <a:endParaRPr lang="en-US"/>
+          </a:p>
+        </p:txBody>
+      </p:sp>
+      <p:sp>
+        <p:nvSpPr>
+          <p:cNvPr id="7" name="TextBox 6">
+            <a:extLst>
+              <a:ext uri="{FF2B5EF4-FFF2-40B4-BE49-F238E27FC236}">
+                <a16:creationId xmlns:a16="http://schemas.microsoft.com/office/drawing/2014/main" id="{5B8EFBDA-390B-3E49-686A-85880D57964E}"/>
+              </a:ext>
+            </a:extLst>
+          </p:cNvPr>
+          <p:cNvSpPr txBox="1"/>
+          <p:nvPr/>
+        </p:nvSpPr>
+        <p:spPr>
+          <a:xfrm>
+            <a:off x="2462025" y="4061889"/>
+            <a:ext cx="1657350" cy="369332"/>
+          </a:xfrm>
+          <a:prstGeom prst="rect">
+            <a:avLst/>
+          </a:prstGeom>
+          <a:noFill/>
+        </p:spPr>
+        <p:txBody>
+          <a:bodyPr wrap="square" rtlCol="0">
+            <a:spAutoFit/>
+          </a:bodyPr>
+          <a:lstStyle/>
+          <a:p>
+            <a:r>
+              <a:rPr lang="en-US" dirty="0"/>
+              <a:t>Custodian</a:t>
+            </a:r>
+          </a:p>
+        </p:txBody>
+      </p:sp>
+      <p:sp>
+        <p:nvSpPr>
+          <p:cNvPr id="8" name="Rounded Rectangle 7">
+            <a:extLst>
+              <a:ext uri="{FF2B5EF4-FFF2-40B4-BE49-F238E27FC236}">
+                <a16:creationId xmlns:a16="http://schemas.microsoft.com/office/drawing/2014/main" id="{2D656626-A99F-0516-98A4-E7E2CF8EB9DB}"/>
+              </a:ext>
+            </a:extLst>
+          </p:cNvPr>
+          <p:cNvSpPr/>
+          <p:nvPr/>
+        </p:nvSpPr>
+        <p:spPr>
+          <a:xfrm>
+            <a:off x="2629328" y="4588669"/>
+            <a:ext cx="4428472" cy="1365093"/>
+          </a:xfrm>
+          <a:prstGeom prst="roundRect">
+            <a:avLst/>
+          </a:prstGeom>
+        </p:spPr>
+        <p:style>
+          <a:lnRef idx="2">
+            <a:schemeClr val="accent1">
+              <a:shade val="15000"/>
+            </a:schemeClr>
+          </a:lnRef>
+          <a:fillRef idx="1">
+            <a:schemeClr val="accent1"/>
+          </a:fillRef>
+          <a:effectRef idx="0">
+            <a:schemeClr val="accent1"/>
+          </a:effectRef>
+          <a:fontRef idx="minor">
+            <a:schemeClr val="lt1"/>
+          </a:fontRef>
+        </p:style>
+        <p:txBody>
+          <a:bodyPr rtlCol="0" anchor="ctr"/>
+          <a:lstStyle/>
+          <a:p>
+            <a:pPr algn="ctr"/>
+            <a:endParaRPr lang="en-US" dirty="0"/>
+          </a:p>
+        </p:txBody>
+      </p:sp>
+      <p:sp>
+        <p:nvSpPr>
+          <p:cNvPr id="9" name="TextBox 9">
+            <a:extLst>
+              <a:ext uri="{FF2B5EF4-FFF2-40B4-BE49-F238E27FC236}">
+                <a16:creationId xmlns:a16="http://schemas.microsoft.com/office/drawing/2014/main" id="{0FF26A65-3175-DCEB-4E9F-A19EB5228536}"/>
+              </a:ext>
+            </a:extLst>
+          </p:cNvPr>
+          <p:cNvSpPr txBox="1"/>
+          <p:nvPr/>
+        </p:nvSpPr>
+        <p:spPr>
+          <a:xfrm>
+            <a:off x="2831126" y="4628589"/>
+            <a:ext cx="1257300" cy="369332"/>
+          </a:xfrm>
+          <a:prstGeom prst="rect">
+            <a:avLst/>
+          </a:prstGeom>
+          <a:noFill/>
+        </p:spPr>
+        <p:txBody>
+          <a:bodyPr wrap="square" rtlCol="0">
+            <a:spAutoFit/>
+          </a:bodyPr>
+          <a:lstStyle/>
+          <a:p>
+            <a:r>
+              <a:rPr lang="en-US" dirty="0"/>
+              <a:t>Auction</a:t>
+            </a:r>
+          </a:p>
+        </p:txBody>
+      </p:sp>
+      <p:sp>
+        <p:nvSpPr>
+          <p:cNvPr id="10" name="TextBox 12">
+            <a:extLst>
+              <a:ext uri="{FF2B5EF4-FFF2-40B4-BE49-F238E27FC236}">
+                <a16:creationId xmlns:a16="http://schemas.microsoft.com/office/drawing/2014/main" id="{31F02621-03A9-786A-2854-638296197E54}"/>
+              </a:ext>
+            </a:extLst>
+          </p:cNvPr>
+          <p:cNvSpPr txBox="1"/>
+          <p:nvPr/>
+        </p:nvSpPr>
+        <p:spPr>
+          <a:xfrm>
+            <a:off x="5364065" y="1820077"/>
+            <a:ext cx="2073728" cy="276999"/>
+          </a:xfrm>
+          <a:prstGeom prst="rect">
+            <a:avLst/>
+          </a:prstGeom>
+          <a:noFill/>
+        </p:spPr>
+        <p:txBody>
+          <a:bodyPr wrap="square" rtlCol="0">
+            <a:spAutoFit/>
+          </a:bodyPr>
+          <a:lstStyle/>
+          <a:p>
+            <a:r>
+              <a:rPr lang="en-SG" sz="1200" dirty="0"/>
+              <a:t>①</a:t>
+            </a:r>
+            <a:r>
+              <a:rPr lang="en-US" sz="1200" dirty="0"/>
+              <a:t>Bark</a:t>
+            </a:r>
+          </a:p>
+        </p:txBody>
+      </p:sp>
+      <p:sp>
+        <p:nvSpPr>
+          <p:cNvPr id="11" name="TextBox 13">
+            <a:extLst>
+              <a:ext uri="{FF2B5EF4-FFF2-40B4-BE49-F238E27FC236}">
+                <a16:creationId xmlns:a16="http://schemas.microsoft.com/office/drawing/2014/main" id="{E5EC2324-C1F6-C4B1-7475-C8EAD22AEBCD}"/>
+              </a:ext>
+            </a:extLst>
+          </p:cNvPr>
+          <p:cNvSpPr txBox="1"/>
+          <p:nvPr/>
+        </p:nvSpPr>
+        <p:spPr>
+          <a:xfrm>
+            <a:off x="2723952" y="1874977"/>
+            <a:ext cx="2363503" cy="369332"/>
+          </a:xfrm>
+          <a:prstGeom prst="rect">
+            <a:avLst/>
+          </a:prstGeom>
+          <a:noFill/>
+        </p:spPr>
+        <p:txBody>
+          <a:bodyPr wrap="square" rtlCol="0">
+            <a:spAutoFit/>
+          </a:bodyPr>
+          <a:lstStyle/>
+          <a:p>
+            <a:r>
+              <a:rPr lang="en-US" dirty="0">
+                <a:solidFill>
+                  <a:schemeClr val="bg1"/>
+                </a:solidFill>
+              </a:rPr>
+              <a:t>User</a:t>
+            </a:r>
+            <a:r>
+              <a:rPr lang="en-SG" dirty="0">
+                <a:solidFill>
+                  <a:schemeClr val="bg1"/>
+                </a:solidFill>
+              </a:rPr>
+              <a:t> </a:t>
+            </a:r>
+            <a:r>
+              <a:rPr lang="en-US" altLang="zh-CN" dirty="0">
+                <a:solidFill>
+                  <a:schemeClr val="bg1"/>
+                </a:solidFill>
+              </a:rPr>
+              <a:t>L token</a:t>
+            </a:r>
+            <a:endParaRPr lang="en-US" dirty="0">
+              <a:solidFill>
+                <a:schemeClr val="bg1"/>
+              </a:solidFill>
+            </a:endParaRPr>
+          </a:p>
+        </p:txBody>
+      </p:sp>
+      <p:sp>
+        <p:nvSpPr>
+          <p:cNvPr id="12" name="Oval 17">
+            <a:extLst>
+              <a:ext uri="{FF2B5EF4-FFF2-40B4-BE49-F238E27FC236}">
+                <a16:creationId xmlns:a16="http://schemas.microsoft.com/office/drawing/2014/main" id="{C0B85151-2080-E726-8E89-75E75159E966}"/>
+              </a:ext>
+            </a:extLst>
+          </p:cNvPr>
+          <p:cNvSpPr/>
+          <p:nvPr/>
+        </p:nvSpPr>
+        <p:spPr>
+          <a:xfrm>
+            <a:off x="831636" y="2805712"/>
+            <a:ext cx="2049236" cy="844514"/>
+          </a:xfrm>
+          <a:prstGeom prst="ellipse">
+            <a:avLst/>
+          </a:prstGeom>
+          <a:solidFill>
+            <a:schemeClr val="accent4">
+              <a:lumMod val="60000"/>
+              <a:lumOff val="40000"/>
+            </a:schemeClr>
+          </a:solidFill>
+        </p:spPr>
+        <p:style>
+          <a:lnRef idx="2">
+            <a:schemeClr val="accent1">
+              <a:shade val="15000"/>
+            </a:schemeClr>
+          </a:lnRef>
+          <a:fillRef idx="1">
+            <a:schemeClr val="accent1"/>
+          </a:fillRef>
+          <a:effectRef idx="0">
+            <a:schemeClr val="accent1"/>
+          </a:effectRef>
+          <a:fontRef idx="minor">
+            <a:schemeClr val="lt1"/>
+          </a:fontRef>
+        </p:style>
+        <p:txBody>
+          <a:bodyPr rtlCol="0" anchor="ctr"/>
+          <a:lstStyle/>
+          <a:p>
+            <a:pPr algn="ctr"/>
+            <a:endParaRPr lang="en-US" dirty="0"/>
+          </a:p>
+        </p:txBody>
+      </p:sp>
+      <p:sp>
+        <p:nvSpPr>
+          <p:cNvPr id="13" name="TextBox 18">
+            <a:extLst>
+              <a:ext uri="{FF2B5EF4-FFF2-40B4-BE49-F238E27FC236}">
+                <a16:creationId xmlns:a16="http://schemas.microsoft.com/office/drawing/2014/main" id="{C6DEB884-DD06-BC5B-042E-DCA411A0A931}"/>
+              </a:ext>
+            </a:extLst>
+          </p:cNvPr>
+          <p:cNvSpPr txBox="1"/>
+          <p:nvPr/>
+        </p:nvSpPr>
+        <p:spPr>
+          <a:xfrm>
+            <a:off x="1356818" y="2999812"/>
+            <a:ext cx="1224643" cy="461665"/>
+          </a:xfrm>
+          <a:prstGeom prst="rect">
+            <a:avLst/>
+          </a:prstGeom>
+          <a:noFill/>
+        </p:spPr>
+        <p:txBody>
+          <a:bodyPr wrap="square" rtlCol="0">
+            <a:spAutoFit/>
+          </a:bodyPr>
+          <a:lstStyle/>
+          <a:p>
+            <a:r>
+              <a:rPr lang="en-US" sz="1200" dirty="0">
+                <a:solidFill>
+                  <a:schemeClr val="bg1"/>
+                </a:solidFill>
+              </a:rPr>
+              <a:t>Burn  L token</a:t>
+            </a:r>
+          </a:p>
+          <a:p>
+            <a:r>
+              <a:rPr lang="en-US" sz="1200" dirty="0">
+                <a:solidFill>
+                  <a:schemeClr val="bg1"/>
+                </a:solidFill>
+              </a:rPr>
+              <a:t>Burn  S token</a:t>
+            </a:r>
+          </a:p>
+        </p:txBody>
+      </p:sp>
+      <p:cxnSp>
+        <p:nvCxnSpPr>
+          <p:cNvPr id="14" name="Elbow Connector 24">
+            <a:extLst>
+              <a:ext uri="{FF2B5EF4-FFF2-40B4-BE49-F238E27FC236}">
+                <a16:creationId xmlns:a16="http://schemas.microsoft.com/office/drawing/2014/main" id="{9EEE1B21-8443-779E-1838-54F8573C0C22}"/>
+              </a:ext>
+            </a:extLst>
+          </p:cNvPr>
+          <p:cNvCxnSpPr>
+            <a:cxnSpLocks/>
+          </p:cNvCxnSpPr>
+          <p:nvPr/>
+        </p:nvCxnSpPr>
+        <p:spPr>
+          <a:xfrm rot="10800000" flipV="1">
+            <a:off x="1770804" y="2065071"/>
+            <a:ext cx="1060322" cy="761222"/>
+          </a:xfrm>
+          <a:prstGeom prst="bentConnector4">
+            <a:avLst>
+              <a:gd name="adj1" fmla="val 82594"/>
+              <a:gd name="adj2" fmla="val 169"/>
+            </a:avLst>
+          </a:prstGeom>
+          <a:ln>
+            <a:tailEnd type="triangle"/>
+          </a:ln>
+        </p:spPr>
+        <p:style>
+          <a:lnRef idx="2">
+            <a:schemeClr val="dk1"/>
+          </a:lnRef>
+          <a:fillRef idx="0">
+            <a:schemeClr val="dk1"/>
+          </a:fillRef>
+          <a:effectRef idx="1">
+            <a:schemeClr val="dk1"/>
+          </a:effectRef>
+          <a:fontRef idx="minor">
+            <a:schemeClr val="tx1"/>
+          </a:fontRef>
+        </p:style>
+      </p:cxnSp>
+      <p:sp>
+        <p:nvSpPr>
+          <p:cNvPr id="15" name="TextBox 38">
+            <a:extLst>
+              <a:ext uri="{FF2B5EF4-FFF2-40B4-BE49-F238E27FC236}">
+                <a16:creationId xmlns:a16="http://schemas.microsoft.com/office/drawing/2014/main" id="{E9AC1FCF-FA4A-98B7-DE63-9C91C74F1C0C}"/>
+              </a:ext>
+            </a:extLst>
+          </p:cNvPr>
+          <p:cNvSpPr txBox="1"/>
+          <p:nvPr/>
+        </p:nvSpPr>
+        <p:spPr>
+          <a:xfrm>
+            <a:off x="3682614" y="2826294"/>
+            <a:ext cx="1220255" cy="646331"/>
+          </a:xfrm>
+          <a:prstGeom prst="rect">
+            <a:avLst/>
+          </a:prstGeom>
+          <a:noFill/>
+        </p:spPr>
+        <p:txBody>
+          <a:bodyPr wrap="square" rtlCol="0">
+            <a:spAutoFit/>
+          </a:bodyPr>
+          <a:lstStyle/>
+          <a:p>
+            <a:r>
+              <a:rPr lang="en-SG" sz="1200" dirty="0"/>
+              <a:t>② </a:t>
+            </a:r>
+          </a:p>
+          <a:p>
+            <a:r>
+              <a:rPr lang="en-SG" sz="1200" dirty="0"/>
+              <a:t>Remaining</a:t>
+            </a:r>
+          </a:p>
+          <a:p>
+            <a:r>
+              <a:rPr lang="en-US" altLang="zh-CN" sz="1200" dirty="0"/>
+              <a:t>Tokenized gold</a:t>
+            </a:r>
+            <a:endParaRPr lang="en-US" sz="1200" dirty="0"/>
+          </a:p>
+        </p:txBody>
+      </p:sp>
+      <p:sp>
+        <p:nvSpPr>
+          <p:cNvPr id="16" name="TextBox 43">
+            <a:extLst>
+              <a:ext uri="{FF2B5EF4-FFF2-40B4-BE49-F238E27FC236}">
+                <a16:creationId xmlns:a16="http://schemas.microsoft.com/office/drawing/2014/main" id="{A08E8D2A-F7DD-FDCF-02D6-55A21F4C444C}"/>
+              </a:ext>
+            </a:extLst>
+          </p:cNvPr>
+          <p:cNvSpPr txBox="1"/>
+          <p:nvPr/>
+        </p:nvSpPr>
+        <p:spPr>
+          <a:xfrm>
+            <a:off x="6543773" y="2764809"/>
+            <a:ext cx="950491" cy="276999"/>
+          </a:xfrm>
+          <a:prstGeom prst="rect">
+            <a:avLst/>
+          </a:prstGeom>
+          <a:noFill/>
+        </p:spPr>
+        <p:txBody>
+          <a:bodyPr wrap="square" rtlCol="0">
+            <a:spAutoFit/>
+          </a:bodyPr>
+          <a:lstStyle/>
+          <a:p>
+            <a:r>
+              <a:rPr lang="en-SG" sz="1200" dirty="0"/>
+              <a:t>② </a:t>
+            </a:r>
+            <a:r>
+              <a:rPr lang="en-US" sz="1200" dirty="0"/>
+              <a:t>reward</a:t>
+            </a:r>
+          </a:p>
+        </p:txBody>
+      </p:sp>
+      <p:cxnSp>
+        <p:nvCxnSpPr>
+          <p:cNvPr id="17" name="Straight Arrow Connector 45">
+            <a:extLst>
+              <a:ext uri="{FF2B5EF4-FFF2-40B4-BE49-F238E27FC236}">
+                <a16:creationId xmlns:a16="http://schemas.microsoft.com/office/drawing/2014/main" id="{0A939705-C138-C39A-340E-CF7971C7627A}"/>
+              </a:ext>
+            </a:extLst>
+          </p:cNvPr>
+          <p:cNvCxnSpPr/>
+          <p:nvPr/>
+        </p:nvCxnSpPr>
+        <p:spPr>
+          <a:xfrm flipH="1">
+            <a:off x="6487630" y="2448131"/>
+            <a:ext cx="2025837" cy="2341014"/>
+          </a:xfrm>
+          <a:prstGeom prst="straightConnector1">
+            <a:avLst/>
+          </a:prstGeom>
+          <a:ln>
+            <a:tailEnd type="triangle"/>
+          </a:ln>
+        </p:spPr>
+        <p:style>
+          <a:lnRef idx="2">
+            <a:schemeClr val="dk1"/>
+          </a:lnRef>
+          <a:fillRef idx="0">
+            <a:schemeClr val="dk1"/>
+          </a:fillRef>
+          <a:effectRef idx="1">
+            <a:schemeClr val="dk1"/>
+          </a:effectRef>
+          <a:fontRef idx="minor">
+            <a:schemeClr val="tx1"/>
+          </a:fontRef>
+        </p:style>
+      </p:cxnSp>
+      <p:sp>
+        <p:nvSpPr>
+          <p:cNvPr id="18" name="TextBox 48">
+            <a:extLst>
+              <a:ext uri="{FF2B5EF4-FFF2-40B4-BE49-F238E27FC236}">
+                <a16:creationId xmlns:a16="http://schemas.microsoft.com/office/drawing/2014/main" id="{FA9A962C-97F7-354A-3133-A5A7F17253A0}"/>
+              </a:ext>
+            </a:extLst>
+          </p:cNvPr>
+          <p:cNvSpPr txBox="1"/>
+          <p:nvPr/>
+        </p:nvSpPr>
+        <p:spPr>
+          <a:xfrm>
+            <a:off x="7266423" y="3123952"/>
+            <a:ext cx="890455" cy="276999"/>
+          </a:xfrm>
+          <a:prstGeom prst="rect">
+            <a:avLst/>
+          </a:prstGeom>
+          <a:noFill/>
+        </p:spPr>
+        <p:txBody>
+          <a:bodyPr wrap="square" rtlCol="0">
+            <a:spAutoFit/>
+          </a:bodyPr>
+          <a:lstStyle/>
+          <a:p>
+            <a:r>
+              <a:rPr lang="en-US" sz="1200" dirty="0"/>
+              <a:t>reset</a:t>
+            </a:r>
+          </a:p>
+        </p:txBody>
+      </p:sp>
+      <p:sp>
+        <p:nvSpPr>
+          <p:cNvPr id="19" name="Rounded Rectangle 49">
+            <a:extLst>
+              <a:ext uri="{FF2B5EF4-FFF2-40B4-BE49-F238E27FC236}">
+                <a16:creationId xmlns:a16="http://schemas.microsoft.com/office/drawing/2014/main" id="{2BF62FA1-B91F-47EF-EC08-D2F91F3D396A}"/>
+              </a:ext>
+            </a:extLst>
+          </p:cNvPr>
+          <p:cNvSpPr/>
+          <p:nvPr/>
+        </p:nvSpPr>
+        <p:spPr>
+          <a:xfrm>
+            <a:off x="9514866" y="4726267"/>
+            <a:ext cx="1050558" cy="1315282"/>
+          </a:xfrm>
+          <a:prstGeom prst="roundRect">
+            <a:avLst/>
+          </a:prstGeom>
+          <a:solidFill>
+            <a:schemeClr val="accent6"/>
+          </a:solidFill>
+        </p:spPr>
+        <p:style>
+          <a:lnRef idx="2">
+            <a:schemeClr val="accent1">
+              <a:shade val="15000"/>
+            </a:schemeClr>
+          </a:lnRef>
+          <a:fillRef idx="1">
+            <a:schemeClr val="accent1"/>
+          </a:fillRef>
+          <a:effectRef idx="0">
+            <a:schemeClr val="accent1"/>
+          </a:effectRef>
+          <a:fontRef idx="minor">
+            <a:schemeClr val="lt1"/>
+          </a:fontRef>
+        </p:style>
+        <p:txBody>
+          <a:bodyPr rtlCol="0" anchor="ctr"/>
+          <a:lstStyle/>
+          <a:p>
+            <a:pPr algn="ctr"/>
+            <a:r>
+              <a:rPr lang="en-US" dirty="0"/>
+              <a:t>Bidder</a:t>
+            </a:r>
+          </a:p>
+        </p:txBody>
+      </p:sp>
+      <p:cxnSp>
+        <p:nvCxnSpPr>
+          <p:cNvPr id="20" name="Straight Arrow Connector 51">
+            <a:extLst>
+              <a:ext uri="{FF2B5EF4-FFF2-40B4-BE49-F238E27FC236}">
+                <a16:creationId xmlns:a16="http://schemas.microsoft.com/office/drawing/2014/main" id="{3926F1CE-21F6-153F-95FB-4D3E9F66FEAA}"/>
+              </a:ext>
+            </a:extLst>
+          </p:cNvPr>
+          <p:cNvCxnSpPr/>
+          <p:nvPr/>
+        </p:nvCxnSpPr>
+        <p:spPr>
+          <a:xfrm>
+            <a:off x="6952212" y="5167138"/>
+            <a:ext cx="2759528" cy="0"/>
+          </a:xfrm>
+          <a:prstGeom prst="straightConnector1">
+            <a:avLst/>
+          </a:prstGeom>
+          <a:ln>
+            <a:tailEnd type="triangle"/>
+          </a:ln>
+        </p:spPr>
+        <p:style>
+          <a:lnRef idx="2">
+            <a:schemeClr val="dk1"/>
+          </a:lnRef>
+          <a:fillRef idx="0">
+            <a:schemeClr val="dk1"/>
+          </a:fillRef>
+          <a:effectRef idx="1">
+            <a:schemeClr val="dk1"/>
+          </a:effectRef>
+          <a:fontRef idx="minor">
+            <a:schemeClr val="tx1"/>
+          </a:fontRef>
+        </p:style>
+      </p:cxnSp>
+      <p:sp>
+        <p:nvSpPr>
+          <p:cNvPr id="21" name="TextBox 57">
+            <a:extLst>
+              <a:ext uri="{FF2B5EF4-FFF2-40B4-BE49-F238E27FC236}">
+                <a16:creationId xmlns:a16="http://schemas.microsoft.com/office/drawing/2014/main" id="{5CCC166E-C011-F2E7-0B37-BA518B0B1753}"/>
+              </a:ext>
+            </a:extLst>
+          </p:cNvPr>
+          <p:cNvSpPr txBox="1"/>
+          <p:nvPr/>
+        </p:nvSpPr>
+        <p:spPr>
+          <a:xfrm>
+            <a:off x="7685120" y="4895412"/>
+            <a:ext cx="1675753" cy="276999"/>
+          </a:xfrm>
+          <a:prstGeom prst="rect">
+            <a:avLst/>
+          </a:prstGeom>
+          <a:noFill/>
+        </p:spPr>
+        <p:txBody>
+          <a:bodyPr wrap="square" rtlCol="0">
+            <a:spAutoFit/>
+          </a:bodyPr>
+          <a:lstStyle/>
+          <a:p>
+            <a:r>
+              <a:rPr lang="en-SG" sz="1200" dirty="0"/>
+              <a:t>③Buy tokenized gold</a:t>
+            </a:r>
+            <a:endParaRPr lang="en-US" sz="1200" dirty="0"/>
+          </a:p>
+        </p:txBody>
+      </p:sp>
+      <p:sp>
+        <p:nvSpPr>
+          <p:cNvPr id="22" name="TextBox 58">
+            <a:extLst>
+              <a:ext uri="{FF2B5EF4-FFF2-40B4-BE49-F238E27FC236}">
+                <a16:creationId xmlns:a16="http://schemas.microsoft.com/office/drawing/2014/main" id="{16F7C2BD-8A0C-C563-67FB-737CC67A47F8}"/>
+              </a:ext>
+            </a:extLst>
+          </p:cNvPr>
+          <p:cNvSpPr txBox="1"/>
+          <p:nvPr/>
+        </p:nvSpPr>
+        <p:spPr>
+          <a:xfrm>
+            <a:off x="7685121" y="5438865"/>
+            <a:ext cx="1891688" cy="276999"/>
+          </a:xfrm>
+          <a:prstGeom prst="rect">
+            <a:avLst/>
+          </a:prstGeom>
+          <a:noFill/>
+        </p:spPr>
+        <p:txBody>
+          <a:bodyPr wrap="square" rtlCol="0">
+            <a:spAutoFit/>
+          </a:bodyPr>
+          <a:lstStyle/>
+          <a:p>
+            <a:r>
+              <a:rPr lang="en-SG" sz="1200" dirty="0"/>
+              <a:t>③</a:t>
+            </a:r>
+            <a:r>
+              <a:rPr lang="en-US" sz="1200" dirty="0"/>
+              <a:t>Pay S token</a:t>
+            </a:r>
+          </a:p>
+        </p:txBody>
+      </p:sp>
+      <p:sp>
+        <p:nvSpPr>
+          <p:cNvPr id="23" name="Rounded Rectangle 60">
+            <a:extLst>
+              <a:ext uri="{FF2B5EF4-FFF2-40B4-BE49-F238E27FC236}">
+                <a16:creationId xmlns:a16="http://schemas.microsoft.com/office/drawing/2014/main" id="{5530153B-50B2-1913-BE61-5DA1869E00B2}"/>
+              </a:ext>
+            </a:extLst>
+          </p:cNvPr>
+          <p:cNvSpPr/>
+          <p:nvPr/>
+        </p:nvSpPr>
+        <p:spPr>
+          <a:xfrm>
+            <a:off x="4544309" y="4895470"/>
+            <a:ext cx="2063150" cy="1011634"/>
+          </a:xfrm>
+          <a:prstGeom prst="roundRect">
+            <a:avLst/>
+          </a:prstGeom>
+          <a:solidFill>
+            <a:schemeClr val="accent1">
+              <a:lumMod val="20000"/>
+              <a:lumOff val="80000"/>
+            </a:schemeClr>
+          </a:solidFill>
+        </p:spPr>
+        <p:style>
+          <a:lnRef idx="2">
+            <a:schemeClr val="accent1">
+              <a:shade val="15000"/>
+            </a:schemeClr>
+          </a:lnRef>
+          <a:fillRef idx="1">
+            <a:schemeClr val="accent1"/>
+          </a:fillRef>
+          <a:effectRef idx="0">
+            <a:schemeClr val="accent1"/>
+          </a:effectRef>
+          <a:fontRef idx="minor">
+            <a:schemeClr val="lt1"/>
+          </a:fontRef>
+        </p:style>
+        <p:txBody>
+          <a:bodyPr rtlCol="0" anchor="ctr"/>
+          <a:lstStyle/>
+          <a:p>
+            <a:pPr algn="ctr"/>
+            <a:endParaRPr lang="en-US"/>
+          </a:p>
+        </p:txBody>
+      </p:sp>
+      <p:sp>
+        <p:nvSpPr>
+          <p:cNvPr id="24" name="TextBox 61">
+            <a:extLst>
+              <a:ext uri="{FF2B5EF4-FFF2-40B4-BE49-F238E27FC236}">
+                <a16:creationId xmlns:a16="http://schemas.microsoft.com/office/drawing/2014/main" id="{1EB7D471-2BB6-A733-7023-B03B374C88E8}"/>
+              </a:ext>
+            </a:extLst>
+          </p:cNvPr>
+          <p:cNvSpPr txBox="1"/>
+          <p:nvPr/>
+        </p:nvSpPr>
+        <p:spPr>
+          <a:xfrm>
+            <a:off x="4827763" y="5227294"/>
+            <a:ext cx="1730623" cy="307777"/>
+          </a:xfrm>
+          <a:prstGeom prst="rect">
+            <a:avLst/>
+          </a:prstGeom>
+          <a:noFill/>
+        </p:spPr>
+        <p:txBody>
+          <a:bodyPr wrap="square" rtlCol="0">
+            <a:spAutoFit/>
+          </a:bodyPr>
+          <a:lstStyle/>
+          <a:p>
+            <a:r>
+              <a:rPr lang="en-US" sz="1400" dirty="0"/>
+              <a:t>S token</a:t>
+            </a:r>
+          </a:p>
+        </p:txBody>
+      </p:sp>
+      <p:cxnSp>
+        <p:nvCxnSpPr>
+          <p:cNvPr id="25" name="Straight Arrow Connector 64">
+            <a:extLst>
+              <a:ext uri="{FF2B5EF4-FFF2-40B4-BE49-F238E27FC236}">
+                <a16:creationId xmlns:a16="http://schemas.microsoft.com/office/drawing/2014/main" id="{32FD0CAE-38AF-11E4-90B3-DA1664ECC657}"/>
+              </a:ext>
+            </a:extLst>
+          </p:cNvPr>
+          <p:cNvCxnSpPr/>
+          <p:nvPr/>
+        </p:nvCxnSpPr>
+        <p:spPr>
+          <a:xfrm flipH="1">
+            <a:off x="6325438" y="5773531"/>
+            <a:ext cx="3386302" cy="0"/>
+          </a:xfrm>
+          <a:prstGeom prst="straightConnector1">
+            <a:avLst/>
+          </a:prstGeom>
+          <a:ln>
+            <a:tailEnd type="triangle"/>
+          </a:ln>
+        </p:spPr>
+        <p:style>
+          <a:lnRef idx="2">
+            <a:schemeClr val="dk1"/>
+          </a:lnRef>
+          <a:fillRef idx="0">
+            <a:schemeClr val="dk1"/>
+          </a:fillRef>
+          <a:effectRef idx="1">
+            <a:schemeClr val="dk1"/>
+          </a:effectRef>
+          <a:fontRef idx="minor">
+            <a:schemeClr val="tx1"/>
+          </a:fontRef>
+        </p:style>
+      </p:cxnSp>
+      <p:cxnSp>
+        <p:nvCxnSpPr>
+          <p:cNvPr id="26" name="Elbow Connector 69">
+            <a:extLst>
+              <a:ext uri="{FF2B5EF4-FFF2-40B4-BE49-F238E27FC236}">
+                <a16:creationId xmlns:a16="http://schemas.microsoft.com/office/drawing/2014/main" id="{E0E8ACBA-2158-A4A9-867F-2C1DB528CD54}"/>
+              </a:ext>
+            </a:extLst>
+          </p:cNvPr>
+          <p:cNvCxnSpPr>
+            <a:cxnSpLocks/>
+          </p:cNvCxnSpPr>
+          <p:nvPr/>
+        </p:nvCxnSpPr>
+        <p:spPr>
+          <a:xfrm rot="10800000">
+            <a:off x="1759602" y="3432517"/>
+            <a:ext cx="2900322" cy="2341014"/>
+          </a:xfrm>
+          <a:prstGeom prst="bentConnector3">
+            <a:avLst>
+              <a:gd name="adj1" fmla="val 100106"/>
+            </a:avLst>
+          </a:prstGeom>
+          <a:ln>
+            <a:tailEnd type="triangle"/>
+          </a:ln>
+        </p:spPr>
+        <p:style>
+          <a:lnRef idx="2">
+            <a:schemeClr val="dk1"/>
+          </a:lnRef>
+          <a:fillRef idx="0">
+            <a:schemeClr val="dk1"/>
+          </a:fillRef>
+          <a:effectRef idx="1">
+            <a:schemeClr val="dk1"/>
+          </a:effectRef>
+          <a:fontRef idx="minor">
+            <a:schemeClr val="tx1"/>
+          </a:fontRef>
+        </p:style>
+      </p:cxnSp>
+      <p:cxnSp>
+        <p:nvCxnSpPr>
+          <p:cNvPr id="27" name="Straight Arrow Connector 74">
+            <a:extLst>
+              <a:ext uri="{FF2B5EF4-FFF2-40B4-BE49-F238E27FC236}">
+                <a16:creationId xmlns:a16="http://schemas.microsoft.com/office/drawing/2014/main" id="{F8D42FF2-8363-D6DD-27C7-36DF766FAF84}"/>
+              </a:ext>
+            </a:extLst>
+          </p:cNvPr>
+          <p:cNvCxnSpPr/>
+          <p:nvPr/>
+        </p:nvCxnSpPr>
+        <p:spPr>
+          <a:xfrm flipH="1" flipV="1">
+            <a:off x="3708673" y="2428934"/>
+            <a:ext cx="13226" cy="2278136"/>
+          </a:xfrm>
+          <a:prstGeom prst="straightConnector1">
+            <a:avLst/>
+          </a:prstGeom>
+          <a:ln>
+            <a:tailEnd type="triangle"/>
+          </a:ln>
+        </p:spPr>
+        <p:style>
+          <a:lnRef idx="2">
+            <a:schemeClr val="dk1"/>
+          </a:lnRef>
+          <a:fillRef idx="0">
+            <a:schemeClr val="dk1"/>
+          </a:fillRef>
+          <a:effectRef idx="1">
+            <a:schemeClr val="dk1"/>
+          </a:effectRef>
+          <a:fontRef idx="minor">
+            <a:schemeClr val="tx1"/>
+          </a:fontRef>
+        </p:style>
+      </p:cxnSp>
+      <p:sp>
+        <p:nvSpPr>
+          <p:cNvPr id="28" name="Rounded Rectangle 81">
+            <a:extLst>
+              <a:ext uri="{FF2B5EF4-FFF2-40B4-BE49-F238E27FC236}">
+                <a16:creationId xmlns:a16="http://schemas.microsoft.com/office/drawing/2014/main" id="{4A76D577-7409-2A4B-30AF-C4A475B8D6E7}"/>
+              </a:ext>
+            </a:extLst>
+          </p:cNvPr>
+          <p:cNvSpPr/>
+          <p:nvPr/>
+        </p:nvSpPr>
+        <p:spPr>
+          <a:xfrm>
+            <a:off x="5386477" y="3873489"/>
+            <a:ext cx="1223997" cy="566154"/>
+          </a:xfrm>
+          <a:prstGeom prst="roundRect">
+            <a:avLst/>
+          </a:prstGeom>
+          <a:solidFill>
+            <a:schemeClr val="accent3"/>
+          </a:solidFill>
+          <a:ln>
+            <a:solidFill>
+              <a:schemeClr val="tx1"/>
+            </a:solidFill>
+          </a:ln>
+        </p:spPr>
+        <p:style>
+          <a:lnRef idx="2">
+            <a:schemeClr val="accent1">
+              <a:shade val="15000"/>
+            </a:schemeClr>
+          </a:lnRef>
+          <a:fillRef idx="1">
+            <a:schemeClr val="accent1"/>
+          </a:fillRef>
+          <a:effectRef idx="0">
+            <a:schemeClr val="accent1"/>
+          </a:effectRef>
+          <a:fontRef idx="minor">
+            <a:schemeClr val="lt1"/>
+          </a:fontRef>
+        </p:style>
+        <p:txBody>
+          <a:bodyPr rtlCol="0" anchor="ctr"/>
+          <a:lstStyle/>
+          <a:p>
+            <a:pPr algn="ctr"/>
+            <a:endParaRPr lang="en-US"/>
+          </a:p>
+        </p:txBody>
+      </p:sp>
+      <p:sp>
+        <p:nvSpPr>
+          <p:cNvPr id="29" name="TextBox 82">
+            <a:extLst>
+              <a:ext uri="{FF2B5EF4-FFF2-40B4-BE49-F238E27FC236}">
+                <a16:creationId xmlns:a16="http://schemas.microsoft.com/office/drawing/2014/main" id="{2F1CBD18-2DD2-2FA9-81B7-AD30AE48AAB8}"/>
+              </a:ext>
+            </a:extLst>
+          </p:cNvPr>
+          <p:cNvSpPr txBox="1"/>
+          <p:nvPr/>
+        </p:nvSpPr>
+        <p:spPr>
+          <a:xfrm>
+            <a:off x="5550698" y="3910553"/>
+            <a:ext cx="1126596" cy="307777"/>
+          </a:xfrm>
+          <a:prstGeom prst="rect">
+            <a:avLst/>
+          </a:prstGeom>
+          <a:noFill/>
+        </p:spPr>
+        <p:txBody>
+          <a:bodyPr wrap="square" rtlCol="0">
+            <a:spAutoFit/>
+          </a:bodyPr>
+          <a:lstStyle/>
+          <a:p>
+            <a:r>
+              <a:rPr lang="en-US" sz="1400" dirty="0"/>
+              <a:t>Penalty</a:t>
+            </a:r>
+          </a:p>
+        </p:txBody>
+      </p:sp>
+      <p:cxnSp>
+        <p:nvCxnSpPr>
+          <p:cNvPr id="30" name="Elbow Connector 84">
+            <a:extLst>
+              <a:ext uri="{FF2B5EF4-FFF2-40B4-BE49-F238E27FC236}">
+                <a16:creationId xmlns:a16="http://schemas.microsoft.com/office/drawing/2014/main" id="{58C2179C-1BB1-19C4-0E6B-242B996E1968}"/>
+              </a:ext>
+            </a:extLst>
+          </p:cNvPr>
+          <p:cNvCxnSpPr/>
+          <p:nvPr/>
+        </p:nvCxnSpPr>
+        <p:spPr>
+          <a:xfrm rot="10800000" flipV="1">
+            <a:off x="4941534" y="2120625"/>
+            <a:ext cx="2918791" cy="2605642"/>
+          </a:xfrm>
+          <a:prstGeom prst="bentConnector3">
+            <a:avLst>
+              <a:gd name="adj1" fmla="val 100069"/>
+            </a:avLst>
+          </a:prstGeom>
+          <a:ln>
+            <a:tailEnd type="triangle"/>
+          </a:ln>
+        </p:spPr>
+        <p:style>
+          <a:lnRef idx="2">
+            <a:schemeClr val="dk1"/>
+          </a:lnRef>
+          <a:fillRef idx="0">
+            <a:schemeClr val="dk1"/>
+          </a:fillRef>
+          <a:effectRef idx="1">
+            <a:schemeClr val="dk1"/>
+          </a:effectRef>
+          <a:fontRef idx="minor">
+            <a:schemeClr val="tx1"/>
+          </a:fontRef>
+        </p:style>
+      </p:cxnSp>
+      <p:cxnSp>
+        <p:nvCxnSpPr>
+          <p:cNvPr id="31" name="Straight Arrow Connector 88">
+            <a:extLst>
+              <a:ext uri="{FF2B5EF4-FFF2-40B4-BE49-F238E27FC236}">
+                <a16:creationId xmlns:a16="http://schemas.microsoft.com/office/drawing/2014/main" id="{D12D7218-6A25-0CD2-F0D5-3631A4272FD7}"/>
+              </a:ext>
+            </a:extLst>
+          </p:cNvPr>
+          <p:cNvCxnSpPr/>
+          <p:nvPr/>
+        </p:nvCxnSpPr>
+        <p:spPr>
+          <a:xfrm flipV="1">
+            <a:off x="6412524" y="2316150"/>
+            <a:ext cx="1545771" cy="1729368"/>
+          </a:xfrm>
+          <a:prstGeom prst="straightConnector1">
+            <a:avLst/>
+          </a:prstGeom>
+          <a:ln>
+            <a:tailEnd type="triangle"/>
+          </a:ln>
+        </p:spPr>
+        <p:style>
+          <a:lnRef idx="2">
+            <a:schemeClr val="dk1"/>
+          </a:lnRef>
+          <a:fillRef idx="0">
+            <a:schemeClr val="dk1"/>
+          </a:fillRef>
+          <a:effectRef idx="1">
+            <a:schemeClr val="dk1"/>
+          </a:effectRef>
+          <a:fontRef idx="minor">
+            <a:schemeClr val="tx1"/>
+          </a:fontRef>
+        </p:style>
+      </p:cxnSp>
+      <p:sp>
+        <p:nvSpPr>
+          <p:cNvPr id="32" name="TextBox 92">
+            <a:extLst>
+              <a:ext uri="{FF2B5EF4-FFF2-40B4-BE49-F238E27FC236}">
+                <a16:creationId xmlns:a16="http://schemas.microsoft.com/office/drawing/2014/main" id="{15CD0A0D-1074-FE09-2F24-CF3E071AEE62}"/>
+              </a:ext>
+            </a:extLst>
+          </p:cNvPr>
+          <p:cNvSpPr txBox="1"/>
+          <p:nvPr/>
+        </p:nvSpPr>
+        <p:spPr>
+          <a:xfrm>
+            <a:off x="1465133" y="2266867"/>
+            <a:ext cx="396993" cy="553998"/>
+          </a:xfrm>
+          <a:prstGeom prst="rect">
+            <a:avLst/>
+          </a:prstGeom>
+          <a:noFill/>
+        </p:spPr>
+        <p:txBody>
+          <a:bodyPr wrap="square" rtlCol="0">
+            <a:spAutoFit/>
+          </a:bodyPr>
+          <a:lstStyle/>
+          <a:p>
+            <a:r>
+              <a:rPr lang="en-SG" sz="1200" dirty="0"/>
+              <a:t>② </a:t>
+            </a:r>
+          </a:p>
+          <a:p>
+            <a:endParaRPr lang="en-US" dirty="0"/>
+          </a:p>
+        </p:txBody>
+      </p:sp>
+      <p:sp>
+        <p:nvSpPr>
+          <p:cNvPr id="33" name="TextBox 93">
+            <a:extLst>
+              <a:ext uri="{FF2B5EF4-FFF2-40B4-BE49-F238E27FC236}">
+                <a16:creationId xmlns:a16="http://schemas.microsoft.com/office/drawing/2014/main" id="{FA61EC19-68E9-DC0E-CD12-5F0C9CFF8F63}"/>
+              </a:ext>
+            </a:extLst>
+          </p:cNvPr>
+          <p:cNvSpPr txBox="1"/>
+          <p:nvPr/>
+        </p:nvSpPr>
+        <p:spPr>
+          <a:xfrm>
+            <a:off x="1406752" y="4906468"/>
+            <a:ext cx="473529" cy="276999"/>
+          </a:xfrm>
+          <a:prstGeom prst="rect">
+            <a:avLst/>
+          </a:prstGeom>
+          <a:noFill/>
+        </p:spPr>
+        <p:txBody>
+          <a:bodyPr wrap="square" rtlCol="0">
+            <a:spAutoFit/>
+          </a:bodyPr>
+          <a:lstStyle/>
+          <a:p>
+            <a:r>
+              <a:rPr lang="en-SG" sz="1200" dirty="0"/>
+              <a:t>④</a:t>
+            </a:r>
+          </a:p>
+        </p:txBody>
+      </p:sp>
+      <p:sp>
+        <p:nvSpPr>
+          <p:cNvPr id="34" name="TextBox 33">
+            <a:extLst>
+              <a:ext uri="{FF2B5EF4-FFF2-40B4-BE49-F238E27FC236}">
+                <a16:creationId xmlns:a16="http://schemas.microsoft.com/office/drawing/2014/main" id="{9A2AF04B-FA45-BDFC-1678-EB0A64EDE79E}"/>
+              </a:ext>
+            </a:extLst>
+          </p:cNvPr>
+          <p:cNvSpPr txBox="1"/>
+          <p:nvPr/>
+        </p:nvSpPr>
+        <p:spPr>
+          <a:xfrm>
+            <a:off x="1180658" y="6377518"/>
+            <a:ext cx="10724667" cy="369332"/>
+          </a:xfrm>
+          <a:prstGeom prst="rect">
+            <a:avLst/>
+          </a:prstGeom>
+          <a:noFill/>
+        </p:spPr>
+        <p:txBody>
+          <a:bodyPr wrap="none" rtlCol="0">
+            <a:spAutoFit/>
+          </a:bodyPr>
+          <a:lstStyle/>
+          <a:p>
+            <a:r>
+              <a:rPr lang="en-US" i="1" dirty="0">
+                <a:solidFill>
+                  <a:srgbClr val="7030A0"/>
+                </a:solidFill>
+              </a:rPr>
+              <a:t>NOTE: The liquidation model determines the optimal liquidation boundary based on system parameters </a:t>
+            </a:r>
+            <a:r>
+              <a:rPr lang="en-US" altLang="zh-CN" i="1" dirty="0">
+                <a:solidFill>
+                  <a:srgbClr val="7030A0"/>
+                </a:solidFill>
+              </a:rPr>
+              <a:t>for users</a:t>
+            </a:r>
+            <a:r>
+              <a:rPr lang="en-US" i="1" dirty="0">
+                <a:solidFill>
+                  <a:srgbClr val="7030A0"/>
+                </a:solidFill>
+              </a:rPr>
+              <a:t>.</a:t>
+            </a:r>
+          </a:p>
+        </p:txBody>
+      </p:sp>
+    </p:spTree>
+    <p:extLst>
+      <p:ext uri="{BB962C8B-B14F-4D97-AF65-F5344CB8AC3E}">
+        <p14:creationId xmlns:p14="http://schemas.microsoft.com/office/powerpoint/2010/main" val="3157216977"/>
+      </p:ext>
+    </p:extLst>
+  </p:cSld>
+  <p:clrMapOvr>
+    <a:masterClrMapping/>
+  </p:clrMapOvr>
+</p:sld>
+</file>
+
+<file path=ppt/slides/slide11.xml><?xml version="1.0" encoding="utf-8"?>
+<p:sld xmlns:a="http://schemas.openxmlformats.org/drawingml/2006/main" xmlns:r="http://schemas.openxmlformats.org/officeDocument/2006/relationships" xmlns:p="http://schemas.openxmlformats.org/presentationml/2006/main">
+  <p:cSld>
+    <p:spTree>
+      <p:nvGrpSpPr>
+        <p:cNvPr id="1" name=""/>
+        <p:cNvGrpSpPr/>
+        <p:nvPr/>
+      </p:nvGrpSpPr>
+      <p:grpSpPr>
+        <a:xfrm>
+          <a:off x="0" y="0"/>
+          <a:ext cx="0" cy="0"/>
+          <a:chOff x="0" y="0"/>
+          <a:chExt cx="0" cy="0"/>
+        </a:xfrm>
+      </p:grpSpPr>
+      <p:sp>
+        <p:nvSpPr>
+          <p:cNvPr id="2" name="Title 1">
+            <a:extLst>
+              <a:ext uri="{FF2B5EF4-FFF2-40B4-BE49-F238E27FC236}">
                 <a16:creationId xmlns:a16="http://schemas.microsoft.com/office/drawing/2014/main" id="{4A767B45-05E2-AAE8-7FC6-E1D392E16DE0}"/>
               </a:ext>
             </a:extLst>
@@ -19226,7 +20645,7 @@
 </p:sld>
 </file>
 
-<file path=ppt/slides/slide11.xml><?xml version="1.0" encoding="utf-8"?>
+<file path=ppt/slides/slide12.xml><?xml version="1.0" encoding="utf-8"?>
 <p:sld xmlns:a="http://schemas.openxmlformats.org/drawingml/2006/main" xmlns:r="http://schemas.openxmlformats.org/officeDocument/2006/relationships" xmlns:p="http://schemas.openxmlformats.org/presentationml/2006/main">
   <p:cSld>
     <p:spTree>
@@ -19760,7 +21179,7 @@
 </p:sld>
 </file>
 
-<file path=ppt/slides/slide12.xml><?xml version="1.0" encoding="utf-8"?>
+<file path=ppt/slides/slide13.xml><?xml version="1.0" encoding="utf-8"?>
 <p:sld xmlns:a="http://schemas.openxmlformats.org/drawingml/2006/main" xmlns:r="http://schemas.openxmlformats.org/officeDocument/2006/relationships" xmlns:p="http://schemas.openxmlformats.org/presentationml/2006/main">
   <p:cSld>
     <p:spTree>
@@ -19943,7 +21362,7 @@
 </p:sld>
 </file>
 
-<file path=ppt/slides/slide13.xml><?xml version="1.0" encoding="utf-8"?>
+<file path=ppt/slides/slide14.xml><?xml version="1.0" encoding="utf-8"?>
 <p:sld xmlns:a="http://schemas.openxmlformats.org/drawingml/2006/main" xmlns:r="http://schemas.openxmlformats.org/officeDocument/2006/relationships" xmlns:p="http://schemas.openxmlformats.org/presentationml/2006/main">
   <p:cSld>
     <p:spTree>
@@ -20121,326 +21540,6 @@
     <p:extLst>
       <p:ext uri="{BB962C8B-B14F-4D97-AF65-F5344CB8AC3E}">
         <p14:creationId xmlns:p14="http://schemas.microsoft.com/office/powerpoint/2010/main" val="3100315756"/>
-      </p:ext>
-    </p:extLst>
-  </p:cSld>
-  <p:clrMapOvr>
-    <a:masterClrMapping/>
-  </p:clrMapOvr>
-</p:sld>
-</file>
-
-<file path=ppt/slides/slide14.xml><?xml version="1.0" encoding="utf-8"?>
-<p:sld xmlns:a="http://schemas.openxmlformats.org/drawingml/2006/main" xmlns:r="http://schemas.openxmlformats.org/officeDocument/2006/relationships" xmlns:p="http://schemas.openxmlformats.org/presentationml/2006/main">
-  <p:cSld>
-    <p:spTree>
-      <p:nvGrpSpPr>
-        <p:cNvPr id="1" name=""/>
-        <p:cNvGrpSpPr/>
-        <p:nvPr/>
-      </p:nvGrpSpPr>
-      <p:grpSpPr>
-        <a:xfrm>
-          <a:off x="0" y="0"/>
-          <a:ext cx="0" cy="0"/>
-          <a:chOff x="0" y="0"/>
-          <a:chExt cx="0" cy="0"/>
-        </a:xfrm>
-      </p:grpSpPr>
-      <p:sp>
-        <p:nvSpPr>
-          <p:cNvPr id="2" name="Title 1">
-            <a:extLst>
-              <a:ext uri="{FF2B5EF4-FFF2-40B4-BE49-F238E27FC236}">
-                <a16:creationId xmlns:a16="http://schemas.microsoft.com/office/drawing/2014/main" id="{397F6BE4-5A85-7179-E54C-A91E0D27AA39}"/>
-              </a:ext>
-            </a:extLst>
-          </p:cNvPr>
-          <p:cNvSpPr>
-            <a:spLocks noGrp="1"/>
-          </p:cNvSpPr>
-          <p:nvPr>
-            <p:ph type="title"/>
-          </p:nvPr>
-        </p:nvSpPr>
-        <p:spPr/>
-        <p:txBody>
-          <a:bodyPr/>
-          <a:lstStyle/>
-          <a:p>
-            <a:r>
-              <a:rPr lang="en-US" dirty="0"/>
-              <a:t>Smart Contract</a:t>
-            </a:r>
-          </a:p>
-        </p:txBody>
-      </p:sp>
-      <p:sp>
-        <p:nvSpPr>
-          <p:cNvPr id="3" name="Content Placeholder 2">
-            <a:extLst>
-              <a:ext uri="{FF2B5EF4-FFF2-40B4-BE49-F238E27FC236}">
-                <a16:creationId xmlns:a16="http://schemas.microsoft.com/office/drawing/2014/main" id="{84A97270-B1B6-358E-F322-55E5521D2F41}"/>
-              </a:ext>
-            </a:extLst>
-          </p:cNvPr>
-          <p:cNvSpPr>
-            <a:spLocks noGrp="1"/>
-          </p:cNvSpPr>
-          <p:nvPr>
-            <p:ph idx="1"/>
-          </p:nvPr>
-        </p:nvSpPr>
-        <p:spPr/>
-        <p:txBody>
-          <a:bodyPr/>
-          <a:lstStyle/>
-          <a:p>
-            <a:r>
-              <a:rPr lang="en-US" dirty="0" err="1"/>
-              <a:t>TrancheVault</a:t>
-            </a:r>
-            <a:r>
-              <a:rPr lang="en-US" dirty="0"/>
-              <a:t>:</a:t>
-            </a:r>
-            <a:r>
-              <a:rPr lang="zh-CN" altLang="en-US" dirty="0"/>
-              <a:t> </a:t>
-            </a:r>
-            <a:r>
-              <a:rPr lang="en-US" altLang="zh-CN" i="1" dirty="0">
-                <a:solidFill>
-                  <a:schemeClr val="bg1">
-                    <a:lumMod val="65000"/>
-                  </a:schemeClr>
-                </a:solidFill>
-              </a:rPr>
-              <a:t>Core minting and burn function</a:t>
-            </a:r>
-          </a:p>
-          <a:p>
-            <a:pPr lvl="1">
-              <a:buFont typeface="Wingdings" panose="05000000000000000000" pitchFamily="2" charset="2"/>
-              <a:buChar char="ü"/>
-            </a:pPr>
-            <a:r>
-              <a:rPr lang="en-US" sz="2000" dirty="0" err="1">
-                <a:solidFill>
-                  <a:srgbClr val="0070C0"/>
-                </a:solidFill>
-              </a:rPr>
-              <a:t>previewMint</a:t>
-            </a:r>
-            <a:r>
-              <a:rPr lang="en-US" sz="2000" dirty="0">
-                <a:solidFill>
-                  <a:srgbClr val="0070C0"/>
-                </a:solidFill>
-              </a:rPr>
-              <a:t>/Mint(</a:t>
-            </a:r>
-            <a:r>
-              <a:rPr lang="en-US" altLang="zh-CN" sz="2000" dirty="0">
-                <a:solidFill>
-                  <a:srgbClr val="0070C0"/>
-                </a:solidFill>
-              </a:rPr>
-              <a:t>can be called by router</a:t>
-            </a:r>
-            <a:r>
-              <a:rPr lang="en-US" sz="2000" dirty="0">
-                <a:solidFill>
-                  <a:srgbClr val="0070C0"/>
-                </a:solidFill>
-              </a:rPr>
-              <a:t>)</a:t>
-            </a:r>
-          </a:p>
-          <a:p>
-            <a:pPr lvl="1">
-              <a:buFont typeface="Wingdings" panose="05000000000000000000" pitchFamily="2" charset="2"/>
-              <a:buChar char="ü"/>
-            </a:pPr>
-            <a:r>
-              <a:rPr lang="en-US" sz="2000" dirty="0" err="1">
-                <a:solidFill>
-                  <a:srgbClr val="0070C0"/>
-                </a:solidFill>
-              </a:rPr>
-              <a:t>previewBurn</a:t>
-            </a:r>
-            <a:r>
-              <a:rPr lang="en-US" sz="2000" dirty="0">
-                <a:solidFill>
-                  <a:srgbClr val="0070C0"/>
-                </a:solidFill>
-              </a:rPr>
-              <a:t>/Burn(only called by user)</a:t>
-            </a:r>
-          </a:p>
-          <a:p>
-            <a:pPr lvl="1">
-              <a:buFont typeface="Wingdings" panose="05000000000000000000" pitchFamily="2" charset="2"/>
-              <a:buChar char="ü"/>
-            </a:pPr>
-            <a:r>
-              <a:rPr lang="en-US" sz="2000" dirty="0" err="1">
-                <a:solidFill>
-                  <a:srgbClr val="0070C0"/>
-                </a:solidFill>
-              </a:rPr>
-              <a:t>getLeverageTokenInfo</a:t>
-            </a:r>
-            <a:endParaRPr lang="en-US" sz="2000" dirty="0">
-              <a:solidFill>
-                <a:srgbClr val="0070C0"/>
-              </a:solidFill>
-            </a:endParaRPr>
-          </a:p>
-          <a:p>
-            <a:r>
-              <a:rPr lang="en-US" dirty="0"/>
-              <a:t>Treasury: </a:t>
-            </a:r>
-            <a:r>
-              <a:rPr lang="en-US" i="1" dirty="0">
-                <a:solidFill>
-                  <a:schemeClr val="bg1">
-                    <a:lumMod val="65000"/>
-                  </a:schemeClr>
-                </a:solidFill>
-              </a:rPr>
-              <a:t>Store underlying assets</a:t>
-            </a:r>
-          </a:p>
-          <a:p>
-            <a:r>
-              <a:rPr lang="en-US" dirty="0" err="1"/>
-              <a:t>F</a:t>
-            </a:r>
-            <a:r>
-              <a:rPr lang="en-US" altLang="zh-CN" dirty="0" err="1"/>
-              <a:t>eeTreasury</a:t>
-            </a:r>
-            <a:r>
-              <a:rPr lang="en-US" altLang="zh-CN" dirty="0"/>
-              <a:t>: </a:t>
-            </a:r>
-            <a:r>
-              <a:rPr lang="en-US" altLang="zh-CN" i="1" dirty="0">
-                <a:solidFill>
-                  <a:schemeClr val="bg1">
-                    <a:lumMod val="65000"/>
-                  </a:schemeClr>
-                </a:solidFill>
-              </a:rPr>
-              <a:t>Store all protocol income</a:t>
-            </a:r>
-          </a:p>
-          <a:p>
-            <a:pPr lvl="1">
-              <a:buFont typeface="Wingdings" panose="05000000000000000000" pitchFamily="2" charset="2"/>
-              <a:buChar char="ü"/>
-            </a:pPr>
-            <a:r>
-              <a:rPr lang="en-US" sz="2000" i="1" dirty="0">
-                <a:solidFill>
-                  <a:srgbClr val="0070C0"/>
-                </a:solidFill>
-              </a:rPr>
-              <a:t>Mint/B</a:t>
-            </a:r>
-            <a:r>
-              <a:rPr lang="en-US" altLang="zh-CN" sz="2000" i="1" dirty="0">
-                <a:solidFill>
-                  <a:srgbClr val="0070C0"/>
-                </a:solidFill>
-              </a:rPr>
-              <a:t>urn fee </a:t>
-            </a:r>
-            <a:r>
-              <a:rPr lang="en-US" altLang="zh-CN" sz="2000" i="1" dirty="0">
-                <a:solidFill>
-                  <a:srgbClr val="0070C0"/>
-                </a:solidFill>
-                <a:sym typeface="Wingdings" panose="05000000000000000000" pitchFamily="2" charset="2"/>
-              </a:rPr>
-              <a:t> underlying</a:t>
-            </a:r>
-          </a:p>
-          <a:p>
-            <a:pPr lvl="1">
-              <a:buFont typeface="Wingdings" panose="05000000000000000000" pitchFamily="2" charset="2"/>
-              <a:buChar char="ü"/>
-            </a:pPr>
-            <a:r>
-              <a:rPr lang="en-US" sz="2000" i="1" dirty="0">
-                <a:solidFill>
-                  <a:srgbClr val="0070C0"/>
-                </a:solidFill>
-                <a:sym typeface="Wingdings" panose="05000000000000000000" pitchFamily="2" charset="2"/>
-              </a:rPr>
-              <a:t>AMM swap fee  USDC/S</a:t>
-            </a:r>
-          </a:p>
-          <a:p>
-            <a:pPr lvl="1">
-              <a:buFont typeface="Wingdings" panose="05000000000000000000" pitchFamily="2" charset="2"/>
-              <a:buChar char="ü"/>
-            </a:pPr>
-            <a:r>
-              <a:rPr lang="en-US" sz="2000" i="1" dirty="0">
-                <a:solidFill>
-                  <a:srgbClr val="0070C0"/>
-                </a:solidFill>
-                <a:sym typeface="Wingdings" panose="05000000000000000000" pitchFamily="2" charset="2"/>
-              </a:rPr>
-              <a:t>Accumulated Interest  underlying</a:t>
-            </a:r>
-          </a:p>
-          <a:p>
-            <a:pPr lvl="1">
-              <a:buFont typeface="Wingdings" panose="05000000000000000000" pitchFamily="2" charset="2"/>
-              <a:buChar char="ü"/>
-            </a:pPr>
-            <a:r>
-              <a:rPr lang="en-US" sz="2000" i="1" dirty="0">
-                <a:solidFill>
-                  <a:srgbClr val="0070C0"/>
-                </a:solidFill>
-                <a:sym typeface="Wingdings" panose="05000000000000000000" pitchFamily="2" charset="2"/>
-              </a:rPr>
-              <a:t>Underlying yield  underlying</a:t>
-            </a:r>
-          </a:p>
-          <a:p>
-            <a:pPr lvl="1"/>
-            <a:endParaRPr lang="en-US" i="1" dirty="0">
-              <a:solidFill>
-                <a:schemeClr val="bg1">
-                  <a:lumMod val="65000"/>
-                </a:schemeClr>
-              </a:solidFill>
-            </a:endParaRPr>
-          </a:p>
-          <a:p>
-            <a:endParaRPr lang="en-US" dirty="0"/>
-          </a:p>
-          <a:p>
-            <a:pPr lvl="2"/>
-            <a:endParaRPr lang="en-US" dirty="0"/>
-          </a:p>
-          <a:p>
-            <a:pPr lvl="3"/>
-            <a:endParaRPr lang="en-US" dirty="0"/>
-          </a:p>
-        </p:txBody>
-      </p:sp>
-    </p:spTree>
-    <p:extLst>
-      <p:ext uri="{BB962C8B-B14F-4D97-AF65-F5344CB8AC3E}">
-        <p14:creationId xmlns:p14="http://schemas.microsoft.com/office/powerpoint/2010/main" val="137133440"/>
       </p:ext>
     </p:extLst>
   </p:cSld>
@@ -20517,6 +21616,326 @@
           <a:lstStyle/>
           <a:p>
             <a:r>
+              <a:rPr lang="en-US" dirty="0" err="1"/>
+              <a:t>TrancheVault</a:t>
+            </a:r>
+            <a:r>
+              <a:rPr lang="en-US" dirty="0"/>
+              <a:t>:</a:t>
+            </a:r>
+            <a:r>
+              <a:rPr lang="zh-CN" altLang="en-US" dirty="0"/>
+              <a:t> </a:t>
+            </a:r>
+            <a:r>
+              <a:rPr lang="en-US" altLang="zh-CN" i="1" dirty="0">
+                <a:solidFill>
+                  <a:schemeClr val="bg1">
+                    <a:lumMod val="65000"/>
+                  </a:schemeClr>
+                </a:solidFill>
+              </a:rPr>
+              <a:t>Core minting and burn function</a:t>
+            </a:r>
+          </a:p>
+          <a:p>
+            <a:pPr lvl="1">
+              <a:buFont typeface="Wingdings" panose="05000000000000000000" pitchFamily="2" charset="2"/>
+              <a:buChar char="ü"/>
+            </a:pPr>
+            <a:r>
+              <a:rPr lang="en-US" sz="2000" dirty="0" err="1">
+                <a:solidFill>
+                  <a:srgbClr val="0070C0"/>
+                </a:solidFill>
+              </a:rPr>
+              <a:t>previewMint</a:t>
+            </a:r>
+            <a:r>
+              <a:rPr lang="en-US" sz="2000" dirty="0">
+                <a:solidFill>
+                  <a:srgbClr val="0070C0"/>
+                </a:solidFill>
+              </a:rPr>
+              <a:t>/Mint(</a:t>
+            </a:r>
+            <a:r>
+              <a:rPr lang="en-US" altLang="zh-CN" sz="2000" dirty="0">
+                <a:solidFill>
+                  <a:srgbClr val="0070C0"/>
+                </a:solidFill>
+              </a:rPr>
+              <a:t>can be called by router</a:t>
+            </a:r>
+            <a:r>
+              <a:rPr lang="en-US" sz="2000" dirty="0">
+                <a:solidFill>
+                  <a:srgbClr val="0070C0"/>
+                </a:solidFill>
+              </a:rPr>
+              <a:t>)</a:t>
+            </a:r>
+          </a:p>
+          <a:p>
+            <a:pPr lvl="1">
+              <a:buFont typeface="Wingdings" panose="05000000000000000000" pitchFamily="2" charset="2"/>
+              <a:buChar char="ü"/>
+            </a:pPr>
+            <a:r>
+              <a:rPr lang="en-US" sz="2000" dirty="0" err="1">
+                <a:solidFill>
+                  <a:srgbClr val="0070C0"/>
+                </a:solidFill>
+              </a:rPr>
+              <a:t>previewBurn</a:t>
+            </a:r>
+            <a:r>
+              <a:rPr lang="en-US" sz="2000" dirty="0">
+                <a:solidFill>
+                  <a:srgbClr val="0070C0"/>
+                </a:solidFill>
+              </a:rPr>
+              <a:t>/Burn(only called by user)</a:t>
+            </a:r>
+          </a:p>
+          <a:p>
+            <a:pPr lvl="1">
+              <a:buFont typeface="Wingdings" panose="05000000000000000000" pitchFamily="2" charset="2"/>
+              <a:buChar char="ü"/>
+            </a:pPr>
+            <a:r>
+              <a:rPr lang="en-US" sz="2000" dirty="0" err="1">
+                <a:solidFill>
+                  <a:srgbClr val="0070C0"/>
+                </a:solidFill>
+              </a:rPr>
+              <a:t>getLeverageTokenInfo</a:t>
+            </a:r>
+            <a:endParaRPr lang="en-US" sz="2000" dirty="0">
+              <a:solidFill>
+                <a:srgbClr val="0070C0"/>
+              </a:solidFill>
+            </a:endParaRPr>
+          </a:p>
+          <a:p>
+            <a:r>
+              <a:rPr lang="en-US" dirty="0"/>
+              <a:t>Treasury: </a:t>
+            </a:r>
+            <a:r>
+              <a:rPr lang="en-US" i="1" dirty="0">
+                <a:solidFill>
+                  <a:schemeClr val="bg1">
+                    <a:lumMod val="65000"/>
+                  </a:schemeClr>
+                </a:solidFill>
+              </a:rPr>
+              <a:t>Store underlying assets</a:t>
+            </a:r>
+          </a:p>
+          <a:p>
+            <a:r>
+              <a:rPr lang="en-US" dirty="0" err="1"/>
+              <a:t>F</a:t>
+            </a:r>
+            <a:r>
+              <a:rPr lang="en-US" altLang="zh-CN" dirty="0" err="1"/>
+              <a:t>eeTreasury</a:t>
+            </a:r>
+            <a:r>
+              <a:rPr lang="en-US" altLang="zh-CN" dirty="0"/>
+              <a:t>: </a:t>
+            </a:r>
+            <a:r>
+              <a:rPr lang="en-US" altLang="zh-CN" i="1" dirty="0">
+                <a:solidFill>
+                  <a:schemeClr val="bg1">
+                    <a:lumMod val="65000"/>
+                  </a:schemeClr>
+                </a:solidFill>
+              </a:rPr>
+              <a:t>Store all protocol income</a:t>
+            </a:r>
+          </a:p>
+          <a:p>
+            <a:pPr lvl="1">
+              <a:buFont typeface="Wingdings" panose="05000000000000000000" pitchFamily="2" charset="2"/>
+              <a:buChar char="ü"/>
+            </a:pPr>
+            <a:r>
+              <a:rPr lang="en-US" sz="2000" i="1" dirty="0">
+                <a:solidFill>
+                  <a:srgbClr val="0070C0"/>
+                </a:solidFill>
+              </a:rPr>
+              <a:t>Mint/B</a:t>
+            </a:r>
+            <a:r>
+              <a:rPr lang="en-US" altLang="zh-CN" sz="2000" i="1" dirty="0">
+                <a:solidFill>
+                  <a:srgbClr val="0070C0"/>
+                </a:solidFill>
+              </a:rPr>
+              <a:t>urn fee </a:t>
+            </a:r>
+            <a:r>
+              <a:rPr lang="en-US" altLang="zh-CN" sz="2000" i="1" dirty="0">
+                <a:solidFill>
+                  <a:srgbClr val="0070C0"/>
+                </a:solidFill>
+                <a:sym typeface="Wingdings" panose="05000000000000000000" pitchFamily="2" charset="2"/>
+              </a:rPr>
+              <a:t> underlying</a:t>
+            </a:r>
+          </a:p>
+          <a:p>
+            <a:pPr lvl="1">
+              <a:buFont typeface="Wingdings" panose="05000000000000000000" pitchFamily="2" charset="2"/>
+              <a:buChar char="ü"/>
+            </a:pPr>
+            <a:r>
+              <a:rPr lang="en-US" sz="2000" i="1" dirty="0">
+                <a:solidFill>
+                  <a:srgbClr val="0070C0"/>
+                </a:solidFill>
+                <a:sym typeface="Wingdings" panose="05000000000000000000" pitchFamily="2" charset="2"/>
+              </a:rPr>
+              <a:t>AMM swap fee  USDC/S</a:t>
+            </a:r>
+          </a:p>
+          <a:p>
+            <a:pPr lvl="1">
+              <a:buFont typeface="Wingdings" panose="05000000000000000000" pitchFamily="2" charset="2"/>
+              <a:buChar char="ü"/>
+            </a:pPr>
+            <a:r>
+              <a:rPr lang="en-US" sz="2000" i="1" dirty="0">
+                <a:solidFill>
+                  <a:srgbClr val="0070C0"/>
+                </a:solidFill>
+                <a:sym typeface="Wingdings" panose="05000000000000000000" pitchFamily="2" charset="2"/>
+              </a:rPr>
+              <a:t>Accumulated Interest  underlying</a:t>
+            </a:r>
+          </a:p>
+          <a:p>
+            <a:pPr lvl="1">
+              <a:buFont typeface="Wingdings" panose="05000000000000000000" pitchFamily="2" charset="2"/>
+              <a:buChar char="ü"/>
+            </a:pPr>
+            <a:r>
+              <a:rPr lang="en-US" sz="2000" i="1" dirty="0">
+                <a:solidFill>
+                  <a:srgbClr val="0070C0"/>
+                </a:solidFill>
+                <a:sym typeface="Wingdings" panose="05000000000000000000" pitchFamily="2" charset="2"/>
+              </a:rPr>
+              <a:t>Underlying yield  underlying</a:t>
+            </a:r>
+          </a:p>
+          <a:p>
+            <a:pPr lvl="1"/>
+            <a:endParaRPr lang="en-US" i="1" dirty="0">
+              <a:solidFill>
+                <a:schemeClr val="bg1">
+                  <a:lumMod val="65000"/>
+                </a:schemeClr>
+              </a:solidFill>
+            </a:endParaRPr>
+          </a:p>
+          <a:p>
+            <a:endParaRPr lang="en-US" dirty="0"/>
+          </a:p>
+          <a:p>
+            <a:pPr lvl="2"/>
+            <a:endParaRPr lang="en-US" dirty="0"/>
+          </a:p>
+          <a:p>
+            <a:pPr lvl="3"/>
+            <a:endParaRPr lang="en-US" dirty="0"/>
+          </a:p>
+        </p:txBody>
+      </p:sp>
+    </p:spTree>
+    <p:extLst>
+      <p:ext uri="{BB962C8B-B14F-4D97-AF65-F5344CB8AC3E}">
+        <p14:creationId xmlns:p14="http://schemas.microsoft.com/office/powerpoint/2010/main" val="137133440"/>
+      </p:ext>
+    </p:extLst>
+  </p:cSld>
+  <p:clrMapOvr>
+    <a:masterClrMapping/>
+  </p:clrMapOvr>
+</p:sld>
+</file>
+
+<file path=ppt/slides/slide16.xml><?xml version="1.0" encoding="utf-8"?>
+<p:sld xmlns:a="http://schemas.openxmlformats.org/drawingml/2006/main" xmlns:r="http://schemas.openxmlformats.org/officeDocument/2006/relationships" xmlns:p="http://schemas.openxmlformats.org/presentationml/2006/main">
+  <p:cSld>
+    <p:spTree>
+      <p:nvGrpSpPr>
+        <p:cNvPr id="1" name=""/>
+        <p:cNvGrpSpPr/>
+        <p:nvPr/>
+      </p:nvGrpSpPr>
+      <p:grpSpPr>
+        <a:xfrm>
+          <a:off x="0" y="0"/>
+          <a:ext cx="0" cy="0"/>
+          <a:chOff x="0" y="0"/>
+          <a:chExt cx="0" cy="0"/>
+        </a:xfrm>
+      </p:grpSpPr>
+      <p:sp>
+        <p:nvSpPr>
+          <p:cNvPr id="2" name="Title 1">
+            <a:extLst>
+              <a:ext uri="{FF2B5EF4-FFF2-40B4-BE49-F238E27FC236}">
+                <a16:creationId xmlns:a16="http://schemas.microsoft.com/office/drawing/2014/main" id="{397F6BE4-5A85-7179-E54C-A91E0D27AA39}"/>
+              </a:ext>
+            </a:extLst>
+          </p:cNvPr>
+          <p:cNvSpPr>
+            <a:spLocks noGrp="1"/>
+          </p:cNvSpPr>
+          <p:nvPr>
+            <p:ph type="title"/>
+          </p:nvPr>
+        </p:nvSpPr>
+        <p:spPr/>
+        <p:txBody>
+          <a:bodyPr/>
+          <a:lstStyle/>
+          <a:p>
+            <a:r>
+              <a:rPr lang="en-US" dirty="0"/>
+              <a:t>Smart Contract</a:t>
+            </a:r>
+          </a:p>
+        </p:txBody>
+      </p:sp>
+      <p:sp>
+        <p:nvSpPr>
+          <p:cNvPr id="3" name="Content Placeholder 2">
+            <a:extLst>
+              <a:ext uri="{FF2B5EF4-FFF2-40B4-BE49-F238E27FC236}">
+                <a16:creationId xmlns:a16="http://schemas.microsoft.com/office/drawing/2014/main" id="{84A97270-B1B6-358E-F322-55E5521D2F41}"/>
+              </a:ext>
+            </a:extLst>
+          </p:cNvPr>
+          <p:cNvSpPr>
+            <a:spLocks noGrp="1"/>
+          </p:cNvSpPr>
+          <p:nvPr>
+            <p:ph idx="1"/>
+          </p:nvPr>
+        </p:nvSpPr>
+        <p:spPr/>
+        <p:txBody>
+          <a:bodyPr/>
+          <a:lstStyle/>
+          <a:p>
+            <a:r>
               <a:rPr lang="en-US" dirty="0"/>
               <a:t>Tokens</a:t>
             </a:r>
@@ -20571,7 +21990,7 @@
 </p:sld>
 </file>
 
-<file path=ppt/slides/slide16.xml><?xml version="1.0" encoding="utf-8"?>
+<file path=ppt/slides/slide17.xml><?xml version="1.0" encoding="utf-8"?>
 <p:sld xmlns:a="http://schemas.openxmlformats.org/drawingml/2006/main" xmlns:r="http://schemas.openxmlformats.org/officeDocument/2006/relationships" xmlns:p="http://schemas.openxmlformats.org/presentationml/2006/main">
   <p:cSld>
     <p:spTree>
@@ -20660,593 +22079,6 @@
 </p:sld>
 </file>
 
-<file path=ppt/slides/slide17.xml><?xml version="1.0" encoding="utf-8"?>
-<p:sld xmlns:a="http://schemas.openxmlformats.org/drawingml/2006/main" xmlns:r="http://schemas.openxmlformats.org/officeDocument/2006/relationships" xmlns:p="http://schemas.openxmlformats.org/presentationml/2006/main">
-  <p:cSld>
-    <p:spTree>
-      <p:nvGrpSpPr>
-        <p:cNvPr id="1" name=""/>
-        <p:cNvGrpSpPr/>
-        <p:nvPr/>
-      </p:nvGrpSpPr>
-      <p:grpSpPr>
-        <a:xfrm>
-          <a:off x="0" y="0"/>
-          <a:ext cx="0" cy="0"/>
-          <a:chOff x="0" y="0"/>
-          <a:chExt cx="0" cy="0"/>
-        </a:xfrm>
-      </p:grpSpPr>
-      <p:sp>
-        <p:nvSpPr>
-          <p:cNvPr id="2" name="Title 1">
-            <a:extLst>
-              <a:ext uri="{FF2B5EF4-FFF2-40B4-BE49-F238E27FC236}">
-                <a16:creationId xmlns:a16="http://schemas.microsoft.com/office/drawing/2014/main" id="{90B6D504-FE35-8119-7951-AB857D26A010}"/>
-              </a:ext>
-            </a:extLst>
-          </p:cNvPr>
-          <p:cNvSpPr>
-            <a:spLocks noGrp="1"/>
-          </p:cNvSpPr>
-          <p:nvPr>
-            <p:ph type="title"/>
-          </p:nvPr>
-        </p:nvSpPr>
-        <p:spPr/>
-        <p:txBody>
-          <a:bodyPr/>
-          <a:lstStyle/>
-          <a:p>
-            <a:r>
-              <a:rPr lang="zh-CN" altLang="en-US" dirty="0"/>
-              <a:t>智能合約</a:t>
-            </a:r>
-            <a:r>
-              <a:rPr lang="en-US" altLang="zh-CN" dirty="0"/>
-              <a:t>(</a:t>
-            </a:r>
-            <a:r>
-              <a:rPr lang="zh-CN" altLang="en-US" dirty="0"/>
-              <a:t>規範</a:t>
-            </a:r>
-            <a:r>
-              <a:rPr lang="en-US" altLang="zh-CN" dirty="0"/>
-              <a:t>,</a:t>
-            </a:r>
-            <a:r>
-              <a:rPr lang="zh-CN" altLang="en-US" dirty="0"/>
-              <a:t>架構</a:t>
-            </a:r>
-            <a:r>
-              <a:rPr lang="en-US" altLang="zh-CN" dirty="0"/>
-              <a:t>,</a:t>
-            </a:r>
-            <a:r>
-              <a:rPr lang="zh-CN" altLang="en-US" dirty="0"/>
-              <a:t>部署</a:t>
-            </a:r>
-            <a:r>
-              <a:rPr lang="en-US" altLang="zh-CN" dirty="0"/>
-              <a:t>)</a:t>
-            </a:r>
-            <a:endParaRPr lang="en-US" dirty="0"/>
-          </a:p>
-        </p:txBody>
-      </p:sp>
-      <p:sp>
-        <p:nvSpPr>
-          <p:cNvPr id="3" name="Content Placeholder 2">
-            <a:extLst>
-              <a:ext uri="{FF2B5EF4-FFF2-40B4-BE49-F238E27FC236}">
-                <a16:creationId xmlns:a16="http://schemas.microsoft.com/office/drawing/2014/main" id="{E60A29B1-67F6-80ED-2357-1F67CB3A3871}"/>
-              </a:ext>
-            </a:extLst>
-          </p:cNvPr>
-          <p:cNvSpPr>
-            <a:spLocks noGrp="1"/>
-          </p:cNvSpPr>
-          <p:nvPr>
-            <p:ph idx="1"/>
-          </p:nvPr>
-        </p:nvSpPr>
-        <p:spPr/>
-        <p:txBody>
-          <a:bodyPr/>
-          <a:lstStyle/>
-          <a:p>
-            <a:r>
-              <a:rPr lang="zh-CN" altLang="en-US" sz="2000" b="1" dirty="0">
-                <a:latin typeface="PMingLiU" panose="02020500000000000000" pitchFamily="18" charset="-120"/>
-                <a:ea typeface="PMingLiU" panose="02020500000000000000" pitchFamily="18" charset="-120"/>
-              </a:rPr>
-              <a:t>智能合約順序</a:t>
-            </a:r>
-            <a:endParaRPr lang="en-US" altLang="zh-CN" sz="2000" b="1" dirty="0">
-              <a:latin typeface="PMingLiU" panose="02020500000000000000" pitchFamily="18" charset="-120"/>
-              <a:ea typeface="PMingLiU" panose="02020500000000000000" pitchFamily="18" charset="-120"/>
-            </a:endParaRPr>
-          </a:p>
-          <a:p>
-            <a:pPr lvl="1"/>
-            <a:r>
-              <a:rPr lang="en-US" altLang="zh-CN" sz="1600" b="1" dirty="0">
-                <a:latin typeface="PMingLiU" panose="02020500000000000000" pitchFamily="18" charset="-120"/>
-                <a:ea typeface="PMingLiU" panose="02020500000000000000" pitchFamily="18" charset="-120"/>
-              </a:rPr>
-              <a:t>Using </a:t>
-            </a:r>
-            <a:r>
-              <a:rPr lang="en-US" altLang="zh-CN" sz="1600" b="1" dirty="0">
-                <a:latin typeface="PMingLiU" panose="02020500000000000000" pitchFamily="18" charset="-120"/>
-                <a:ea typeface="PMingLiU" panose="02020500000000000000" pitchFamily="18" charset="-120"/>
-                <a:sym typeface="Wingdings" panose="05000000000000000000" pitchFamily="2" charset="2"/>
-              </a:rPr>
-              <a:t> </a:t>
-            </a:r>
-            <a:r>
-              <a:rPr lang="en-US" altLang="zh-CN" sz="1600" b="1" dirty="0" err="1">
-                <a:latin typeface="PMingLiU" panose="02020500000000000000" pitchFamily="18" charset="-120"/>
-                <a:ea typeface="PMingLiU" panose="02020500000000000000" pitchFamily="18" charset="-120"/>
-                <a:sym typeface="Wingdings" panose="05000000000000000000" pitchFamily="2" charset="2"/>
-              </a:rPr>
-              <a:t>enum</a:t>
-            </a:r>
-            <a:r>
-              <a:rPr lang="en-US" altLang="zh-CN" sz="1600" b="1" dirty="0">
-                <a:latin typeface="PMingLiU" panose="02020500000000000000" pitchFamily="18" charset="-120"/>
-                <a:ea typeface="PMingLiU" panose="02020500000000000000" pitchFamily="18" charset="-120"/>
-                <a:sym typeface="Wingdings" panose="05000000000000000000" pitchFamily="2" charset="2"/>
-              </a:rPr>
-              <a:t>  </a:t>
-            </a:r>
-            <a:r>
-              <a:rPr lang="en-US" altLang="zh-CN" sz="1600" b="1" i="1" dirty="0">
-                <a:solidFill>
-                  <a:srgbClr val="C00000"/>
-                </a:solidFill>
-                <a:latin typeface="PMingLiU" panose="02020500000000000000" pitchFamily="18" charset="-120"/>
-                <a:ea typeface="PMingLiU" panose="02020500000000000000" pitchFamily="18" charset="-120"/>
-                <a:sym typeface="Wingdings" panose="05000000000000000000" pitchFamily="2" charset="2"/>
-              </a:rPr>
-              <a:t>constant variable  immutable variable general variable  mapping </a:t>
-            </a:r>
-            <a:r>
-              <a:rPr lang="en-US" altLang="zh-CN" sz="1600" b="1" dirty="0">
-                <a:latin typeface="PMingLiU" panose="02020500000000000000" pitchFamily="18" charset="-120"/>
-                <a:ea typeface="PMingLiU" panose="02020500000000000000" pitchFamily="18" charset="-120"/>
-                <a:sym typeface="Wingdings" panose="05000000000000000000" pitchFamily="2" charset="2"/>
-              </a:rPr>
-              <a:t> event  modifier  </a:t>
-            </a:r>
-            <a:r>
-              <a:rPr lang="en-US" altLang="zh-CN" sz="1600" b="1" dirty="0">
-                <a:solidFill>
-                  <a:srgbClr val="00B050"/>
-                </a:solidFill>
-                <a:latin typeface="PMingLiU" panose="02020500000000000000" pitchFamily="18" charset="-120"/>
-                <a:ea typeface="PMingLiU" panose="02020500000000000000" pitchFamily="18" charset="-120"/>
-                <a:sym typeface="Wingdings" panose="05000000000000000000" pitchFamily="2" charset="2"/>
-              </a:rPr>
-              <a:t>external functions  internal functions  view functions</a:t>
-            </a:r>
-            <a:endParaRPr lang="en-US" altLang="zh-TW" sz="1600" b="1" dirty="0">
-              <a:solidFill>
-                <a:srgbClr val="00B050"/>
-              </a:solidFill>
-              <a:latin typeface="PMingLiU" panose="02020500000000000000" pitchFamily="18" charset="-120"/>
-              <a:ea typeface="PMingLiU" panose="02020500000000000000" pitchFamily="18" charset="-120"/>
-            </a:endParaRPr>
-          </a:p>
-          <a:p>
-            <a:r>
-              <a:rPr lang="zh-TW" altLang="en-US" sz="2000" b="1" dirty="0">
-                <a:latin typeface="PMingLiU" panose="02020500000000000000" pitchFamily="18" charset="-120"/>
-                <a:ea typeface="PMingLiU" panose="02020500000000000000" pitchFamily="18" charset="-120"/>
-              </a:rPr>
-              <a:t>模組化設計</a:t>
-            </a:r>
-            <a:endParaRPr lang="en-US" altLang="zh-TW" sz="2000" b="1" dirty="0">
-              <a:latin typeface="PMingLiU" panose="02020500000000000000" pitchFamily="18" charset="-120"/>
-              <a:ea typeface="PMingLiU" panose="02020500000000000000" pitchFamily="18" charset="-120"/>
-            </a:endParaRPr>
-          </a:p>
-          <a:p>
-            <a:pPr lvl="1"/>
-            <a:r>
-              <a:rPr lang="zh-TW" altLang="en-US" sz="1600" dirty="0">
-                <a:latin typeface="PMingLiU" panose="02020500000000000000" pitchFamily="18" charset="-120"/>
-                <a:ea typeface="PMingLiU" panose="02020500000000000000" pitchFamily="18" charset="-120"/>
-              </a:rPr>
-              <a:t>對核心資產、不可變的依賴使用</a:t>
-            </a:r>
-            <a:r>
-              <a:rPr lang="zh-CN" altLang="en-US" sz="1600" dirty="0">
-                <a:latin typeface="PMingLiU" panose="02020500000000000000" pitchFamily="18" charset="-120"/>
-                <a:ea typeface="PMingLiU" panose="02020500000000000000" pitchFamily="18" charset="-120"/>
-              </a:rPr>
-              <a:t>構造</a:t>
-            </a:r>
-            <a:r>
-              <a:rPr lang="zh-TW" altLang="en-US" sz="1600" dirty="0">
-                <a:latin typeface="PMingLiU" panose="02020500000000000000" pitchFamily="18" charset="-120"/>
-                <a:ea typeface="PMingLiU" panose="02020500000000000000" pitchFamily="18" charset="-120"/>
-              </a:rPr>
-              <a:t>函數 </a:t>
-            </a:r>
-            <a:r>
-              <a:rPr lang="en-US" altLang="zh-TW" sz="1600" dirty="0">
-                <a:latin typeface="PMingLiU" panose="02020500000000000000" pitchFamily="18" charset="-120"/>
-                <a:ea typeface="PMingLiU" panose="02020500000000000000" pitchFamily="18" charset="-120"/>
-              </a:rPr>
-              <a:t>+ immutable. </a:t>
-            </a:r>
-            <a:r>
-              <a:rPr lang="zh-CN" altLang="en-US" sz="1600" dirty="0">
-                <a:latin typeface="PMingLiU" panose="02020500000000000000" pitchFamily="18" charset="-120"/>
-                <a:ea typeface="PMingLiU" panose="02020500000000000000" pitchFamily="18" charset="-120"/>
-              </a:rPr>
-              <a:t>如</a:t>
-            </a:r>
-            <a:r>
-              <a:rPr lang="en-US" altLang="zh-CN" sz="1600" dirty="0" err="1">
-                <a:latin typeface="PMingLiU" panose="02020500000000000000" pitchFamily="18" charset="-120"/>
-                <a:ea typeface="PMingLiU" panose="02020500000000000000" pitchFamily="18" charset="-120"/>
-              </a:rPr>
-              <a:t>Stoken</a:t>
-            </a:r>
-            <a:r>
-              <a:rPr lang="en-US" altLang="zh-CN" sz="1600" dirty="0">
-                <a:latin typeface="PMingLiU" panose="02020500000000000000" pitchFamily="18" charset="-120"/>
-                <a:ea typeface="PMingLiU" panose="02020500000000000000" pitchFamily="18" charset="-120"/>
-              </a:rPr>
-              <a:t>, </a:t>
-            </a:r>
-            <a:r>
-              <a:rPr lang="en-US" altLang="zh-CN" sz="1600" dirty="0" err="1">
-                <a:latin typeface="PMingLiU" panose="02020500000000000000" pitchFamily="18" charset="-120"/>
-                <a:ea typeface="PMingLiU" panose="02020500000000000000" pitchFamily="18" charset="-120"/>
-              </a:rPr>
-              <a:t>Ltoken</a:t>
-            </a:r>
-            <a:r>
-              <a:rPr lang="zh-CN" altLang="en-US" sz="1600" dirty="0">
-                <a:latin typeface="PMingLiU" panose="02020500000000000000" pitchFamily="18" charset="-120"/>
-                <a:ea typeface="PMingLiU" panose="02020500000000000000" pitchFamily="18" charset="-120"/>
-              </a:rPr>
-              <a:t>；</a:t>
-            </a:r>
-            <a:endParaRPr lang="en-US" altLang="zh-CN" sz="1600" dirty="0">
-              <a:latin typeface="PMingLiU" panose="02020500000000000000" pitchFamily="18" charset="-120"/>
-              <a:ea typeface="PMingLiU" panose="02020500000000000000" pitchFamily="18" charset="-120"/>
-            </a:endParaRPr>
-          </a:p>
-          <a:p>
-            <a:pPr lvl="1"/>
-            <a:r>
-              <a:rPr lang="zh-CN" altLang="en-US" sz="1600" dirty="0">
-                <a:latin typeface="PMingLiU" panose="02020500000000000000" pitchFamily="18" charset="-120"/>
-                <a:ea typeface="PMingLiU" panose="02020500000000000000" pitchFamily="18" charset="-120"/>
-              </a:rPr>
-              <a:t>對 </a:t>
-            </a:r>
-            <a:r>
-              <a:rPr lang="en-US" sz="1600" dirty="0" err="1">
-                <a:latin typeface="PMingLiU" panose="02020500000000000000" pitchFamily="18" charset="-120"/>
-                <a:ea typeface="PMingLiU" panose="02020500000000000000" pitchFamily="18" charset="-120"/>
-              </a:rPr>
-              <a:t>OracleManager</a:t>
-            </a:r>
-            <a:r>
-              <a:rPr lang="en-US" sz="1600" dirty="0">
-                <a:latin typeface="PMingLiU" panose="02020500000000000000" pitchFamily="18" charset="-120"/>
-                <a:ea typeface="PMingLiU" panose="02020500000000000000" pitchFamily="18" charset="-120"/>
-              </a:rPr>
-              <a:t>、 </a:t>
-            </a:r>
-            <a:r>
-              <a:rPr lang="en-US" sz="1600" dirty="0" err="1">
-                <a:latin typeface="PMingLiU" panose="02020500000000000000" pitchFamily="18" charset="-120"/>
-                <a:ea typeface="PMingLiU" panose="02020500000000000000" pitchFamily="18" charset="-120"/>
-              </a:rPr>
-              <a:t>InterestManager</a:t>
-            </a:r>
-            <a:r>
-              <a:rPr lang="en-US" sz="1600" dirty="0">
-                <a:latin typeface="PMingLiU" panose="02020500000000000000" pitchFamily="18" charset="-120"/>
-                <a:ea typeface="PMingLiU" panose="02020500000000000000" pitchFamily="18" charset="-120"/>
-              </a:rPr>
-              <a:t>、 </a:t>
-            </a:r>
-            <a:r>
-              <a:rPr lang="en-US" sz="1600" dirty="0" err="1">
-                <a:latin typeface="PMingLiU" panose="02020500000000000000" pitchFamily="18" charset="-120"/>
-                <a:ea typeface="PMingLiU" panose="02020500000000000000" pitchFamily="18" charset="-120"/>
-              </a:rPr>
-              <a:t>LiquidationManager</a:t>
-            </a:r>
-            <a:r>
-              <a:rPr lang="en-US" sz="1600" dirty="0">
-                <a:latin typeface="PMingLiU" panose="02020500000000000000" pitchFamily="18" charset="-120"/>
-                <a:ea typeface="PMingLiU" panose="02020500000000000000" pitchFamily="18" charset="-120"/>
-              </a:rPr>
-              <a:t> </a:t>
-            </a:r>
-            <a:r>
-              <a:rPr lang="zh-CN" altLang="en-US" sz="1600" dirty="0">
-                <a:latin typeface="PMingLiU" panose="02020500000000000000" pitchFamily="18" charset="-120"/>
-                <a:ea typeface="PMingLiU" panose="02020500000000000000" pitchFamily="18" charset="-120"/>
-              </a:rPr>
-              <a:t>和 </a:t>
-            </a:r>
-            <a:r>
-              <a:rPr lang="en-US" sz="1600" dirty="0" err="1">
-                <a:latin typeface="PMingLiU" panose="02020500000000000000" pitchFamily="18" charset="-120"/>
-                <a:ea typeface="PMingLiU" panose="02020500000000000000" pitchFamily="18" charset="-120"/>
-              </a:rPr>
-              <a:t>AuctionManager</a:t>
-            </a:r>
-            <a:r>
-              <a:rPr lang="en-US" sz="1600" dirty="0">
-                <a:latin typeface="PMingLiU" panose="02020500000000000000" pitchFamily="18" charset="-120"/>
-                <a:ea typeface="PMingLiU" panose="02020500000000000000" pitchFamily="18" charset="-120"/>
-              </a:rPr>
-              <a:t>  </a:t>
-            </a:r>
-            <a:r>
-              <a:rPr lang="zh-CN" altLang="en-US" sz="1600" dirty="0">
-                <a:latin typeface="PMingLiU" panose="02020500000000000000" pitchFamily="18" charset="-120"/>
-                <a:ea typeface="PMingLiU" panose="02020500000000000000" pitchFamily="18" charset="-120"/>
-              </a:rPr>
-              <a:t>這類邏輯模組，因為 </a:t>
-            </a:r>
-            <a:r>
-              <a:rPr lang="en-US" sz="1600" dirty="0">
-                <a:latin typeface="PMingLiU" panose="02020500000000000000" pitchFamily="18" charset="-120"/>
-                <a:ea typeface="PMingLiU" panose="02020500000000000000" pitchFamily="18" charset="-120"/>
-              </a:rPr>
-              <a:t>DeFi </a:t>
-            </a:r>
-            <a:r>
-              <a:rPr lang="zh-CN" altLang="en-US" sz="1600" dirty="0">
-                <a:latin typeface="PMingLiU" panose="02020500000000000000" pitchFamily="18" charset="-120"/>
-                <a:ea typeface="PMingLiU" panose="02020500000000000000" pitchFamily="18" charset="-120"/>
-              </a:rPr>
-              <a:t>經常需要更新預言機和清算機制，推薦使用 腳本通過 </a:t>
-            </a:r>
-            <a:r>
-              <a:rPr lang="en-US" sz="1600" dirty="0">
-                <a:latin typeface="PMingLiU" panose="02020500000000000000" pitchFamily="18" charset="-120"/>
-                <a:ea typeface="PMingLiU" panose="02020500000000000000" pitchFamily="18" charset="-120"/>
-              </a:rPr>
-              <a:t>Setter </a:t>
-            </a:r>
-            <a:r>
-              <a:rPr lang="zh-CN" altLang="en-US" sz="1600" dirty="0">
-                <a:latin typeface="PMingLiU" panose="02020500000000000000" pitchFamily="18" charset="-120"/>
-                <a:ea typeface="PMingLiU" panose="02020500000000000000" pitchFamily="18" charset="-120"/>
-              </a:rPr>
-              <a:t>函數進行設置（或者使用代理 </a:t>
-            </a:r>
-            <a:r>
-              <a:rPr lang="en-US" sz="1600" dirty="0">
-                <a:latin typeface="PMingLiU" panose="02020500000000000000" pitchFamily="18" charset="-120"/>
-                <a:ea typeface="PMingLiU" panose="02020500000000000000" pitchFamily="18" charset="-120"/>
-              </a:rPr>
-              <a:t>Proxy </a:t>
-            </a:r>
-            <a:r>
-              <a:rPr lang="zh-CN" altLang="en-US" sz="1600" dirty="0">
-                <a:latin typeface="PMingLiU" panose="02020500000000000000" pitchFamily="18" charset="-120"/>
-                <a:ea typeface="PMingLiU" panose="02020500000000000000" pitchFamily="18" charset="-120"/>
-              </a:rPr>
-              <a:t>模式）。</a:t>
-            </a:r>
-            <a:endParaRPr lang="en-US" altLang="zh-CN" sz="1600" dirty="0">
-              <a:latin typeface="PMingLiU" panose="02020500000000000000" pitchFamily="18" charset="-120"/>
-              <a:ea typeface="PMingLiU" panose="02020500000000000000" pitchFamily="18" charset="-120"/>
-            </a:endParaRPr>
-          </a:p>
-          <a:p>
-            <a:pPr lvl="1"/>
-            <a:r>
-              <a:rPr lang="en-US" sz="1600" dirty="0">
-                <a:latin typeface="PMingLiU" panose="02020500000000000000" pitchFamily="18" charset="-120"/>
-                <a:ea typeface="PMingLiU" panose="02020500000000000000" pitchFamily="18" charset="-120"/>
-              </a:rPr>
-              <a:t>treasury (</a:t>
-            </a:r>
-            <a:r>
-              <a:rPr lang="zh-CN" altLang="en-US" sz="1600" dirty="0">
-                <a:latin typeface="PMingLiU" panose="02020500000000000000" pitchFamily="18" charset="-120"/>
-                <a:ea typeface="PMingLiU" panose="02020500000000000000" pitchFamily="18" charset="-120"/>
-              </a:rPr>
-              <a:t>國庫</a:t>
-            </a:r>
-            <a:r>
-              <a:rPr lang="en-US" altLang="zh-CN" sz="1600" dirty="0">
-                <a:latin typeface="PMingLiU" panose="02020500000000000000" pitchFamily="18" charset="-120"/>
-                <a:ea typeface="PMingLiU" panose="02020500000000000000" pitchFamily="18" charset="-120"/>
-              </a:rPr>
-              <a:t>) </a:t>
-            </a:r>
-            <a:r>
-              <a:rPr lang="zh-CN" altLang="en-US" sz="1600" dirty="0">
-                <a:latin typeface="PMingLiU" panose="02020500000000000000" pitchFamily="18" charset="-120"/>
-                <a:ea typeface="PMingLiU" panose="02020500000000000000" pitchFamily="18" charset="-120"/>
-              </a:rPr>
-              <a:t>作為存放和管理資產的地方，在 </a:t>
-            </a:r>
-            <a:r>
-              <a:rPr lang="en-US" sz="1600" dirty="0">
-                <a:latin typeface="PMingLiU" panose="02020500000000000000" pitchFamily="18" charset="-120"/>
-                <a:ea typeface="PMingLiU" panose="02020500000000000000" pitchFamily="18" charset="-120"/>
-              </a:rPr>
-              <a:t>DeFi </a:t>
-            </a:r>
-            <a:r>
-              <a:rPr lang="zh-CN" altLang="en-US" sz="1600" dirty="0">
-                <a:latin typeface="PMingLiU" panose="02020500000000000000" pitchFamily="18" charset="-120"/>
-                <a:ea typeface="PMingLiU" panose="02020500000000000000" pitchFamily="18" charset="-120"/>
-              </a:rPr>
-              <a:t>系統中通常</a:t>
-            </a:r>
-            <a:r>
-              <a:rPr lang="zh-CN" altLang="en-US" sz="1600" dirty="0">
-                <a:solidFill>
-                  <a:srgbClr val="C00000"/>
-                </a:solidFill>
-                <a:latin typeface="PMingLiU" panose="02020500000000000000" pitchFamily="18" charset="-120"/>
-                <a:ea typeface="PMingLiU" panose="02020500000000000000" pitchFamily="18" charset="-120"/>
-              </a:rPr>
-              <a:t>強烈建議不要放在 </a:t>
-            </a:r>
-            <a:r>
-              <a:rPr lang="en-US" sz="1600" dirty="0">
-                <a:solidFill>
-                  <a:srgbClr val="C00000"/>
-                </a:solidFill>
-                <a:latin typeface="PMingLiU" panose="02020500000000000000" pitchFamily="18" charset="-120"/>
-                <a:ea typeface="PMingLiU" panose="02020500000000000000" pitchFamily="18" charset="-120"/>
-              </a:rPr>
-              <a:t>Constructor </a:t>
-            </a:r>
-            <a:r>
-              <a:rPr lang="zh-CN" altLang="en-US" sz="1600" dirty="0">
-                <a:solidFill>
-                  <a:srgbClr val="C00000"/>
-                </a:solidFill>
-                <a:latin typeface="PMingLiU" panose="02020500000000000000" pitchFamily="18" charset="-120"/>
-                <a:ea typeface="PMingLiU" panose="02020500000000000000" pitchFamily="18" charset="-120"/>
-              </a:rPr>
-              <a:t>中寫死 </a:t>
-            </a:r>
-            <a:r>
-              <a:rPr lang="en-US" altLang="zh-CN" sz="1600" dirty="0">
-                <a:solidFill>
-                  <a:srgbClr val="C00000"/>
-                </a:solidFill>
-                <a:latin typeface="PMingLiU" panose="02020500000000000000" pitchFamily="18" charset="-120"/>
-                <a:ea typeface="PMingLiU" panose="02020500000000000000" pitchFamily="18" charset="-120"/>
-              </a:rPr>
-              <a:t>(</a:t>
-            </a:r>
-            <a:r>
-              <a:rPr lang="en-US" sz="1600" dirty="0">
-                <a:solidFill>
-                  <a:srgbClr val="C00000"/>
-                </a:solidFill>
-                <a:latin typeface="PMingLiU" panose="02020500000000000000" pitchFamily="18" charset="-120"/>
-                <a:ea typeface="PMingLiU" panose="02020500000000000000" pitchFamily="18" charset="-120"/>
-              </a:rPr>
-              <a:t>immutable)，</a:t>
-            </a:r>
-            <a:r>
-              <a:rPr lang="zh-CN" altLang="en-US" sz="1600" dirty="0">
-                <a:latin typeface="PMingLiU" panose="02020500000000000000" pitchFamily="18" charset="-120"/>
-                <a:ea typeface="PMingLiU" panose="02020500000000000000" pitchFamily="18" charset="-120"/>
-              </a:rPr>
-              <a:t>而是透過 </a:t>
-            </a:r>
-            <a:r>
-              <a:rPr lang="en-US" sz="1600" dirty="0">
-                <a:latin typeface="PMingLiU" panose="02020500000000000000" pitchFamily="18" charset="-120"/>
-                <a:ea typeface="PMingLiU" panose="02020500000000000000" pitchFamily="18" charset="-120"/>
-              </a:rPr>
-              <a:t>Setter </a:t>
-            </a:r>
-            <a:r>
-              <a:rPr lang="zh-CN" altLang="en-US" sz="1600" dirty="0">
-                <a:latin typeface="PMingLiU" panose="02020500000000000000" pitchFamily="18" charset="-120"/>
-                <a:ea typeface="PMingLiU" panose="02020500000000000000" pitchFamily="18" charset="-120"/>
-              </a:rPr>
-              <a:t>腳本進行設置；</a:t>
-            </a:r>
-            <a:endParaRPr lang="en-US" altLang="zh-CN" sz="1600" dirty="0">
-              <a:latin typeface="PMingLiU" panose="02020500000000000000" pitchFamily="18" charset="-120"/>
-              <a:ea typeface="PMingLiU" panose="02020500000000000000" pitchFamily="18" charset="-120"/>
-            </a:endParaRPr>
-          </a:p>
-          <a:p>
-            <a:r>
-              <a:rPr lang="zh-CN" altLang="en-US" sz="2000" b="1" dirty="0">
-                <a:latin typeface="PMingLiU" panose="02020500000000000000" pitchFamily="18" charset="-120"/>
-                <a:ea typeface="PMingLiU" panose="02020500000000000000" pitchFamily="18" charset="-120"/>
-              </a:rPr>
-              <a:t>盡量使用</a:t>
-            </a:r>
-            <a:r>
-              <a:rPr lang="en-US" altLang="zh-CN" sz="2000" b="1" dirty="0">
-                <a:latin typeface="PMingLiU" panose="02020500000000000000" pitchFamily="18" charset="-120"/>
-                <a:ea typeface="PMingLiU" panose="02020500000000000000" pitchFamily="18" charset="-120"/>
-              </a:rPr>
-              <a:t>Interface</a:t>
-            </a:r>
-          </a:p>
-          <a:p>
-            <a:pPr lvl="1"/>
-            <a:r>
-              <a:rPr lang="en-US" sz="1600" dirty="0">
-                <a:latin typeface="PMingLiU" panose="02020500000000000000" pitchFamily="18" charset="-120"/>
-                <a:ea typeface="PMingLiU" panose="02020500000000000000" pitchFamily="18" charset="-120"/>
-              </a:rPr>
-              <a:t>I</a:t>
-            </a:r>
-            <a:r>
-              <a:rPr lang="en-US" altLang="zh-CN" sz="1600" dirty="0">
-                <a:latin typeface="PMingLiU" panose="02020500000000000000" pitchFamily="18" charset="-120"/>
-                <a:ea typeface="PMingLiU" panose="02020500000000000000" pitchFamily="18" charset="-120"/>
-              </a:rPr>
-              <a:t>nterface: </a:t>
-            </a:r>
-            <a:r>
-              <a:rPr lang="zh-CN" altLang="en-US" sz="1600" dirty="0">
-                <a:latin typeface="PMingLiU" panose="02020500000000000000" pitchFamily="18" charset="-120"/>
-                <a:ea typeface="PMingLiU" panose="02020500000000000000" pitchFamily="18" charset="-120"/>
-              </a:rPr>
-              <a:t>低耦合；</a:t>
-            </a:r>
-            <a:endParaRPr lang="en-US" altLang="zh-CN" sz="1600" dirty="0">
-              <a:latin typeface="PMingLiU" panose="02020500000000000000" pitchFamily="18" charset="-120"/>
-              <a:ea typeface="PMingLiU" panose="02020500000000000000" pitchFamily="18" charset="-120"/>
-            </a:endParaRPr>
-          </a:p>
-          <a:p>
-            <a:pPr lvl="1"/>
-            <a:r>
-              <a:rPr lang="en-US" altLang="zh-CN" sz="1600" dirty="0">
-                <a:latin typeface="PMingLiU" panose="02020500000000000000" pitchFamily="18" charset="-120"/>
-                <a:ea typeface="PMingLiU" panose="02020500000000000000" pitchFamily="18" charset="-120"/>
-              </a:rPr>
-              <a:t>Contract: </a:t>
-            </a:r>
-            <a:r>
-              <a:rPr lang="zh-CN" altLang="en-US" sz="1600" dirty="0">
-                <a:latin typeface="PMingLiU" panose="02020500000000000000" pitchFamily="18" charset="-120"/>
-                <a:ea typeface="PMingLiU" panose="02020500000000000000" pitchFamily="18" charset="-120"/>
-              </a:rPr>
-              <a:t>高耦合；</a:t>
-            </a:r>
-            <a:endParaRPr lang="en-US" sz="1600" dirty="0">
-              <a:latin typeface="PMingLiU" panose="02020500000000000000" pitchFamily="18" charset="-120"/>
-              <a:ea typeface="PMingLiU" panose="02020500000000000000" pitchFamily="18" charset="-120"/>
-            </a:endParaRPr>
-          </a:p>
-        </p:txBody>
-      </p:sp>
-    </p:spTree>
-    <p:extLst>
-      <p:ext uri="{BB962C8B-B14F-4D97-AF65-F5344CB8AC3E}">
-        <p14:creationId xmlns:p14="http://schemas.microsoft.com/office/powerpoint/2010/main" val="590861697"/>
-      </p:ext>
-    </p:extLst>
-  </p:cSld>
-  <p:clrMapOvr>
-    <a:masterClrMapping/>
-  </p:clrMapOvr>
-</p:sld>
-</file>
-
 <file path=ppt/slides/slide18.xml><?xml version="1.0" encoding="utf-8"?>
 <p:sld xmlns:a="http://schemas.openxmlformats.org/drawingml/2006/main" xmlns:r="http://schemas.openxmlformats.org/officeDocument/2006/relationships" xmlns:p="http://schemas.openxmlformats.org/presentationml/2006/main">
   <p:cSld>
@@ -21343,15 +22175,477 @@
           <a:lstStyle/>
           <a:p>
             <a:r>
+              <a:rPr lang="zh-CN" altLang="en-US" sz="2000" b="1" dirty="0">
+                <a:latin typeface="PMingLiU" panose="02020500000000000000" pitchFamily="18" charset="-120"/>
+                <a:ea typeface="PMingLiU" panose="02020500000000000000" pitchFamily="18" charset="-120"/>
+              </a:rPr>
+              <a:t>智能合約順序</a:t>
+            </a:r>
+            <a:endParaRPr lang="en-US" altLang="zh-CN" sz="2000" b="1" dirty="0">
+              <a:latin typeface="PMingLiU" panose="02020500000000000000" pitchFamily="18" charset="-120"/>
+              <a:ea typeface="PMingLiU" panose="02020500000000000000" pitchFamily="18" charset="-120"/>
+            </a:endParaRPr>
+          </a:p>
+          <a:p>
+            <a:pPr lvl="1"/>
+            <a:r>
+              <a:rPr lang="en-US" altLang="zh-CN" sz="1600" b="1" dirty="0">
+                <a:latin typeface="PMingLiU" panose="02020500000000000000" pitchFamily="18" charset="-120"/>
+                <a:ea typeface="PMingLiU" panose="02020500000000000000" pitchFamily="18" charset="-120"/>
+              </a:rPr>
+              <a:t>Using </a:t>
+            </a:r>
+            <a:r>
+              <a:rPr lang="en-US" altLang="zh-CN" sz="1600" b="1" dirty="0">
+                <a:latin typeface="PMingLiU" panose="02020500000000000000" pitchFamily="18" charset="-120"/>
+                <a:ea typeface="PMingLiU" panose="02020500000000000000" pitchFamily="18" charset="-120"/>
+                <a:sym typeface="Wingdings" panose="05000000000000000000" pitchFamily="2" charset="2"/>
+              </a:rPr>
+              <a:t> </a:t>
+            </a:r>
+            <a:r>
+              <a:rPr lang="en-US" altLang="zh-CN" sz="1600" b="1" dirty="0" err="1">
+                <a:latin typeface="PMingLiU" panose="02020500000000000000" pitchFamily="18" charset="-120"/>
+                <a:ea typeface="PMingLiU" panose="02020500000000000000" pitchFamily="18" charset="-120"/>
+                <a:sym typeface="Wingdings" panose="05000000000000000000" pitchFamily="2" charset="2"/>
+              </a:rPr>
+              <a:t>enum</a:t>
+            </a:r>
+            <a:r>
+              <a:rPr lang="en-US" altLang="zh-CN" sz="1600" b="1" dirty="0">
+                <a:latin typeface="PMingLiU" panose="02020500000000000000" pitchFamily="18" charset="-120"/>
+                <a:ea typeface="PMingLiU" panose="02020500000000000000" pitchFamily="18" charset="-120"/>
+                <a:sym typeface="Wingdings" panose="05000000000000000000" pitchFamily="2" charset="2"/>
+              </a:rPr>
+              <a:t>  </a:t>
+            </a:r>
+            <a:r>
+              <a:rPr lang="en-US" altLang="zh-CN" sz="1600" b="1" i="1" dirty="0">
+                <a:solidFill>
+                  <a:srgbClr val="C00000"/>
+                </a:solidFill>
+                <a:latin typeface="PMingLiU" panose="02020500000000000000" pitchFamily="18" charset="-120"/>
+                <a:ea typeface="PMingLiU" panose="02020500000000000000" pitchFamily="18" charset="-120"/>
+                <a:sym typeface="Wingdings" panose="05000000000000000000" pitchFamily="2" charset="2"/>
+              </a:rPr>
+              <a:t>constant variable  immutable variable general variable  mapping </a:t>
+            </a:r>
+            <a:r>
+              <a:rPr lang="en-US" altLang="zh-CN" sz="1600" b="1" dirty="0">
+                <a:latin typeface="PMingLiU" panose="02020500000000000000" pitchFamily="18" charset="-120"/>
+                <a:ea typeface="PMingLiU" panose="02020500000000000000" pitchFamily="18" charset="-120"/>
+                <a:sym typeface="Wingdings" panose="05000000000000000000" pitchFamily="2" charset="2"/>
+              </a:rPr>
+              <a:t> event  modifier  </a:t>
+            </a:r>
+            <a:r>
+              <a:rPr lang="en-US" altLang="zh-CN" sz="1600" b="1" dirty="0">
+                <a:solidFill>
+                  <a:srgbClr val="00B050"/>
+                </a:solidFill>
+                <a:latin typeface="PMingLiU" panose="02020500000000000000" pitchFamily="18" charset="-120"/>
+                <a:ea typeface="PMingLiU" panose="02020500000000000000" pitchFamily="18" charset="-120"/>
+                <a:sym typeface="Wingdings" panose="05000000000000000000" pitchFamily="2" charset="2"/>
+              </a:rPr>
+              <a:t>external functions  internal functions  view functions</a:t>
+            </a:r>
+            <a:endParaRPr lang="en-US" altLang="zh-TW" sz="1600" b="1" dirty="0">
+              <a:solidFill>
+                <a:srgbClr val="00B050"/>
+              </a:solidFill>
+              <a:latin typeface="PMingLiU" panose="02020500000000000000" pitchFamily="18" charset="-120"/>
+              <a:ea typeface="PMingLiU" panose="02020500000000000000" pitchFamily="18" charset="-120"/>
+            </a:endParaRPr>
+          </a:p>
+          <a:p>
+            <a:r>
+              <a:rPr lang="zh-TW" altLang="en-US" sz="2000" b="1" dirty="0">
+                <a:latin typeface="PMingLiU" panose="02020500000000000000" pitchFamily="18" charset="-120"/>
+                <a:ea typeface="PMingLiU" panose="02020500000000000000" pitchFamily="18" charset="-120"/>
+              </a:rPr>
+              <a:t>模組化設計</a:t>
+            </a:r>
+            <a:endParaRPr lang="en-US" altLang="zh-TW" sz="2000" b="1" dirty="0">
+              <a:latin typeface="PMingLiU" panose="02020500000000000000" pitchFamily="18" charset="-120"/>
+              <a:ea typeface="PMingLiU" panose="02020500000000000000" pitchFamily="18" charset="-120"/>
+            </a:endParaRPr>
+          </a:p>
+          <a:p>
+            <a:pPr lvl="1"/>
+            <a:r>
+              <a:rPr lang="zh-TW" altLang="en-US" sz="1600" dirty="0">
+                <a:latin typeface="PMingLiU" panose="02020500000000000000" pitchFamily="18" charset="-120"/>
+                <a:ea typeface="PMingLiU" panose="02020500000000000000" pitchFamily="18" charset="-120"/>
+              </a:rPr>
+              <a:t>對核心資產、不可變的依賴使用</a:t>
+            </a:r>
+            <a:r>
+              <a:rPr lang="zh-CN" altLang="en-US" sz="1600" dirty="0">
+                <a:latin typeface="PMingLiU" panose="02020500000000000000" pitchFamily="18" charset="-120"/>
+                <a:ea typeface="PMingLiU" panose="02020500000000000000" pitchFamily="18" charset="-120"/>
+              </a:rPr>
+              <a:t>構造</a:t>
+            </a:r>
+            <a:r>
+              <a:rPr lang="zh-TW" altLang="en-US" sz="1600" dirty="0">
+                <a:latin typeface="PMingLiU" panose="02020500000000000000" pitchFamily="18" charset="-120"/>
+                <a:ea typeface="PMingLiU" panose="02020500000000000000" pitchFamily="18" charset="-120"/>
+              </a:rPr>
+              <a:t>函數 </a:t>
+            </a:r>
+            <a:r>
+              <a:rPr lang="en-US" altLang="zh-TW" sz="1600" dirty="0">
+                <a:latin typeface="PMingLiU" panose="02020500000000000000" pitchFamily="18" charset="-120"/>
+                <a:ea typeface="PMingLiU" panose="02020500000000000000" pitchFamily="18" charset="-120"/>
+              </a:rPr>
+              <a:t>+ immutable. </a:t>
+            </a:r>
+            <a:r>
+              <a:rPr lang="zh-CN" altLang="en-US" sz="1600" dirty="0">
+                <a:latin typeface="PMingLiU" panose="02020500000000000000" pitchFamily="18" charset="-120"/>
+                <a:ea typeface="PMingLiU" panose="02020500000000000000" pitchFamily="18" charset="-120"/>
+              </a:rPr>
+              <a:t>如</a:t>
+            </a:r>
+            <a:r>
+              <a:rPr lang="en-US" altLang="zh-CN" sz="1600" dirty="0" err="1">
+                <a:latin typeface="PMingLiU" panose="02020500000000000000" pitchFamily="18" charset="-120"/>
+                <a:ea typeface="PMingLiU" panose="02020500000000000000" pitchFamily="18" charset="-120"/>
+              </a:rPr>
+              <a:t>Stoken</a:t>
+            </a:r>
+            <a:r>
+              <a:rPr lang="en-US" altLang="zh-CN" sz="1600" dirty="0">
+                <a:latin typeface="PMingLiU" panose="02020500000000000000" pitchFamily="18" charset="-120"/>
+                <a:ea typeface="PMingLiU" panose="02020500000000000000" pitchFamily="18" charset="-120"/>
+              </a:rPr>
+              <a:t>, </a:t>
+            </a:r>
+            <a:r>
+              <a:rPr lang="en-US" altLang="zh-CN" sz="1600" dirty="0" err="1">
+                <a:latin typeface="PMingLiU" panose="02020500000000000000" pitchFamily="18" charset="-120"/>
+                <a:ea typeface="PMingLiU" panose="02020500000000000000" pitchFamily="18" charset="-120"/>
+              </a:rPr>
+              <a:t>Ltoken</a:t>
+            </a:r>
+            <a:r>
+              <a:rPr lang="zh-CN" altLang="en-US" sz="1600" dirty="0">
+                <a:latin typeface="PMingLiU" panose="02020500000000000000" pitchFamily="18" charset="-120"/>
+                <a:ea typeface="PMingLiU" panose="02020500000000000000" pitchFamily="18" charset="-120"/>
+              </a:rPr>
+              <a:t>；</a:t>
+            </a:r>
+            <a:endParaRPr lang="en-US" altLang="zh-CN" sz="1600" dirty="0">
+              <a:latin typeface="PMingLiU" panose="02020500000000000000" pitchFamily="18" charset="-120"/>
+              <a:ea typeface="PMingLiU" panose="02020500000000000000" pitchFamily="18" charset="-120"/>
+            </a:endParaRPr>
+          </a:p>
+          <a:p>
+            <a:pPr lvl="1"/>
+            <a:r>
+              <a:rPr lang="zh-CN" altLang="en-US" sz="1600" dirty="0">
+                <a:latin typeface="PMingLiU" panose="02020500000000000000" pitchFamily="18" charset="-120"/>
+                <a:ea typeface="PMingLiU" panose="02020500000000000000" pitchFamily="18" charset="-120"/>
+              </a:rPr>
+              <a:t>對 </a:t>
+            </a:r>
+            <a:r>
+              <a:rPr lang="en-US" sz="1600" dirty="0" err="1">
+                <a:latin typeface="PMingLiU" panose="02020500000000000000" pitchFamily="18" charset="-120"/>
+                <a:ea typeface="PMingLiU" panose="02020500000000000000" pitchFamily="18" charset="-120"/>
+              </a:rPr>
+              <a:t>OracleManager</a:t>
+            </a:r>
+            <a:r>
+              <a:rPr lang="en-US" sz="1600" dirty="0">
+                <a:latin typeface="PMingLiU" panose="02020500000000000000" pitchFamily="18" charset="-120"/>
+                <a:ea typeface="PMingLiU" panose="02020500000000000000" pitchFamily="18" charset="-120"/>
+              </a:rPr>
+              <a:t>、 </a:t>
+            </a:r>
+            <a:r>
+              <a:rPr lang="en-US" sz="1600" dirty="0" err="1">
+                <a:latin typeface="PMingLiU" panose="02020500000000000000" pitchFamily="18" charset="-120"/>
+                <a:ea typeface="PMingLiU" panose="02020500000000000000" pitchFamily="18" charset="-120"/>
+              </a:rPr>
+              <a:t>InterestManager</a:t>
+            </a:r>
+            <a:r>
+              <a:rPr lang="en-US" sz="1600" dirty="0">
+                <a:latin typeface="PMingLiU" panose="02020500000000000000" pitchFamily="18" charset="-120"/>
+                <a:ea typeface="PMingLiU" panose="02020500000000000000" pitchFamily="18" charset="-120"/>
+              </a:rPr>
+              <a:t>、 </a:t>
+            </a:r>
+            <a:r>
+              <a:rPr lang="en-US" sz="1600" dirty="0" err="1">
+                <a:latin typeface="PMingLiU" panose="02020500000000000000" pitchFamily="18" charset="-120"/>
+                <a:ea typeface="PMingLiU" panose="02020500000000000000" pitchFamily="18" charset="-120"/>
+              </a:rPr>
+              <a:t>LiquidationManager</a:t>
+            </a:r>
+            <a:r>
+              <a:rPr lang="en-US" sz="1600" dirty="0">
+                <a:latin typeface="PMingLiU" panose="02020500000000000000" pitchFamily="18" charset="-120"/>
+                <a:ea typeface="PMingLiU" panose="02020500000000000000" pitchFamily="18" charset="-120"/>
+              </a:rPr>
+              <a:t> </a:t>
+            </a:r>
+            <a:r>
+              <a:rPr lang="zh-CN" altLang="en-US" sz="1600" dirty="0">
+                <a:latin typeface="PMingLiU" panose="02020500000000000000" pitchFamily="18" charset="-120"/>
+                <a:ea typeface="PMingLiU" panose="02020500000000000000" pitchFamily="18" charset="-120"/>
+              </a:rPr>
+              <a:t>和 </a:t>
+            </a:r>
+            <a:r>
+              <a:rPr lang="en-US" sz="1600" dirty="0" err="1">
+                <a:latin typeface="PMingLiU" panose="02020500000000000000" pitchFamily="18" charset="-120"/>
+                <a:ea typeface="PMingLiU" panose="02020500000000000000" pitchFamily="18" charset="-120"/>
+              </a:rPr>
+              <a:t>AuctionManager</a:t>
+            </a:r>
+            <a:r>
+              <a:rPr lang="en-US" sz="1600" dirty="0">
+                <a:latin typeface="PMingLiU" panose="02020500000000000000" pitchFamily="18" charset="-120"/>
+                <a:ea typeface="PMingLiU" panose="02020500000000000000" pitchFamily="18" charset="-120"/>
+              </a:rPr>
+              <a:t>  </a:t>
+            </a:r>
+            <a:r>
+              <a:rPr lang="zh-CN" altLang="en-US" sz="1600" dirty="0">
+                <a:latin typeface="PMingLiU" panose="02020500000000000000" pitchFamily="18" charset="-120"/>
+                <a:ea typeface="PMingLiU" panose="02020500000000000000" pitchFamily="18" charset="-120"/>
+              </a:rPr>
+              <a:t>這類邏輯模組，因為 </a:t>
+            </a:r>
+            <a:r>
+              <a:rPr lang="en-US" sz="1600" dirty="0">
+                <a:latin typeface="PMingLiU" panose="02020500000000000000" pitchFamily="18" charset="-120"/>
+                <a:ea typeface="PMingLiU" panose="02020500000000000000" pitchFamily="18" charset="-120"/>
+              </a:rPr>
+              <a:t>DeFi </a:t>
+            </a:r>
+            <a:r>
+              <a:rPr lang="zh-CN" altLang="en-US" sz="1600" dirty="0">
+                <a:latin typeface="PMingLiU" panose="02020500000000000000" pitchFamily="18" charset="-120"/>
+                <a:ea typeface="PMingLiU" panose="02020500000000000000" pitchFamily="18" charset="-120"/>
+              </a:rPr>
+              <a:t>經常需要更新預言機和清算機制，推薦使用 腳本通過 </a:t>
+            </a:r>
+            <a:r>
+              <a:rPr lang="en-US" sz="1600" dirty="0">
+                <a:latin typeface="PMingLiU" panose="02020500000000000000" pitchFamily="18" charset="-120"/>
+                <a:ea typeface="PMingLiU" panose="02020500000000000000" pitchFamily="18" charset="-120"/>
+              </a:rPr>
+              <a:t>Setter </a:t>
+            </a:r>
+            <a:r>
+              <a:rPr lang="zh-CN" altLang="en-US" sz="1600" dirty="0">
+                <a:latin typeface="PMingLiU" panose="02020500000000000000" pitchFamily="18" charset="-120"/>
+                <a:ea typeface="PMingLiU" panose="02020500000000000000" pitchFamily="18" charset="-120"/>
+              </a:rPr>
+              <a:t>函數進行設置（或者使用代理 </a:t>
+            </a:r>
+            <a:r>
+              <a:rPr lang="en-US" sz="1600" dirty="0">
+                <a:latin typeface="PMingLiU" panose="02020500000000000000" pitchFamily="18" charset="-120"/>
+                <a:ea typeface="PMingLiU" panose="02020500000000000000" pitchFamily="18" charset="-120"/>
+              </a:rPr>
+              <a:t>Proxy </a:t>
+            </a:r>
+            <a:r>
+              <a:rPr lang="zh-CN" altLang="en-US" sz="1600" dirty="0">
+                <a:latin typeface="PMingLiU" panose="02020500000000000000" pitchFamily="18" charset="-120"/>
+                <a:ea typeface="PMingLiU" panose="02020500000000000000" pitchFamily="18" charset="-120"/>
+              </a:rPr>
+              <a:t>模式）。</a:t>
+            </a:r>
+            <a:endParaRPr lang="en-US" altLang="zh-CN" sz="1600" dirty="0">
+              <a:latin typeface="PMingLiU" panose="02020500000000000000" pitchFamily="18" charset="-120"/>
+              <a:ea typeface="PMingLiU" panose="02020500000000000000" pitchFamily="18" charset="-120"/>
+            </a:endParaRPr>
+          </a:p>
+          <a:p>
+            <a:pPr lvl="1"/>
+            <a:r>
+              <a:rPr lang="en-US" sz="1600" dirty="0">
+                <a:latin typeface="PMingLiU" panose="02020500000000000000" pitchFamily="18" charset="-120"/>
+                <a:ea typeface="PMingLiU" panose="02020500000000000000" pitchFamily="18" charset="-120"/>
+              </a:rPr>
+              <a:t>treasury (</a:t>
+            </a:r>
+            <a:r>
+              <a:rPr lang="zh-CN" altLang="en-US" sz="1600" dirty="0">
+                <a:latin typeface="PMingLiU" panose="02020500000000000000" pitchFamily="18" charset="-120"/>
+                <a:ea typeface="PMingLiU" panose="02020500000000000000" pitchFamily="18" charset="-120"/>
+              </a:rPr>
+              <a:t>國庫</a:t>
+            </a:r>
+            <a:r>
+              <a:rPr lang="en-US" altLang="zh-CN" sz="1600" dirty="0">
+                <a:latin typeface="PMingLiU" panose="02020500000000000000" pitchFamily="18" charset="-120"/>
+                <a:ea typeface="PMingLiU" panose="02020500000000000000" pitchFamily="18" charset="-120"/>
+              </a:rPr>
+              <a:t>) </a:t>
+            </a:r>
+            <a:r>
+              <a:rPr lang="zh-CN" altLang="en-US" sz="1600" dirty="0">
+                <a:latin typeface="PMingLiU" panose="02020500000000000000" pitchFamily="18" charset="-120"/>
+                <a:ea typeface="PMingLiU" panose="02020500000000000000" pitchFamily="18" charset="-120"/>
+              </a:rPr>
+              <a:t>作為存放和管理資產的地方，在 </a:t>
+            </a:r>
+            <a:r>
+              <a:rPr lang="en-US" sz="1600" dirty="0">
+                <a:latin typeface="PMingLiU" panose="02020500000000000000" pitchFamily="18" charset="-120"/>
+                <a:ea typeface="PMingLiU" panose="02020500000000000000" pitchFamily="18" charset="-120"/>
+              </a:rPr>
+              <a:t>DeFi </a:t>
+            </a:r>
+            <a:r>
+              <a:rPr lang="zh-CN" altLang="en-US" sz="1600" dirty="0">
+                <a:latin typeface="PMingLiU" panose="02020500000000000000" pitchFamily="18" charset="-120"/>
+                <a:ea typeface="PMingLiU" panose="02020500000000000000" pitchFamily="18" charset="-120"/>
+              </a:rPr>
+              <a:t>系統中通常</a:t>
+            </a:r>
+            <a:r>
+              <a:rPr lang="zh-CN" altLang="en-US" sz="1600" dirty="0">
+                <a:solidFill>
+                  <a:srgbClr val="C00000"/>
+                </a:solidFill>
+                <a:latin typeface="PMingLiU" panose="02020500000000000000" pitchFamily="18" charset="-120"/>
+                <a:ea typeface="PMingLiU" panose="02020500000000000000" pitchFamily="18" charset="-120"/>
+              </a:rPr>
+              <a:t>強烈建議不要放在 </a:t>
+            </a:r>
+            <a:r>
+              <a:rPr lang="en-US" sz="1600" dirty="0">
+                <a:solidFill>
+                  <a:srgbClr val="C00000"/>
+                </a:solidFill>
+                <a:latin typeface="PMingLiU" panose="02020500000000000000" pitchFamily="18" charset="-120"/>
+                <a:ea typeface="PMingLiU" panose="02020500000000000000" pitchFamily="18" charset="-120"/>
+              </a:rPr>
+              <a:t>Constructor </a:t>
+            </a:r>
+            <a:r>
+              <a:rPr lang="zh-CN" altLang="en-US" sz="1600" dirty="0">
+                <a:solidFill>
+                  <a:srgbClr val="C00000"/>
+                </a:solidFill>
+                <a:latin typeface="PMingLiU" panose="02020500000000000000" pitchFamily="18" charset="-120"/>
+                <a:ea typeface="PMingLiU" panose="02020500000000000000" pitchFamily="18" charset="-120"/>
+              </a:rPr>
+              <a:t>中寫死 </a:t>
+            </a:r>
+            <a:r>
+              <a:rPr lang="en-US" altLang="zh-CN" sz="1600" dirty="0">
+                <a:solidFill>
+                  <a:srgbClr val="C00000"/>
+                </a:solidFill>
+                <a:latin typeface="PMingLiU" panose="02020500000000000000" pitchFamily="18" charset="-120"/>
+                <a:ea typeface="PMingLiU" panose="02020500000000000000" pitchFamily="18" charset="-120"/>
+              </a:rPr>
+              <a:t>(</a:t>
+            </a:r>
+            <a:r>
+              <a:rPr lang="en-US" sz="1600" dirty="0">
+                <a:solidFill>
+                  <a:srgbClr val="C00000"/>
+                </a:solidFill>
+                <a:latin typeface="PMingLiU" panose="02020500000000000000" pitchFamily="18" charset="-120"/>
+                <a:ea typeface="PMingLiU" panose="02020500000000000000" pitchFamily="18" charset="-120"/>
+              </a:rPr>
+              <a:t>immutable)，</a:t>
+            </a:r>
+            <a:r>
+              <a:rPr lang="zh-CN" altLang="en-US" sz="1600" dirty="0">
+                <a:latin typeface="PMingLiU" panose="02020500000000000000" pitchFamily="18" charset="-120"/>
+                <a:ea typeface="PMingLiU" panose="02020500000000000000" pitchFamily="18" charset="-120"/>
+              </a:rPr>
+              <a:t>而是透過 </a:t>
+            </a:r>
+            <a:r>
+              <a:rPr lang="en-US" sz="1600" dirty="0">
+                <a:latin typeface="PMingLiU" panose="02020500000000000000" pitchFamily="18" charset="-120"/>
+                <a:ea typeface="PMingLiU" panose="02020500000000000000" pitchFamily="18" charset="-120"/>
+              </a:rPr>
+              <a:t>Setter </a:t>
+            </a:r>
+            <a:r>
+              <a:rPr lang="zh-CN" altLang="en-US" sz="1600" dirty="0">
+                <a:latin typeface="PMingLiU" panose="02020500000000000000" pitchFamily="18" charset="-120"/>
+                <a:ea typeface="PMingLiU" panose="02020500000000000000" pitchFamily="18" charset="-120"/>
+              </a:rPr>
+              <a:t>腳本進行設置；</a:t>
+            </a:r>
+            <a:endParaRPr lang="en-US" altLang="zh-CN" sz="1600" dirty="0">
+              <a:latin typeface="PMingLiU" panose="02020500000000000000" pitchFamily="18" charset="-120"/>
+              <a:ea typeface="PMingLiU" panose="02020500000000000000" pitchFamily="18" charset="-120"/>
+            </a:endParaRPr>
+          </a:p>
+          <a:p>
+            <a:r>
+              <a:rPr lang="zh-CN" altLang="en-US" sz="2000" b="1" dirty="0">
+                <a:latin typeface="PMingLiU" panose="02020500000000000000" pitchFamily="18" charset="-120"/>
+                <a:ea typeface="PMingLiU" panose="02020500000000000000" pitchFamily="18" charset="-120"/>
+              </a:rPr>
+              <a:t>盡量使用</a:t>
+            </a:r>
+            <a:r>
               <a:rPr lang="en-US" altLang="zh-CN" sz="2000" b="1" dirty="0">
                 <a:latin typeface="PMingLiU" panose="02020500000000000000" pitchFamily="18" charset="-120"/>
                 <a:ea typeface="PMingLiU" panose="02020500000000000000" pitchFamily="18" charset="-120"/>
               </a:rPr>
-              <a:t>Public/external</a:t>
+              <a:t>Interface</a:t>
             </a:r>
           </a:p>
           <a:p>
             <a:pPr lvl="1"/>
+            <a:r>
+              <a:rPr lang="en-US" sz="1600" dirty="0">
+                <a:latin typeface="PMingLiU" panose="02020500000000000000" pitchFamily="18" charset="-120"/>
+                <a:ea typeface="PMingLiU" panose="02020500000000000000" pitchFamily="18" charset="-120"/>
+              </a:rPr>
+              <a:t>I</a:t>
+            </a:r>
+            <a:r>
+              <a:rPr lang="en-US" altLang="zh-CN" sz="1600" dirty="0">
+                <a:latin typeface="PMingLiU" panose="02020500000000000000" pitchFamily="18" charset="-120"/>
+                <a:ea typeface="PMingLiU" panose="02020500000000000000" pitchFamily="18" charset="-120"/>
+              </a:rPr>
+              <a:t>nterface: </a:t>
+            </a:r>
+            <a:r>
+              <a:rPr lang="zh-CN" altLang="en-US" sz="1600" dirty="0">
+                <a:latin typeface="PMingLiU" panose="02020500000000000000" pitchFamily="18" charset="-120"/>
+                <a:ea typeface="PMingLiU" panose="02020500000000000000" pitchFamily="18" charset="-120"/>
+              </a:rPr>
+              <a:t>低耦合；</a:t>
+            </a:r>
+            <a:endParaRPr lang="en-US" altLang="zh-CN" sz="1600" dirty="0">
+              <a:latin typeface="PMingLiU" panose="02020500000000000000" pitchFamily="18" charset="-120"/>
+              <a:ea typeface="PMingLiU" panose="02020500000000000000" pitchFamily="18" charset="-120"/>
+            </a:endParaRPr>
+          </a:p>
+          <a:p>
+            <a:pPr lvl="1"/>
+            <a:r>
+              <a:rPr lang="en-US" altLang="zh-CN" sz="1600" dirty="0">
+                <a:latin typeface="PMingLiU" panose="02020500000000000000" pitchFamily="18" charset="-120"/>
+                <a:ea typeface="PMingLiU" panose="02020500000000000000" pitchFamily="18" charset="-120"/>
+              </a:rPr>
+              <a:t>Contract: </a:t>
+            </a:r>
+            <a:r>
+              <a:rPr lang="zh-CN" altLang="en-US" sz="1600" dirty="0">
+                <a:latin typeface="PMingLiU" panose="02020500000000000000" pitchFamily="18" charset="-120"/>
+                <a:ea typeface="PMingLiU" panose="02020500000000000000" pitchFamily="18" charset="-120"/>
+              </a:rPr>
+              <a:t>高耦合；</a:t>
+            </a:r>
             <a:endParaRPr lang="en-US" sz="1600" dirty="0">
               <a:latin typeface="PMingLiU" panose="02020500000000000000" pitchFamily="18" charset="-120"/>
               <a:ea typeface="PMingLiU" panose="02020500000000000000" pitchFamily="18" charset="-120"/>
@@ -21359,6 +22653,1773 @@
           </a:p>
         </p:txBody>
       </p:sp>
+    </p:spTree>
+    <p:extLst>
+      <p:ext uri="{BB962C8B-B14F-4D97-AF65-F5344CB8AC3E}">
+        <p14:creationId xmlns:p14="http://schemas.microsoft.com/office/powerpoint/2010/main" val="590861697"/>
+      </p:ext>
+    </p:extLst>
+  </p:cSld>
+  <p:clrMapOvr>
+    <a:masterClrMapping/>
+  </p:clrMapOvr>
+</p:sld>
+</file>
+
+<file path=ppt/slides/slide19.xml><?xml version="1.0" encoding="utf-8"?>
+<p:sld xmlns:a="http://schemas.openxmlformats.org/drawingml/2006/main" xmlns:r="http://schemas.openxmlformats.org/officeDocument/2006/relationships" xmlns:p="http://schemas.openxmlformats.org/presentationml/2006/main">
+  <p:cSld>
+    <p:spTree>
+      <p:nvGrpSpPr>
+        <p:cNvPr id="1" name=""/>
+        <p:cNvGrpSpPr/>
+        <p:nvPr/>
+      </p:nvGrpSpPr>
+      <p:grpSpPr>
+        <a:xfrm>
+          <a:off x="0" y="0"/>
+          <a:ext cx="0" cy="0"/>
+          <a:chOff x="0" y="0"/>
+          <a:chExt cx="0" cy="0"/>
+        </a:xfrm>
+      </p:grpSpPr>
+      <p:sp>
+        <p:nvSpPr>
+          <p:cNvPr id="2" name="Title 1">
+            <a:extLst>
+              <a:ext uri="{FF2B5EF4-FFF2-40B4-BE49-F238E27FC236}">
+                <a16:creationId xmlns:a16="http://schemas.microsoft.com/office/drawing/2014/main" id="{90B6D504-FE35-8119-7951-AB857D26A010}"/>
+              </a:ext>
+            </a:extLst>
+          </p:cNvPr>
+          <p:cNvSpPr>
+            <a:spLocks noGrp="1"/>
+          </p:cNvSpPr>
+          <p:nvPr>
+            <p:ph type="title"/>
+          </p:nvPr>
+        </p:nvSpPr>
+        <p:spPr/>
+        <p:txBody>
+          <a:bodyPr/>
+          <a:lstStyle/>
+          <a:p>
+            <a:r>
+              <a:rPr lang="zh-CN" altLang="en-US" dirty="0"/>
+              <a:t>智能合約</a:t>
+            </a:r>
+            <a:r>
+              <a:rPr lang="en-US" altLang="zh-CN" dirty="0"/>
+              <a:t>(</a:t>
+            </a:r>
+            <a:r>
+              <a:rPr lang="zh-CN" altLang="en-US" dirty="0"/>
+              <a:t>規範</a:t>
+            </a:r>
+            <a:r>
+              <a:rPr lang="en-US" altLang="zh-CN" dirty="0"/>
+              <a:t>,</a:t>
+            </a:r>
+            <a:r>
+              <a:rPr lang="zh-CN" altLang="en-US" dirty="0"/>
+              <a:t>架構</a:t>
+            </a:r>
+            <a:r>
+              <a:rPr lang="en-US" altLang="zh-CN" dirty="0"/>
+              <a:t>,</a:t>
+            </a:r>
+            <a:r>
+              <a:rPr lang="zh-CN" altLang="en-US" dirty="0"/>
+              <a:t>部署</a:t>
+            </a:r>
+            <a:r>
+              <a:rPr lang="en-US" altLang="zh-CN" dirty="0"/>
+              <a:t>)</a:t>
+            </a:r>
+            <a:endParaRPr lang="en-US" dirty="0"/>
+          </a:p>
+        </p:txBody>
+      </p:sp>
+      <mc:AlternateContent xmlns:mc="http://schemas.openxmlformats.org/markup-compatibility/2006" xmlns:a14="http://schemas.microsoft.com/office/drawing/2010/main">
+        <mc:Choice Requires="a14">
+          <p:sp>
+            <p:nvSpPr>
+              <p:cNvPr id="3" name="Content Placeholder 2">
+                <a:extLst>
+                  <a:ext uri="{FF2B5EF4-FFF2-40B4-BE49-F238E27FC236}">
+                    <a16:creationId xmlns:a16="http://schemas.microsoft.com/office/drawing/2014/main" id="{E60A29B1-67F6-80ED-2357-1F67CB3A3871}"/>
+                  </a:ext>
+                </a:extLst>
+              </p:cNvPr>
+              <p:cNvSpPr>
+                <a:spLocks noGrp="1"/>
+              </p:cNvSpPr>
+              <p:nvPr>
+                <p:ph idx="1"/>
+              </p:nvPr>
+            </p:nvSpPr>
+            <p:spPr/>
+            <p:txBody>
+              <a:bodyPr/>
+              <a:lstStyle/>
+              <a:p>
+                <a:r>
+                  <a:rPr lang="zh-CN" altLang="en-US" sz="2000" b="1" dirty="0">
+                    <a:latin typeface="PMingLiU" panose="02020500000000000000" pitchFamily="18" charset="-120"/>
+                    <a:ea typeface="PMingLiU" panose="02020500000000000000" pitchFamily="18" charset="-120"/>
+                  </a:rPr>
+                  <a:t>動態利率實現方式</a:t>
+                </a:r>
+                <a:endParaRPr lang="en-US" altLang="zh-CN" sz="2000" b="1" dirty="0">
+                  <a:latin typeface="PMingLiU" panose="02020500000000000000" pitchFamily="18" charset="-120"/>
+                  <a:ea typeface="PMingLiU" panose="02020500000000000000" pitchFamily="18" charset="-120"/>
+                </a:endParaRPr>
+              </a:p>
+              <a:p>
+                <a:pPr lvl="1"/>
+                <a:r>
+                  <a:rPr lang="zh-CN" altLang="en-US" sz="1400" dirty="0">
+                    <a:latin typeface="PMingLiU" panose="02020500000000000000" pitchFamily="18" charset="-120"/>
+                    <a:ea typeface="PMingLiU" panose="02020500000000000000" pitchFamily="18" charset="-120"/>
+                  </a:rPr>
+                  <a:t>機制</a:t>
+                </a:r>
+                <a:r>
+                  <a:rPr lang="en-US" altLang="zh-CN" sz="1400" dirty="0">
+                    <a:latin typeface="PMingLiU" panose="02020500000000000000" pitchFamily="18" charset="-120"/>
+                    <a:ea typeface="PMingLiU" panose="02020500000000000000" pitchFamily="18" charset="-120"/>
+                  </a:rPr>
+                  <a:t>(</a:t>
+                </a:r>
+                <a:r>
+                  <a:rPr lang="zh-CN" altLang="en-US" sz="1400" dirty="0">
+                    <a:latin typeface="PMingLiU" panose="02020500000000000000" pitchFamily="18" charset="-120"/>
+                    <a:ea typeface="PMingLiU" panose="02020500000000000000" pitchFamily="18" charset="-120"/>
+                  </a:rPr>
+                  <a:t>參考</a:t>
+                </a:r>
+                <a:r>
+                  <a:rPr lang="en-US" altLang="zh-CN" sz="1400" dirty="0" err="1">
+                    <a:latin typeface="PMingLiU" panose="02020500000000000000" pitchFamily="18" charset="-120"/>
+                    <a:ea typeface="PMingLiU" panose="02020500000000000000" pitchFamily="18" charset="-120"/>
+                  </a:rPr>
+                  <a:t>Aave</a:t>
+                </a:r>
+                <a:r>
+                  <a:rPr lang="en-US" altLang="zh-CN" sz="1400" dirty="0">
+                    <a:latin typeface="PMingLiU" panose="02020500000000000000" pitchFamily="18" charset="-120"/>
+                    <a:ea typeface="PMingLiU" panose="02020500000000000000" pitchFamily="18" charset="-120"/>
+                  </a:rPr>
+                  <a:t>)</a:t>
+                </a:r>
+              </a:p>
+              <a:p>
+                <a:pPr lvl="2">
+                  <a:buFont typeface="Wingdings" panose="05000000000000000000" pitchFamily="2" charset="2"/>
+                  <a:buChar char="ü"/>
+                </a:pPr>
+                <a:r>
+                  <a:rPr lang="en-US" altLang="zh-CN" sz="1000" dirty="0">
+                    <a:latin typeface="PMingLiU" panose="02020500000000000000" pitchFamily="18" charset="-120"/>
+                    <a:ea typeface="PMingLiU" panose="02020500000000000000" pitchFamily="18" charset="-120"/>
+                  </a:rPr>
+                  <a:t>Global Index: </a:t>
+                </a:r>
+                <a:r>
+                  <a:rPr lang="zh-CN" altLang="en-US" sz="1000" dirty="0">
+                    <a:latin typeface="PMingLiU" panose="02020500000000000000" pitchFamily="18" charset="-120"/>
+                    <a:ea typeface="PMingLiU" panose="02020500000000000000" pitchFamily="18" charset="-120"/>
+                  </a:rPr>
+                  <a:t>記錄歷史利率信息</a:t>
+                </a:r>
+                <a:r>
+                  <a:rPr lang="en-US" altLang="zh-CN" sz="1000" dirty="0">
+                    <a:latin typeface="PMingLiU" panose="02020500000000000000" pitchFamily="18" charset="-120"/>
+                    <a:ea typeface="PMingLiU" panose="02020500000000000000" pitchFamily="18" charset="-120"/>
+                  </a:rPr>
+                  <a:t>(</a:t>
+                </a:r>
+                <a:r>
+                  <a:rPr lang="zh-CN" altLang="en-US" sz="1000" dirty="0">
+                    <a:latin typeface="PMingLiU" panose="02020500000000000000" pitchFamily="18" charset="-120"/>
+                    <a:ea typeface="PMingLiU" panose="02020500000000000000" pitchFamily="18" charset="-120"/>
+                  </a:rPr>
+                  <a:t>整合利率值</a:t>
+                </a:r>
+                <a:r>
+                  <a:rPr lang="en-US" altLang="zh-CN" sz="1000" dirty="0">
+                    <a:latin typeface="PMingLiU" panose="02020500000000000000" pitchFamily="18" charset="-120"/>
+                    <a:ea typeface="PMingLiU" panose="02020500000000000000" pitchFamily="18" charset="-120"/>
+                  </a:rPr>
+                  <a:t>+</a:t>
+                </a:r>
+                <a:r>
+                  <a:rPr lang="zh-CN" altLang="en-US" sz="1000" dirty="0">
+                    <a:latin typeface="PMingLiU" panose="02020500000000000000" pitchFamily="18" charset="-120"/>
+                    <a:ea typeface="PMingLiU" panose="02020500000000000000" pitchFamily="18" charset="-120"/>
+                  </a:rPr>
+                  <a:t>時間點</a:t>
+                </a:r>
+                <a:r>
+                  <a:rPr lang="en-US" altLang="zh-CN" sz="1000" dirty="0">
+                    <a:latin typeface="PMingLiU" panose="02020500000000000000" pitchFamily="18" charset="-120"/>
+                    <a:ea typeface="PMingLiU" panose="02020500000000000000" pitchFamily="18" charset="-120"/>
+                  </a:rPr>
+                  <a:t>)</a:t>
+                </a:r>
+              </a:p>
+              <a:p>
+                <a:pPr lvl="2">
+                  <a:buFont typeface="Wingdings" panose="05000000000000000000" pitchFamily="2" charset="2"/>
+                  <a:buChar char="ü"/>
+                </a:pPr>
+                <a:r>
+                  <a:rPr lang="en-US" altLang="zh-CN" sz="1000" dirty="0">
+                    <a:latin typeface="PMingLiU" panose="02020500000000000000" pitchFamily="18" charset="-120"/>
+                    <a:ea typeface="PMingLiU" panose="02020500000000000000" pitchFamily="18" charset="-120"/>
+                  </a:rPr>
+                  <a:t>Lazy evaluation : </a:t>
+                </a:r>
+                <a:r>
+                  <a:rPr lang="zh-CN" altLang="en-US" sz="1000" dirty="0">
+                    <a:latin typeface="PMingLiU" panose="02020500000000000000" pitchFamily="18" charset="-120"/>
+                    <a:ea typeface="PMingLiU" panose="02020500000000000000" pitchFamily="18" charset="-120"/>
+                  </a:rPr>
+                  <a:t>每當利率變動時或用戶</a:t>
+                </a:r>
+                <a:r>
+                  <a:rPr lang="en-US" altLang="zh-CN" sz="1000" dirty="0">
+                    <a:latin typeface="PMingLiU" panose="02020500000000000000" pitchFamily="18" charset="-120"/>
+                    <a:ea typeface="PMingLiU" panose="02020500000000000000" pitchFamily="18" charset="-120"/>
+                  </a:rPr>
+                  <a:t>mint/burn</a:t>
+                </a:r>
+                <a:r>
+                  <a:rPr lang="zh-CN" altLang="en-US" sz="1000" dirty="0">
+                    <a:latin typeface="PMingLiU" panose="02020500000000000000" pitchFamily="18" charset="-120"/>
+                    <a:ea typeface="PMingLiU" panose="02020500000000000000" pitchFamily="18" charset="-120"/>
+                  </a:rPr>
+                  <a:t>時才更新</a:t>
+                </a:r>
+                <a:r>
+                  <a:rPr lang="en-US" altLang="zh-CN" sz="1000" dirty="0">
+                    <a:latin typeface="PMingLiU" panose="02020500000000000000" pitchFamily="18" charset="-120"/>
+                    <a:ea typeface="PMingLiU" panose="02020500000000000000" pitchFamily="18" charset="-120"/>
+                  </a:rPr>
+                  <a:t>Global Index</a:t>
+                </a:r>
+                <a:r>
+                  <a:rPr lang="en-US" altLang="zh-CN" sz="1000" b="1" dirty="0">
+                    <a:solidFill>
+                      <a:srgbClr val="C00000"/>
+                    </a:solidFill>
+                    <a:latin typeface="PMingLiU" panose="02020500000000000000" pitchFamily="18" charset="-120"/>
+                    <a:ea typeface="PMingLiU" panose="02020500000000000000" pitchFamily="18" charset="-120"/>
+                    <a:sym typeface="Wingdings" panose="05000000000000000000" pitchFamily="2" charset="2"/>
+                  </a:rPr>
+                  <a:t></a:t>
+                </a:r>
+                <a:r>
+                  <a:rPr lang="zh-CN" altLang="en-US" sz="1000" b="1" dirty="0">
+                    <a:solidFill>
+                      <a:srgbClr val="C00000"/>
+                    </a:solidFill>
+                    <a:latin typeface="PMingLiU" panose="02020500000000000000" pitchFamily="18" charset="-120"/>
+                    <a:ea typeface="PMingLiU" panose="02020500000000000000" pitchFamily="18" charset="-120"/>
+                    <a:sym typeface="Wingdings" panose="05000000000000000000" pitchFamily="2" charset="2"/>
+                  </a:rPr>
+                  <a:t>調用</a:t>
+                </a:r>
+                <a:r>
+                  <a:rPr lang="en-US" altLang="zh-CN" sz="1000" b="1" dirty="0" err="1">
+                    <a:solidFill>
+                      <a:srgbClr val="C00000"/>
+                    </a:solidFill>
+                    <a:latin typeface="PMingLiU" panose="02020500000000000000" pitchFamily="18" charset="-120"/>
+                    <a:ea typeface="PMingLiU" panose="02020500000000000000" pitchFamily="18" charset="-120"/>
+                    <a:sym typeface="Wingdings" panose="05000000000000000000" pitchFamily="2" charset="2"/>
+                  </a:rPr>
+                  <a:t>updateGlobalIndex</a:t>
+                </a:r>
+                <a:r>
+                  <a:rPr lang="zh-CN" altLang="en-US" sz="1000" b="1" dirty="0">
+                    <a:solidFill>
+                      <a:srgbClr val="C00000"/>
+                    </a:solidFill>
+                    <a:latin typeface="PMingLiU" panose="02020500000000000000" pitchFamily="18" charset="-120"/>
+                    <a:ea typeface="PMingLiU" panose="02020500000000000000" pitchFamily="18" charset="-120"/>
+                    <a:sym typeface="Wingdings" panose="05000000000000000000" pitchFamily="2" charset="2"/>
+                  </a:rPr>
+                  <a:t>函數</a:t>
+                </a:r>
+                <a:endParaRPr lang="en-US" altLang="zh-CN" sz="1000" b="1" dirty="0">
+                  <a:solidFill>
+                    <a:srgbClr val="C00000"/>
+                  </a:solidFill>
+                  <a:latin typeface="PMingLiU" panose="02020500000000000000" pitchFamily="18" charset="-120"/>
+                  <a:ea typeface="PMingLiU" panose="02020500000000000000" pitchFamily="18" charset="-120"/>
+                </a:endParaRPr>
+              </a:p>
+              <a:p>
+                <a:pPr lvl="1"/>
+                <a:r>
+                  <a:rPr lang="en-US" altLang="zh-CN" sz="1400" dirty="0">
+                    <a:latin typeface="PMingLiU" panose="02020500000000000000" pitchFamily="18" charset="-120"/>
+                    <a:ea typeface="PMingLiU" panose="02020500000000000000" pitchFamily="18" charset="-120"/>
+                  </a:rPr>
+                  <a:t>Global Index</a:t>
+                </a:r>
+                <a:r>
+                  <a:rPr lang="zh-CN" altLang="en-US" sz="1400" dirty="0">
+                    <a:latin typeface="PMingLiU" panose="02020500000000000000" pitchFamily="18" charset="-120"/>
+                    <a:ea typeface="PMingLiU" panose="02020500000000000000" pitchFamily="18" charset="-120"/>
+                  </a:rPr>
+                  <a:t>計算公式</a:t>
+                </a:r>
+                <a:endParaRPr lang="en-US" altLang="zh-CN" sz="1400" dirty="0">
+                  <a:latin typeface="PMingLiU" panose="02020500000000000000" pitchFamily="18" charset="-120"/>
+                  <a:ea typeface="PMingLiU" panose="02020500000000000000" pitchFamily="18" charset="-120"/>
+                </a:endParaRPr>
+              </a:p>
+              <a:p>
+                <a:pPr lvl="2">
+                  <a:buFont typeface="Wingdings" panose="05000000000000000000" pitchFamily="2" charset="2"/>
+                  <a:buChar char="ü"/>
+                </a:pPr>
+                <a14:m>
+                  <m:oMath xmlns:m="http://schemas.openxmlformats.org/officeDocument/2006/math">
+                    <m:sSub>
+                      <m:sSubPr>
+                        <m:ctrlPr>
+                          <a:rPr lang="en-US" altLang="zh-CN" sz="1000" i="1" smtClean="0">
+                            <a:latin typeface="Cambria Math" panose="02040503050406030204" pitchFamily="18" charset="0"/>
+                            <a:ea typeface="PMingLiU" panose="02020500000000000000" pitchFamily="18" charset="-120"/>
+                          </a:rPr>
+                        </m:ctrlPr>
+                      </m:sSubPr>
+                      <m:e>
+                        <m:r>
+                          <a:rPr lang="en-US" altLang="zh-CN" sz="1000" b="0" i="1" smtClean="0">
+                            <a:latin typeface="Cambria Math" panose="02040503050406030204" pitchFamily="18" charset="0"/>
+                            <a:ea typeface="PMingLiU" panose="02020500000000000000" pitchFamily="18" charset="-120"/>
+                          </a:rPr>
+                          <m:t>𝐼𝑛𝑑𝑒𝑥</m:t>
+                        </m:r>
+                      </m:e>
+                      <m:sub>
+                        <m:r>
+                          <a:rPr lang="en-US" altLang="zh-CN" sz="1000" b="0" i="1" smtClean="0">
+                            <a:latin typeface="Cambria Math" panose="02040503050406030204" pitchFamily="18" charset="0"/>
+                            <a:ea typeface="PMingLiU" panose="02020500000000000000" pitchFamily="18" charset="-120"/>
+                          </a:rPr>
+                          <m:t>𝑡</m:t>
+                        </m:r>
+                        <m:r>
+                          <a:rPr lang="en-US" altLang="zh-CN" sz="1000" b="0" i="1" smtClean="0">
+                            <a:latin typeface="Cambria Math" panose="02040503050406030204" pitchFamily="18" charset="0"/>
+                            <a:ea typeface="PMingLiU" panose="02020500000000000000" pitchFamily="18" charset="-120"/>
+                          </a:rPr>
+                          <m:t>+1</m:t>
+                        </m:r>
+                      </m:sub>
+                    </m:sSub>
+                    <m:r>
+                      <a:rPr lang="en-US" altLang="zh-CN" sz="1000" b="0" i="1" smtClean="0">
+                        <a:latin typeface="Cambria Math" panose="02040503050406030204" pitchFamily="18" charset="0"/>
+                        <a:ea typeface="PMingLiU" panose="02020500000000000000" pitchFamily="18" charset="-120"/>
+                      </a:rPr>
+                      <m:t>=</m:t>
+                    </m:r>
+                    <m:sSub>
+                      <m:sSubPr>
+                        <m:ctrlPr>
+                          <a:rPr lang="en-US" altLang="zh-CN" sz="1000" i="1" smtClean="0">
+                            <a:latin typeface="Cambria Math" panose="02040503050406030204" pitchFamily="18" charset="0"/>
+                            <a:ea typeface="PMingLiU" panose="02020500000000000000" pitchFamily="18" charset="-120"/>
+                          </a:rPr>
+                        </m:ctrlPr>
+                      </m:sSubPr>
+                      <m:e>
+                        <m:r>
+                          <a:rPr lang="en-US" altLang="zh-CN" sz="1000" b="0" i="1" smtClean="0">
+                            <a:latin typeface="Cambria Math" panose="02040503050406030204" pitchFamily="18" charset="0"/>
+                            <a:ea typeface="PMingLiU" panose="02020500000000000000" pitchFamily="18" charset="-120"/>
+                          </a:rPr>
+                          <m:t>𝐼𝑛𝑑𝑒𝑥</m:t>
+                        </m:r>
+                      </m:e>
+                      <m:sub>
+                        <m:r>
+                          <a:rPr lang="en-US" altLang="zh-CN" sz="1000" b="0" i="1" smtClean="0">
+                            <a:latin typeface="Cambria Math" panose="02040503050406030204" pitchFamily="18" charset="0"/>
+                            <a:ea typeface="PMingLiU" panose="02020500000000000000" pitchFamily="18" charset="-120"/>
+                          </a:rPr>
+                          <m:t>𝑡</m:t>
+                        </m:r>
+                      </m:sub>
+                    </m:sSub>
+                    <m:r>
+                      <a:rPr lang="en-US" altLang="zh-CN" sz="1000" b="0" i="1" smtClean="0">
+                        <a:latin typeface="Cambria Math" panose="02040503050406030204" pitchFamily="18" charset="0"/>
+                        <a:ea typeface="PMingLiU" panose="02020500000000000000" pitchFamily="18" charset="-120"/>
+                      </a:rPr>
+                      <m:t>∗</m:t>
+                    </m:r>
+                    <m:sSup>
+                      <m:sSupPr>
+                        <m:ctrlPr>
+                          <a:rPr lang="en-US" altLang="zh-CN" sz="1000" i="1" smtClean="0">
+                            <a:latin typeface="Cambria Math" panose="02040503050406030204" pitchFamily="18" charset="0"/>
+                            <a:ea typeface="PMingLiU" panose="02020500000000000000" pitchFamily="18" charset="-120"/>
+                          </a:rPr>
+                        </m:ctrlPr>
+                      </m:sSupPr>
+                      <m:e>
+                        <m:r>
+                          <a:rPr lang="en-US" altLang="zh-CN" sz="1000" b="0" i="1" smtClean="0">
+                            <a:latin typeface="Cambria Math" panose="02040503050406030204" pitchFamily="18" charset="0"/>
+                            <a:ea typeface="PMingLiU" panose="02020500000000000000" pitchFamily="18" charset="-120"/>
+                          </a:rPr>
+                          <m:t>(1+</m:t>
+                        </m:r>
+                        <m:sSub>
+                          <m:sSubPr>
+                            <m:ctrlPr>
+                              <a:rPr lang="en-US" altLang="zh-CN" sz="1000" i="1" smtClean="0">
+                                <a:latin typeface="Cambria Math" panose="02040503050406030204" pitchFamily="18" charset="0"/>
+                                <a:ea typeface="PMingLiU" panose="02020500000000000000" pitchFamily="18" charset="-120"/>
+                              </a:rPr>
+                            </m:ctrlPr>
+                          </m:sSubPr>
+                          <m:e>
+                            <m:r>
+                              <a:rPr lang="en-US" altLang="zh-CN" sz="1000" b="0" i="1" smtClean="0">
+                                <a:latin typeface="Cambria Math" panose="02040503050406030204" pitchFamily="18" charset="0"/>
+                                <a:ea typeface="PMingLiU" panose="02020500000000000000" pitchFamily="18" charset="-120"/>
+                              </a:rPr>
+                              <m:t>𝑟</m:t>
+                            </m:r>
+                          </m:e>
+                          <m:sub>
+                            <m:r>
+                              <a:rPr lang="en-US" altLang="zh-CN" sz="1000" b="0" i="1" smtClean="0">
+                                <a:latin typeface="Cambria Math" panose="02040503050406030204" pitchFamily="18" charset="0"/>
+                                <a:ea typeface="PMingLiU" panose="02020500000000000000" pitchFamily="18" charset="-120"/>
+                              </a:rPr>
+                              <m:t>𝑠𝑒𝑐𝑜𝑛𝑑</m:t>
+                            </m:r>
+                          </m:sub>
+                        </m:sSub>
+                        <m:r>
+                          <a:rPr lang="en-US" altLang="zh-CN" sz="1000" b="0" i="1" smtClean="0">
+                            <a:latin typeface="Cambria Math" panose="02040503050406030204" pitchFamily="18" charset="0"/>
+                            <a:ea typeface="PMingLiU" panose="02020500000000000000" pitchFamily="18" charset="-120"/>
+                          </a:rPr>
+                          <m:t>)</m:t>
+                        </m:r>
+                      </m:e>
+                      <m:sup>
+                        <m:r>
+                          <a:rPr lang="en-US" altLang="zh-CN" sz="1000" b="0" i="1" smtClean="0">
+                            <a:latin typeface="Cambria Math" panose="02040503050406030204" pitchFamily="18" charset="0"/>
+                            <a:ea typeface="Cambria Math" panose="02040503050406030204" pitchFamily="18" charset="0"/>
+                          </a:rPr>
+                          <m:t>∆</m:t>
+                        </m:r>
+                        <m:r>
+                          <a:rPr lang="en-US" altLang="zh-CN" sz="1000" b="0" i="1" smtClean="0">
+                            <a:latin typeface="Cambria Math" panose="02040503050406030204" pitchFamily="18" charset="0"/>
+                            <a:ea typeface="PMingLiU" panose="02020500000000000000" pitchFamily="18" charset="-120"/>
+                          </a:rPr>
+                          <m:t>𝑡</m:t>
+                        </m:r>
+                      </m:sup>
+                    </m:sSup>
+                    <m:r>
+                      <a:rPr lang="en-US" altLang="zh-CN" sz="1000" i="1" smtClean="0">
+                        <a:latin typeface="Cambria Math" panose="02040503050406030204" pitchFamily="18" charset="0"/>
+                        <a:ea typeface="Cambria Math" panose="02040503050406030204" pitchFamily="18" charset="0"/>
+                      </a:rPr>
+                      <m:t>≈</m:t>
+                    </m:r>
+                    <m:sSub>
+                      <m:sSubPr>
+                        <m:ctrlPr>
+                          <a:rPr lang="en-US" altLang="zh-CN" sz="1000" i="1">
+                            <a:latin typeface="Cambria Math" panose="02040503050406030204" pitchFamily="18" charset="0"/>
+                            <a:ea typeface="PMingLiU" panose="02020500000000000000" pitchFamily="18" charset="-120"/>
+                          </a:rPr>
+                        </m:ctrlPr>
+                      </m:sSubPr>
+                      <m:e>
+                        <m:r>
+                          <a:rPr lang="en-US" altLang="zh-CN" sz="1000" i="1">
+                            <a:latin typeface="Cambria Math" panose="02040503050406030204" pitchFamily="18" charset="0"/>
+                            <a:ea typeface="PMingLiU" panose="02020500000000000000" pitchFamily="18" charset="-120"/>
+                          </a:rPr>
+                          <m:t>𝐼𝑛𝑑𝑒𝑥</m:t>
+                        </m:r>
+                      </m:e>
+                      <m:sub>
+                        <m:r>
+                          <a:rPr lang="en-US" altLang="zh-CN" sz="1000" i="1">
+                            <a:latin typeface="Cambria Math" panose="02040503050406030204" pitchFamily="18" charset="0"/>
+                            <a:ea typeface="PMingLiU" panose="02020500000000000000" pitchFamily="18" charset="-120"/>
+                          </a:rPr>
+                          <m:t>𝑡</m:t>
+                        </m:r>
+                      </m:sub>
+                    </m:sSub>
+                    <m:r>
+                      <a:rPr lang="en-US" altLang="zh-CN" sz="1000" i="1">
+                        <a:latin typeface="Cambria Math" panose="02040503050406030204" pitchFamily="18" charset="0"/>
+                        <a:ea typeface="PMingLiU" panose="02020500000000000000" pitchFamily="18" charset="-120"/>
+                      </a:rPr>
+                      <m:t>∗</m:t>
+                    </m:r>
+                    <m:d>
+                      <m:dPr>
+                        <m:ctrlPr>
+                          <a:rPr lang="en-US" altLang="zh-CN" sz="1000" i="1" smtClean="0">
+                            <a:latin typeface="Cambria Math" panose="02040503050406030204" pitchFamily="18" charset="0"/>
+                            <a:ea typeface="PMingLiU" panose="02020500000000000000" pitchFamily="18" charset="-120"/>
+                          </a:rPr>
+                        </m:ctrlPr>
+                      </m:dPr>
+                      <m:e>
+                        <m:r>
+                          <a:rPr lang="en-US" altLang="zh-CN" sz="1000" b="0" i="1" smtClean="0">
+                            <a:latin typeface="Cambria Math" panose="02040503050406030204" pitchFamily="18" charset="0"/>
+                            <a:ea typeface="PMingLiU" panose="02020500000000000000" pitchFamily="18" charset="-120"/>
+                          </a:rPr>
+                          <m:t>1+ </m:t>
+                        </m:r>
+                        <m:r>
+                          <a:rPr lang="en-US" altLang="zh-CN" sz="1000" b="0" i="1" smtClean="0">
+                            <a:latin typeface="Cambria Math" panose="02040503050406030204" pitchFamily="18" charset="0"/>
+                            <a:ea typeface="Cambria Math" panose="02040503050406030204" pitchFamily="18" charset="0"/>
+                          </a:rPr>
+                          <m:t>∆</m:t>
+                        </m:r>
+                        <m:r>
+                          <a:rPr lang="en-US" altLang="zh-CN" sz="1000" b="0" i="1" smtClean="0">
+                            <a:latin typeface="Cambria Math" panose="02040503050406030204" pitchFamily="18" charset="0"/>
+                            <a:ea typeface="Cambria Math" panose="02040503050406030204" pitchFamily="18" charset="0"/>
+                          </a:rPr>
+                          <m:t>𝑡</m:t>
+                        </m:r>
+                        <m:r>
+                          <a:rPr lang="en-US" altLang="zh-CN" sz="1000" b="0" i="1" smtClean="0">
+                            <a:latin typeface="Cambria Math" panose="02040503050406030204" pitchFamily="18" charset="0"/>
+                            <a:ea typeface="Cambria Math" panose="02040503050406030204" pitchFamily="18" charset="0"/>
+                          </a:rPr>
+                          <m:t>∗</m:t>
+                        </m:r>
+                        <m:sSub>
+                          <m:sSubPr>
+                            <m:ctrlPr>
+                              <a:rPr lang="en-US" altLang="zh-CN" sz="1000" i="1">
+                                <a:latin typeface="Cambria Math" panose="02040503050406030204" pitchFamily="18" charset="0"/>
+                                <a:ea typeface="PMingLiU" panose="02020500000000000000" pitchFamily="18" charset="-120"/>
+                              </a:rPr>
+                            </m:ctrlPr>
+                          </m:sSubPr>
+                          <m:e>
+                            <m:r>
+                              <a:rPr lang="en-US" altLang="zh-CN" sz="1000" i="1">
+                                <a:latin typeface="Cambria Math" panose="02040503050406030204" pitchFamily="18" charset="0"/>
+                                <a:ea typeface="PMingLiU" panose="02020500000000000000" pitchFamily="18" charset="-120"/>
+                              </a:rPr>
+                              <m:t>𝑟</m:t>
+                            </m:r>
+                          </m:e>
+                          <m:sub>
+                            <m:r>
+                              <a:rPr lang="en-US" altLang="zh-CN" sz="1000" i="1">
+                                <a:latin typeface="Cambria Math" panose="02040503050406030204" pitchFamily="18" charset="0"/>
+                                <a:ea typeface="PMingLiU" panose="02020500000000000000" pitchFamily="18" charset="-120"/>
+                              </a:rPr>
+                              <m:t>𝑠𝑒𝑐𝑜𝑛𝑑</m:t>
+                            </m:r>
+                          </m:sub>
+                        </m:sSub>
+                        <m:r>
+                          <a:rPr lang="en-US" altLang="zh-CN" sz="1000" b="0" i="1" smtClean="0">
+                            <a:latin typeface="Cambria Math" panose="02040503050406030204" pitchFamily="18" charset="0"/>
+                            <a:ea typeface="PMingLiU" panose="02020500000000000000" pitchFamily="18" charset="-120"/>
+                          </a:rPr>
+                          <m:t>+ </m:t>
+                        </m:r>
+                        <m:f>
+                          <m:fPr>
+                            <m:ctrlPr>
+                              <a:rPr lang="en-US" altLang="zh-CN" sz="1000" b="0" i="1" smtClean="0">
+                                <a:latin typeface="Cambria Math" panose="02040503050406030204" pitchFamily="18" charset="0"/>
+                                <a:ea typeface="PMingLiU" panose="02020500000000000000" pitchFamily="18" charset="-120"/>
+                              </a:rPr>
+                            </m:ctrlPr>
+                          </m:fPr>
+                          <m:num>
+                            <m:r>
+                              <a:rPr lang="en-US" altLang="zh-CN" sz="1000" i="1">
+                                <a:latin typeface="Cambria Math" panose="02040503050406030204" pitchFamily="18" charset="0"/>
+                                <a:ea typeface="Cambria Math" panose="02040503050406030204" pitchFamily="18" charset="0"/>
+                              </a:rPr>
+                              <m:t>∆</m:t>
+                            </m:r>
+                            <m:r>
+                              <a:rPr lang="en-US" altLang="zh-CN" sz="1000" i="1">
+                                <a:latin typeface="Cambria Math" panose="02040503050406030204" pitchFamily="18" charset="0"/>
+                                <a:ea typeface="Cambria Math" panose="02040503050406030204" pitchFamily="18" charset="0"/>
+                              </a:rPr>
+                              <m:t>𝑡</m:t>
+                            </m:r>
+                            <m:r>
+                              <a:rPr lang="en-US" altLang="zh-CN" sz="1000" b="0" i="1" smtClean="0">
+                                <a:latin typeface="Cambria Math" panose="02040503050406030204" pitchFamily="18" charset="0"/>
+                                <a:ea typeface="Cambria Math" panose="02040503050406030204" pitchFamily="18" charset="0"/>
+                              </a:rPr>
+                              <m:t>∗</m:t>
+                            </m:r>
+                            <m:d>
+                              <m:dPr>
+                                <m:ctrlPr>
+                                  <a:rPr lang="en-US" altLang="zh-CN" sz="1000" b="0" i="1" smtClean="0">
+                                    <a:latin typeface="Cambria Math" panose="02040503050406030204" pitchFamily="18" charset="0"/>
+                                    <a:ea typeface="Cambria Math" panose="02040503050406030204" pitchFamily="18" charset="0"/>
+                                  </a:rPr>
+                                </m:ctrlPr>
+                              </m:dPr>
+                              <m:e>
+                                <m:r>
+                                  <a:rPr lang="en-US" altLang="zh-CN" sz="1000" i="1">
+                                    <a:latin typeface="Cambria Math" panose="02040503050406030204" pitchFamily="18" charset="0"/>
+                                    <a:ea typeface="Cambria Math" panose="02040503050406030204" pitchFamily="18" charset="0"/>
+                                  </a:rPr>
+                                  <m:t>∆</m:t>
+                                </m:r>
+                                <m:r>
+                                  <a:rPr lang="en-US" altLang="zh-CN" sz="1000" i="1">
+                                    <a:latin typeface="Cambria Math" panose="02040503050406030204" pitchFamily="18" charset="0"/>
+                                    <a:ea typeface="Cambria Math" panose="02040503050406030204" pitchFamily="18" charset="0"/>
+                                  </a:rPr>
+                                  <m:t>𝑡</m:t>
+                                </m:r>
+                                <m:r>
+                                  <a:rPr lang="en-US" altLang="zh-CN" sz="1000" b="0" i="1" smtClean="0">
+                                    <a:latin typeface="Cambria Math" panose="02040503050406030204" pitchFamily="18" charset="0"/>
+                                    <a:ea typeface="Cambria Math" panose="02040503050406030204" pitchFamily="18" charset="0"/>
+                                  </a:rPr>
+                                  <m:t>−1</m:t>
+                                </m:r>
+                              </m:e>
+                            </m:d>
+                            <m:r>
+                              <a:rPr lang="en-US" altLang="zh-CN" sz="1000" b="0" i="1" smtClean="0">
+                                <a:latin typeface="Cambria Math" panose="02040503050406030204" pitchFamily="18" charset="0"/>
+                                <a:ea typeface="Cambria Math" panose="02040503050406030204" pitchFamily="18" charset="0"/>
+                              </a:rPr>
+                              <m:t>∗</m:t>
+                            </m:r>
+                            <m:sSubSup>
+                              <m:sSubSupPr>
+                                <m:ctrlPr>
+                                  <a:rPr lang="en-US" altLang="zh-CN" sz="1000" b="0" i="1" smtClean="0">
+                                    <a:latin typeface="Cambria Math" panose="02040503050406030204" pitchFamily="18" charset="0"/>
+                                    <a:ea typeface="Cambria Math" panose="02040503050406030204" pitchFamily="18" charset="0"/>
+                                  </a:rPr>
+                                </m:ctrlPr>
+                              </m:sSubSupPr>
+                              <m:e>
+                                <m:r>
+                                  <a:rPr lang="en-US" altLang="zh-CN" sz="1000" b="0" i="1" smtClean="0">
+                                    <a:latin typeface="Cambria Math" panose="02040503050406030204" pitchFamily="18" charset="0"/>
+                                    <a:ea typeface="Cambria Math" panose="02040503050406030204" pitchFamily="18" charset="0"/>
+                                  </a:rPr>
+                                  <m:t>𝑟</m:t>
+                                </m:r>
+                              </m:e>
+                              <m:sub>
+                                <m:r>
+                                  <a:rPr lang="en-US" altLang="zh-CN" sz="1000" b="0" i="1" smtClean="0">
+                                    <a:latin typeface="Cambria Math" panose="02040503050406030204" pitchFamily="18" charset="0"/>
+                                    <a:ea typeface="Cambria Math" panose="02040503050406030204" pitchFamily="18" charset="0"/>
+                                  </a:rPr>
+                                  <m:t>𝑠𝑒𝑐𝑜𝑛𝑑</m:t>
+                                </m:r>
+                              </m:sub>
+                              <m:sup>
+                                <m:r>
+                                  <a:rPr lang="en-US" altLang="zh-CN" sz="1000" b="0" i="1" smtClean="0">
+                                    <a:latin typeface="Cambria Math" panose="02040503050406030204" pitchFamily="18" charset="0"/>
+                                    <a:ea typeface="Cambria Math" panose="02040503050406030204" pitchFamily="18" charset="0"/>
+                                  </a:rPr>
+                                  <m:t>2</m:t>
+                                </m:r>
+                              </m:sup>
+                            </m:sSubSup>
+                          </m:num>
+                          <m:den>
+                            <m:r>
+                              <a:rPr lang="en-US" altLang="zh-CN" sz="1000" b="0" i="1" smtClean="0">
+                                <a:latin typeface="Cambria Math" panose="02040503050406030204" pitchFamily="18" charset="0"/>
+                                <a:ea typeface="PMingLiU" panose="02020500000000000000" pitchFamily="18" charset="-120"/>
+                              </a:rPr>
+                              <m:t>2</m:t>
+                            </m:r>
+                          </m:den>
+                        </m:f>
+                      </m:e>
+                    </m:d>
+                  </m:oMath>
+                </a14:m>
+                <a:r>
+                  <a:rPr lang="en-US" altLang="zh-CN" sz="1000" b="1" dirty="0">
+                    <a:solidFill>
+                      <a:srgbClr val="C00000"/>
+                    </a:solidFill>
+                    <a:latin typeface="PMingLiU" panose="02020500000000000000" pitchFamily="18" charset="-120"/>
+                    <a:ea typeface="PMingLiU" panose="02020500000000000000" pitchFamily="18" charset="-120"/>
+                    <a:sym typeface="Wingdings" panose="05000000000000000000" pitchFamily="2" charset="2"/>
+                  </a:rPr>
+                  <a:t></a:t>
+                </a:r>
+                <a:r>
+                  <a:rPr lang="zh-CN" altLang="en-US" sz="1000" b="1" dirty="0">
+                    <a:solidFill>
+                      <a:srgbClr val="C00000"/>
+                    </a:solidFill>
+                    <a:latin typeface="PMingLiU" panose="02020500000000000000" pitchFamily="18" charset="-120"/>
+                    <a:ea typeface="PMingLiU" panose="02020500000000000000" pitchFamily="18" charset="-120"/>
+                    <a:sym typeface="Wingdings" panose="05000000000000000000" pitchFamily="2" charset="2"/>
+                  </a:rPr>
+                  <a:t>二項級數展開逼近</a:t>
+                </a:r>
+                <a:endParaRPr lang="en-US" altLang="zh-CN" sz="1000" b="1" dirty="0">
+                  <a:solidFill>
+                    <a:srgbClr val="C00000"/>
+                  </a:solidFill>
+                  <a:latin typeface="PMingLiU" panose="02020500000000000000" pitchFamily="18" charset="-120"/>
+                  <a:ea typeface="PMingLiU" panose="02020500000000000000" pitchFamily="18" charset="-120"/>
+                </a:endParaRPr>
+              </a:p>
+              <a:p>
+                <a:pPr lvl="2">
+                  <a:buFont typeface="Wingdings" panose="05000000000000000000" pitchFamily="2" charset="2"/>
+                  <a:buChar char="ü"/>
+                </a:pPr>
+                <a:r>
+                  <a:rPr lang="zh-CN" altLang="en-US" sz="1000" dirty="0">
+                    <a:latin typeface="PMingLiU" panose="02020500000000000000" pitchFamily="18" charset="-120"/>
+                    <a:ea typeface="PMingLiU" panose="02020500000000000000" pitchFamily="18" charset="-120"/>
+                  </a:rPr>
+                  <a:t>因爲</a:t>
+                </a:r>
+                <a:r>
+                  <a:rPr lang="en-US" altLang="zh-CN" sz="1000" dirty="0">
+                    <a:latin typeface="PMingLiU" panose="02020500000000000000" pitchFamily="18" charset="-120"/>
+                    <a:ea typeface="PMingLiU" panose="02020500000000000000" pitchFamily="18" charset="-120"/>
+                  </a:rPr>
+                  <a:t>update</a:t>
+                </a:r>
+                <a:r>
+                  <a:rPr lang="zh-CN" altLang="en-US" sz="1000" dirty="0">
+                    <a:latin typeface="PMingLiU" panose="02020500000000000000" pitchFamily="18" charset="-120"/>
+                    <a:ea typeface="PMingLiU" panose="02020500000000000000" pitchFamily="18" charset="-120"/>
+                  </a:rPr>
+                  <a:t>的頻率不固定，使用單利會使得</a:t>
+                </a:r>
+                <a:r>
+                  <a:rPr lang="en-US" altLang="zh-CN" sz="1000" dirty="0">
+                    <a:latin typeface="PMingLiU" panose="02020500000000000000" pitchFamily="18" charset="-120"/>
+                    <a:ea typeface="PMingLiU" panose="02020500000000000000" pitchFamily="18" charset="-120"/>
+                  </a:rPr>
+                  <a:t>Global Index</a:t>
+                </a:r>
+                <a:r>
+                  <a:rPr lang="zh-CN" altLang="en-US" sz="1000" dirty="0">
+                    <a:latin typeface="PMingLiU" panose="02020500000000000000" pitchFamily="18" charset="-120"/>
+                    <a:ea typeface="PMingLiU" panose="02020500000000000000" pitchFamily="18" charset="-120"/>
+                  </a:rPr>
+                  <a:t>的值依賴於歷史路徑</a:t>
+                </a:r>
+                <a:endParaRPr lang="en-US" altLang="zh-CN" sz="1000" dirty="0">
+                  <a:latin typeface="PMingLiU" panose="02020500000000000000" pitchFamily="18" charset="-120"/>
+                  <a:ea typeface="PMingLiU" panose="02020500000000000000" pitchFamily="18" charset="-120"/>
+                </a:endParaRPr>
+              </a:p>
+              <a:p>
+                <a:pPr lvl="1"/>
+                <a:r>
+                  <a:rPr lang="zh-CN" altLang="en-US" sz="1400" dirty="0">
+                    <a:latin typeface="PMingLiU" panose="02020500000000000000" pitchFamily="18" charset="-120"/>
+                    <a:ea typeface="PMingLiU" panose="02020500000000000000" pitchFamily="18" charset="-120"/>
+                  </a:rPr>
+                  <a:t>利息纍計方式</a:t>
+                </a:r>
+                <a:endParaRPr lang="en-US" altLang="zh-CN" sz="1400" dirty="0">
+                  <a:latin typeface="PMingLiU" panose="02020500000000000000" pitchFamily="18" charset="-120"/>
+                  <a:ea typeface="PMingLiU" panose="02020500000000000000" pitchFamily="18" charset="-120"/>
+                </a:endParaRPr>
+              </a:p>
+              <a:p>
+                <a:pPr lvl="2">
+                  <a:buFont typeface="Wingdings" panose="05000000000000000000" pitchFamily="2" charset="2"/>
+                  <a:buChar char="ü"/>
+                </a:pPr>
+                <a:r>
+                  <a:rPr lang="zh-CN" altLang="en-US" sz="1000" dirty="0">
+                    <a:latin typeface="PMingLiU" panose="02020500000000000000" pitchFamily="18" charset="-120"/>
+                    <a:ea typeface="PMingLiU" panose="02020500000000000000" pitchFamily="18" charset="-120"/>
+                  </a:rPr>
+                  <a:t>初始時刻 </a:t>
+                </a:r>
+                <a14:m>
+                  <m:oMath xmlns:m="http://schemas.openxmlformats.org/officeDocument/2006/math">
+                    <m:sSub>
+                      <m:sSubPr>
+                        <m:ctrlPr>
+                          <a:rPr lang="en-US" altLang="zh-CN" sz="1000" i="1" smtClean="0">
+                            <a:latin typeface="Cambria Math" panose="02040503050406030204" pitchFamily="18" charset="0"/>
+                            <a:ea typeface="PMingLiU" panose="02020500000000000000" pitchFamily="18" charset="-120"/>
+                          </a:rPr>
+                        </m:ctrlPr>
+                      </m:sSubPr>
+                      <m:e>
+                        <m:r>
+                          <a:rPr lang="en-US" altLang="zh-CN" sz="1000" b="0" i="1" smtClean="0">
+                            <a:latin typeface="Cambria Math" panose="02040503050406030204" pitchFamily="18" charset="0"/>
+                            <a:ea typeface="PMingLiU" panose="02020500000000000000" pitchFamily="18" charset="-120"/>
+                          </a:rPr>
+                          <m:t>𝐼𝑛𝑑𝑒𝑥</m:t>
+                        </m:r>
+                      </m:e>
+                      <m:sub>
+                        <m:r>
+                          <a:rPr lang="en-US" altLang="zh-CN" sz="1000" b="0" i="1" smtClean="0">
+                            <a:latin typeface="Cambria Math" panose="02040503050406030204" pitchFamily="18" charset="0"/>
+                            <a:ea typeface="PMingLiU" panose="02020500000000000000" pitchFamily="18" charset="-120"/>
+                          </a:rPr>
+                          <m:t>0</m:t>
+                        </m:r>
+                      </m:sub>
+                    </m:sSub>
+                    <m:r>
+                      <a:rPr lang="en-US" altLang="zh-CN" sz="1000" b="0" i="1" smtClean="0">
+                        <a:latin typeface="Cambria Math" panose="02040503050406030204" pitchFamily="18" charset="0"/>
+                        <a:ea typeface="PMingLiU" panose="02020500000000000000" pitchFamily="18" charset="-120"/>
+                      </a:rPr>
+                      <m:t>=1</m:t>
+                    </m:r>
+                  </m:oMath>
+                </a14:m>
+                <a:endParaRPr lang="en-US" altLang="zh-CN" sz="1000" dirty="0">
+                  <a:latin typeface="PMingLiU" panose="02020500000000000000" pitchFamily="18" charset="-120"/>
+                  <a:ea typeface="PMingLiU" panose="02020500000000000000" pitchFamily="18" charset="-120"/>
+                </a:endParaRPr>
+              </a:p>
+              <a:p>
+                <a:pPr lvl="2">
+                  <a:buFont typeface="Wingdings" panose="05000000000000000000" pitchFamily="2" charset="2"/>
+                  <a:buChar char="ü"/>
+                </a:pPr>
+                <a:r>
+                  <a:rPr lang="zh-CN" altLang="en-US" sz="1000" dirty="0">
+                    <a:latin typeface="PMingLiU" panose="02020500000000000000" pitchFamily="18" charset="-120"/>
+                    <a:ea typeface="PMingLiU" panose="02020500000000000000" pitchFamily="18" charset="-120"/>
+                  </a:rPr>
+                  <a:t>時刻</a:t>
+                </a:r>
+                <a:r>
+                  <a:rPr lang="en-US" altLang="zh-CN" sz="1000" dirty="0">
+                    <a:latin typeface="PMingLiU" panose="02020500000000000000" pitchFamily="18" charset="-120"/>
+                    <a:ea typeface="PMingLiU" panose="02020500000000000000" pitchFamily="18" charset="-120"/>
+                  </a:rPr>
+                  <a:t>t, </a:t>
+                </a:r>
+                <a:r>
+                  <a:rPr lang="zh-CN" altLang="en-US" sz="1000" dirty="0">
+                    <a:latin typeface="PMingLiU" panose="02020500000000000000" pitchFamily="18" charset="-120"/>
+                    <a:ea typeface="PMingLiU" panose="02020500000000000000" pitchFamily="18" charset="-120"/>
+                  </a:rPr>
+                  <a:t>   </a:t>
+                </a:r>
+                <a14:m>
+                  <m:oMath xmlns:m="http://schemas.openxmlformats.org/officeDocument/2006/math">
+                    <m:sSub>
+                      <m:sSubPr>
+                        <m:ctrlPr>
+                          <a:rPr lang="en-US" altLang="zh-CN" sz="1000" i="1" smtClean="0">
+                            <a:latin typeface="Cambria Math" panose="02040503050406030204" pitchFamily="18" charset="0"/>
+                            <a:ea typeface="PMingLiU" panose="02020500000000000000" pitchFamily="18" charset="-120"/>
+                          </a:rPr>
+                        </m:ctrlPr>
+                      </m:sSubPr>
+                      <m:e>
+                        <m:r>
+                          <a:rPr lang="en-US" altLang="zh-CN" sz="1000" b="0" i="1" smtClean="0">
+                            <a:latin typeface="Cambria Math" panose="02040503050406030204" pitchFamily="18" charset="0"/>
+                            <a:ea typeface="PMingLiU" panose="02020500000000000000" pitchFamily="18" charset="-120"/>
+                          </a:rPr>
+                          <m:t>𝐼𝑛𝑑𝑒𝑥</m:t>
+                        </m:r>
+                      </m:e>
+                      <m:sub>
+                        <m:r>
+                          <a:rPr lang="en-US" altLang="zh-CN" sz="1000" b="0" i="1" smtClean="0">
+                            <a:latin typeface="Cambria Math" panose="02040503050406030204" pitchFamily="18" charset="0"/>
+                            <a:ea typeface="PMingLiU" panose="02020500000000000000" pitchFamily="18" charset="-120"/>
+                          </a:rPr>
+                          <m:t>𝑡</m:t>
+                        </m:r>
+                      </m:sub>
+                    </m:sSub>
+                    <m:r>
+                      <a:rPr lang="en-US" altLang="zh-CN" sz="1000" b="0" i="1" smtClean="0">
+                        <a:latin typeface="Cambria Math" panose="02040503050406030204" pitchFamily="18" charset="0"/>
+                        <a:ea typeface="PMingLiU" panose="02020500000000000000" pitchFamily="18" charset="-120"/>
+                      </a:rPr>
+                      <m:t>    =1.1</m:t>
+                    </m:r>
+                  </m:oMath>
+                </a14:m>
+                <a:r>
+                  <a:rPr lang="en-US" altLang="zh-CN" sz="1000" dirty="0">
+                    <a:latin typeface="PMingLiU" panose="02020500000000000000" pitchFamily="18" charset="-120"/>
+                    <a:ea typeface="PMingLiU" panose="02020500000000000000" pitchFamily="18" charset="-120"/>
+                  </a:rPr>
+                  <a:t>, Alice</a:t>
+                </a:r>
+                <a:r>
+                  <a:rPr lang="zh-CN" altLang="en-US" sz="1000" dirty="0">
+                    <a:latin typeface="PMingLiU" panose="02020500000000000000" pitchFamily="18" charset="-120"/>
+                    <a:ea typeface="PMingLiU" panose="02020500000000000000" pitchFamily="18" charset="-120"/>
+                  </a:rPr>
+                  <a:t>鑄幣</a:t>
+                </a:r>
+                <a:r>
+                  <a:rPr lang="en-US" altLang="zh-CN" sz="1000" dirty="0">
+                    <a:latin typeface="PMingLiU" panose="02020500000000000000" pitchFamily="18" charset="-120"/>
+                    <a:ea typeface="PMingLiU" panose="02020500000000000000" pitchFamily="18" charset="-120"/>
+                  </a:rPr>
+                  <a:t>100S &amp; 100L, </a:t>
+                </a:r>
+                <a:r>
+                  <a:rPr lang="zh-CN" altLang="en-US" sz="1000" dirty="0">
+                    <a:latin typeface="PMingLiU" panose="02020500000000000000" pitchFamily="18" charset="-120"/>
+                    <a:ea typeface="PMingLiU" panose="02020500000000000000" pitchFamily="18" charset="-120"/>
+                  </a:rPr>
+                  <a:t>定義</a:t>
+                </a:r>
+                <a:r>
+                  <a:rPr lang="zh-CN" altLang="en-US" sz="1000" b="1" dirty="0">
+                    <a:solidFill>
+                      <a:srgbClr val="C00000"/>
+                    </a:solidFill>
+                    <a:latin typeface="PMingLiU" panose="02020500000000000000" pitchFamily="18" charset="-120"/>
+                    <a:ea typeface="PMingLiU" panose="02020500000000000000" pitchFamily="18" charset="-120"/>
+                  </a:rPr>
+                  <a:t>份額</a:t>
+                </a:r>
+                <a:r>
+                  <a:rPr lang="zh-CN" altLang="en-US" sz="1000" dirty="0">
+                    <a:latin typeface="PMingLiU" panose="02020500000000000000" pitchFamily="18" charset="-120"/>
+                    <a:ea typeface="PMingLiU" panose="02020500000000000000" pitchFamily="18" charset="-120"/>
+                  </a:rPr>
+                  <a:t>為</a:t>
+                </a:r>
+                <a14:m>
+                  <m:oMath xmlns:m="http://schemas.openxmlformats.org/officeDocument/2006/math">
+                    <m:sSub>
+                      <m:sSubPr>
+                        <m:ctrlPr>
+                          <a:rPr lang="en-US" altLang="zh-CN" sz="1000" i="1">
+                            <a:latin typeface="Cambria Math" panose="02040503050406030204" pitchFamily="18" charset="0"/>
+                            <a:ea typeface="PMingLiU" panose="02020500000000000000" pitchFamily="18" charset="-120"/>
+                          </a:rPr>
+                        </m:ctrlPr>
+                      </m:sSubPr>
+                      <m:e>
+                        <m:r>
+                          <m:rPr>
+                            <m:sty m:val="p"/>
+                          </m:rPr>
+                          <a:rPr lang="en-US" altLang="zh-CN" sz="1000" i="1" dirty="0" smtClean="0">
+                            <a:latin typeface="Cambria Math" panose="02040503050406030204" pitchFamily="18" charset="0"/>
+                            <a:ea typeface="PMingLiU" panose="02020500000000000000" pitchFamily="18" charset="-120"/>
+                          </a:rPr>
+                          <m:t>s</m:t>
+                        </m:r>
+                        <m:r>
+                          <a:rPr lang="en-US" altLang="zh-CN" sz="1000" b="0" i="1" dirty="0" smtClean="0">
+                            <a:latin typeface="Cambria Math" panose="02040503050406030204" pitchFamily="18" charset="0"/>
+                            <a:ea typeface="PMingLiU" panose="02020500000000000000" pitchFamily="18" charset="-120"/>
+                          </a:rPr>
+                          <m:t>𝑐𝑎𝑙𝑒𝑑𝑆𝐴𝑚𝑜𝑢𝑛𝑡</m:t>
+                        </m:r>
+                        <m:r>
+                          <a:rPr lang="en-US" altLang="zh-CN" sz="1000" b="0" i="1" dirty="0" smtClean="0">
+                            <a:latin typeface="Cambria Math" panose="02040503050406030204" pitchFamily="18" charset="0"/>
+                            <a:ea typeface="PMingLiU" panose="02020500000000000000" pitchFamily="18" charset="-120"/>
+                          </a:rPr>
+                          <m:t>=100/</m:t>
+                        </m:r>
+                        <m:r>
+                          <a:rPr lang="en-US" altLang="zh-CN" sz="1000" i="1">
+                            <a:latin typeface="Cambria Math" panose="02040503050406030204" pitchFamily="18" charset="0"/>
+                            <a:ea typeface="PMingLiU" panose="02020500000000000000" pitchFamily="18" charset="-120"/>
+                          </a:rPr>
+                          <m:t>𝐼𝑛𝑑𝑒𝑥</m:t>
+                        </m:r>
+                      </m:e>
+                      <m:sub>
+                        <m:r>
+                          <a:rPr lang="en-US" altLang="zh-CN" sz="1000" i="1">
+                            <a:latin typeface="Cambria Math" panose="02040503050406030204" pitchFamily="18" charset="0"/>
+                            <a:ea typeface="PMingLiU" panose="02020500000000000000" pitchFamily="18" charset="-120"/>
+                          </a:rPr>
+                          <m:t>𝑡</m:t>
+                        </m:r>
+                      </m:sub>
+                    </m:sSub>
+                    <m:r>
+                      <a:rPr lang="en-US" altLang="zh-CN" sz="1000" b="0" i="1" smtClean="0">
+                        <a:latin typeface="Cambria Math" panose="02040503050406030204" pitchFamily="18" charset="0"/>
+                        <a:ea typeface="PMingLiU" panose="02020500000000000000" pitchFamily="18" charset="-120"/>
+                      </a:rPr>
+                      <m:t>=90.91</m:t>
+                    </m:r>
+                  </m:oMath>
+                </a14:m>
+                <a:endParaRPr lang="en-US" altLang="zh-CN" sz="1000" dirty="0">
+                  <a:latin typeface="PMingLiU" panose="02020500000000000000" pitchFamily="18" charset="-120"/>
+                  <a:ea typeface="PMingLiU" panose="02020500000000000000" pitchFamily="18" charset="-120"/>
+                </a:endParaRPr>
+              </a:p>
+              <a:p>
+                <a:pPr lvl="2">
+                  <a:buFont typeface="Wingdings" panose="05000000000000000000" pitchFamily="2" charset="2"/>
+                  <a:buChar char="ü"/>
+                </a:pPr>
+                <a:r>
+                  <a:rPr lang="zh-CN" altLang="en-US" sz="1000" dirty="0">
+                    <a:latin typeface="PMingLiU" panose="02020500000000000000" pitchFamily="18" charset="-120"/>
+                    <a:ea typeface="PMingLiU" panose="02020500000000000000" pitchFamily="18" charset="-120"/>
+                  </a:rPr>
+                  <a:t>時刻</a:t>
+                </a:r>
+                <a:r>
+                  <a:rPr lang="en-US" altLang="zh-CN" sz="1000" dirty="0">
+                    <a:latin typeface="PMingLiU" panose="02020500000000000000" pitchFamily="18" charset="-120"/>
+                    <a:ea typeface="PMingLiU" panose="02020500000000000000" pitchFamily="18" charset="-120"/>
+                  </a:rPr>
+                  <a:t>t+1,</a:t>
+                </a:r>
+                <a14:m>
+                  <m:oMath xmlns:m="http://schemas.openxmlformats.org/officeDocument/2006/math">
+                    <m:sSub>
+                      <m:sSubPr>
+                        <m:ctrlPr>
+                          <a:rPr lang="en-US" altLang="zh-CN" sz="1000" i="1" smtClean="0">
+                            <a:latin typeface="Cambria Math" panose="02040503050406030204" pitchFamily="18" charset="0"/>
+                            <a:ea typeface="PMingLiU" panose="02020500000000000000" pitchFamily="18" charset="-120"/>
+                          </a:rPr>
+                        </m:ctrlPr>
+                      </m:sSubPr>
+                      <m:e>
+                        <m:r>
+                          <a:rPr lang="en-US" altLang="zh-CN" sz="1000" b="0" i="1" smtClean="0">
+                            <a:latin typeface="Cambria Math" panose="02040503050406030204" pitchFamily="18" charset="0"/>
+                            <a:ea typeface="PMingLiU" panose="02020500000000000000" pitchFamily="18" charset="-120"/>
+                          </a:rPr>
+                          <m:t>𝐼𝑛𝑑𝑒𝑥</m:t>
+                        </m:r>
+                      </m:e>
+                      <m:sub>
+                        <m:r>
+                          <a:rPr lang="en-US" altLang="zh-CN" sz="1000" b="0" i="1" smtClean="0">
+                            <a:latin typeface="Cambria Math" panose="02040503050406030204" pitchFamily="18" charset="0"/>
+                            <a:ea typeface="PMingLiU" panose="02020500000000000000" pitchFamily="18" charset="-120"/>
+                          </a:rPr>
+                          <m:t>𝑡</m:t>
+                        </m:r>
+                        <m:r>
+                          <a:rPr lang="en-US" altLang="zh-CN" sz="1000" b="0" i="1" smtClean="0">
+                            <a:latin typeface="Cambria Math" panose="02040503050406030204" pitchFamily="18" charset="0"/>
+                            <a:ea typeface="PMingLiU" panose="02020500000000000000" pitchFamily="18" charset="-120"/>
+                          </a:rPr>
+                          <m:t>+1</m:t>
+                        </m:r>
+                      </m:sub>
+                    </m:sSub>
+                    <m:r>
+                      <a:rPr lang="en-US" altLang="zh-CN" sz="1000" b="0" i="1" smtClean="0">
+                        <a:latin typeface="Cambria Math" panose="02040503050406030204" pitchFamily="18" charset="0"/>
+                        <a:ea typeface="PMingLiU" panose="02020500000000000000" pitchFamily="18" charset="-120"/>
+                      </a:rPr>
+                      <m:t>=1.2</m:t>
+                    </m:r>
+                  </m:oMath>
+                </a14:m>
+                <a:r>
+                  <a:rPr lang="en-US" altLang="zh-CN" sz="1000" dirty="0">
+                    <a:latin typeface="PMingLiU" panose="02020500000000000000" pitchFamily="18" charset="-120"/>
+                    <a:ea typeface="PMingLiU" panose="02020500000000000000" pitchFamily="18" charset="-120"/>
+                  </a:rPr>
+                  <a:t>, Alice</a:t>
+                </a:r>
+                <a:r>
+                  <a:rPr lang="zh-CN" altLang="en-US" sz="1000" dirty="0">
+                    <a:latin typeface="PMingLiU" panose="02020500000000000000" pitchFamily="18" charset="-120"/>
+                    <a:ea typeface="PMingLiU" panose="02020500000000000000" pitchFamily="18" charset="-120"/>
+                  </a:rPr>
+                  <a:t>鑄幣</a:t>
+                </a:r>
+                <a:r>
+                  <a:rPr lang="en-US" altLang="zh-CN" sz="1000" dirty="0">
+                    <a:latin typeface="PMingLiU" panose="02020500000000000000" pitchFamily="18" charset="-120"/>
+                    <a:ea typeface="PMingLiU" panose="02020500000000000000" pitchFamily="18" charset="-120"/>
+                  </a:rPr>
+                  <a:t>100L</a:t>
+                </a:r>
+                <a:r>
+                  <a:rPr lang="zh-CN" altLang="en-US" sz="1000" dirty="0">
+                    <a:latin typeface="PMingLiU" panose="02020500000000000000" pitchFamily="18" charset="-120"/>
+                    <a:ea typeface="PMingLiU" panose="02020500000000000000" pitchFamily="18" charset="-120"/>
+                  </a:rPr>
+                  <a:t>應該承擔的</a:t>
+                </a:r>
+                <a:r>
+                  <a:rPr lang="zh-CN" altLang="en-US" sz="1000" b="1" dirty="0">
+                    <a:solidFill>
+                      <a:srgbClr val="C00000"/>
+                    </a:solidFill>
+                    <a:latin typeface="PMingLiU" panose="02020500000000000000" pitchFamily="18" charset="-120"/>
+                    <a:ea typeface="PMingLiU" panose="02020500000000000000" pitchFamily="18" charset="-120"/>
+                  </a:rPr>
+                  <a:t>真實債務</a:t>
+                </a:r>
+                <a:r>
+                  <a:rPr lang="zh-CN" altLang="en-US" sz="1000" dirty="0">
+                    <a:latin typeface="PMingLiU" panose="02020500000000000000" pitchFamily="18" charset="-120"/>
+                    <a:ea typeface="PMingLiU" panose="02020500000000000000" pitchFamily="18" charset="-120"/>
+                  </a:rPr>
+                  <a:t>為</a:t>
+                </a:r>
+                <a14:m>
+                  <m:oMath xmlns:m="http://schemas.openxmlformats.org/officeDocument/2006/math">
+                    <m:sSub>
+                      <m:sSubPr>
+                        <m:ctrlPr>
+                          <a:rPr lang="en-US" altLang="zh-CN" sz="1000" i="1">
+                            <a:latin typeface="Cambria Math" panose="02040503050406030204" pitchFamily="18" charset="0"/>
+                            <a:ea typeface="PMingLiU" panose="02020500000000000000" pitchFamily="18" charset="-120"/>
+                          </a:rPr>
+                        </m:ctrlPr>
+                      </m:sSubPr>
+                      <m:e>
+                        <m:r>
+                          <m:rPr>
+                            <m:sty m:val="p"/>
+                          </m:rPr>
+                          <a:rPr lang="en-US" altLang="zh-CN" sz="1000" i="1" dirty="0">
+                            <a:latin typeface="Cambria Math" panose="02040503050406030204" pitchFamily="18" charset="0"/>
+                            <a:ea typeface="PMingLiU" panose="02020500000000000000" pitchFamily="18" charset="-120"/>
+                          </a:rPr>
+                          <m:t>s</m:t>
+                        </m:r>
+                        <m:r>
+                          <a:rPr lang="en-US" altLang="zh-CN" sz="1000" i="1" dirty="0">
+                            <a:latin typeface="Cambria Math" panose="02040503050406030204" pitchFamily="18" charset="0"/>
+                            <a:ea typeface="PMingLiU" panose="02020500000000000000" pitchFamily="18" charset="-120"/>
+                          </a:rPr>
+                          <m:t>𝑐𝑎𝑙𝑒𝑑𝑆𝐴𝑚𝑜𝑢𝑛𝑡</m:t>
+                        </m:r>
+                        <m:r>
+                          <a:rPr lang="en-US" altLang="zh-CN" sz="1000" b="0" i="1" dirty="0" smtClean="0">
+                            <a:latin typeface="Cambria Math" panose="02040503050406030204" pitchFamily="18" charset="0"/>
+                            <a:ea typeface="PMingLiU" panose="02020500000000000000" pitchFamily="18" charset="-120"/>
+                          </a:rPr>
+                          <m:t>∗</m:t>
+                        </m:r>
+                        <m:r>
+                          <a:rPr lang="en-US" altLang="zh-CN" sz="1000" i="1">
+                            <a:latin typeface="Cambria Math" panose="02040503050406030204" pitchFamily="18" charset="0"/>
+                            <a:ea typeface="PMingLiU" panose="02020500000000000000" pitchFamily="18" charset="-120"/>
+                          </a:rPr>
+                          <m:t>𝐼𝑛𝑑𝑒𝑥</m:t>
+                        </m:r>
+                      </m:e>
+                      <m:sub>
+                        <m:r>
+                          <a:rPr lang="en-US" altLang="zh-CN" sz="1000" i="1">
+                            <a:latin typeface="Cambria Math" panose="02040503050406030204" pitchFamily="18" charset="0"/>
+                            <a:ea typeface="PMingLiU" panose="02020500000000000000" pitchFamily="18" charset="-120"/>
+                          </a:rPr>
+                          <m:t>𝑡</m:t>
+                        </m:r>
+                        <m:r>
+                          <a:rPr lang="en-US" altLang="zh-CN" sz="1000" b="0" i="1" smtClean="0">
+                            <a:latin typeface="Cambria Math" panose="02040503050406030204" pitchFamily="18" charset="0"/>
+                            <a:ea typeface="PMingLiU" panose="02020500000000000000" pitchFamily="18" charset="-120"/>
+                          </a:rPr>
+                          <m:t>+1</m:t>
+                        </m:r>
+                      </m:sub>
+                    </m:sSub>
+                    <m:r>
+                      <a:rPr lang="en-US" altLang="zh-CN" sz="1000" i="1">
+                        <a:latin typeface="Cambria Math" panose="02040503050406030204" pitchFamily="18" charset="0"/>
+                        <a:ea typeface="PMingLiU" panose="02020500000000000000" pitchFamily="18" charset="-120"/>
+                      </a:rPr>
+                      <m:t>=90.91</m:t>
+                    </m:r>
+                    <m:r>
+                      <a:rPr lang="en-US" altLang="zh-CN" sz="1000" b="0" i="1" smtClean="0">
+                        <a:latin typeface="Cambria Math" panose="02040503050406030204" pitchFamily="18" charset="0"/>
+                        <a:ea typeface="PMingLiU" panose="02020500000000000000" pitchFamily="18" charset="-120"/>
+                      </a:rPr>
+                      <m:t>∗1.2=109.09</m:t>
+                    </m:r>
+                  </m:oMath>
+                </a14:m>
+                <a:r>
+                  <a:rPr lang="en-US" altLang="zh-CN" sz="1000" dirty="0">
+                    <a:latin typeface="PMingLiU" panose="02020500000000000000" pitchFamily="18" charset="-120"/>
+                    <a:ea typeface="PMingLiU" panose="02020500000000000000" pitchFamily="18" charset="-120"/>
+                  </a:rPr>
+                  <a:t>, </a:t>
+                </a:r>
+                <a:r>
+                  <a:rPr lang="zh-CN" altLang="en-US" sz="1000" dirty="0">
+                    <a:latin typeface="PMingLiU" panose="02020500000000000000" pitchFamily="18" charset="-120"/>
+                    <a:ea typeface="PMingLiU" panose="02020500000000000000" pitchFamily="18" charset="-120"/>
+                  </a:rPr>
+                  <a:t>則</a:t>
+                </a:r>
+                <a:r>
+                  <a:rPr lang="en-US" altLang="zh-CN" sz="1000" dirty="0">
+                    <a:latin typeface="PMingLiU" panose="02020500000000000000" pitchFamily="18" charset="-120"/>
+                    <a:ea typeface="PMingLiU" panose="02020500000000000000" pitchFamily="18" charset="-120"/>
+                  </a:rPr>
+                  <a:t>9.09</a:t>
+                </a:r>
+                <a:r>
+                  <a:rPr lang="zh-CN" altLang="en-US" sz="1000" dirty="0">
+                    <a:latin typeface="PMingLiU" panose="02020500000000000000" pitchFamily="18" charset="-120"/>
+                    <a:ea typeface="PMingLiU" panose="02020500000000000000" pitchFamily="18" charset="-120"/>
+                  </a:rPr>
+                  <a:t>為纍計的利息；</a:t>
+                </a:r>
+                <a:endParaRPr lang="en-US" altLang="zh-CN" sz="1000" dirty="0">
+                  <a:latin typeface="PMingLiU" panose="02020500000000000000" pitchFamily="18" charset="-120"/>
+                  <a:ea typeface="PMingLiU" panose="02020500000000000000" pitchFamily="18" charset="-120"/>
+                </a:endParaRPr>
+              </a:p>
+              <a:p>
+                <a:pPr lvl="2">
+                  <a:buFont typeface="Wingdings" panose="05000000000000000000" pitchFamily="2" charset="2"/>
+                  <a:buChar char="ü"/>
+                </a:pPr>
+                <a:r>
+                  <a:rPr lang="zh-CN" altLang="en-US" sz="1000" dirty="0">
+                    <a:latin typeface="PMingLiU" panose="02020500000000000000" pitchFamily="18" charset="-120"/>
+                    <a:ea typeface="PMingLiU" panose="02020500000000000000" pitchFamily="18" charset="-120"/>
+                  </a:rPr>
+                  <a:t>時刻</a:t>
+                </a:r>
+                <a:r>
+                  <a:rPr lang="en-US" altLang="zh-CN" sz="1000" dirty="0">
+                    <a:latin typeface="PMingLiU" panose="02020500000000000000" pitchFamily="18" charset="-120"/>
+                    <a:ea typeface="PMingLiU" panose="02020500000000000000" pitchFamily="18" charset="-120"/>
+                  </a:rPr>
+                  <a:t>t+2,</a:t>
+                </a:r>
+                <a14:m>
+                  <m:oMath xmlns:m="http://schemas.openxmlformats.org/officeDocument/2006/math">
+                    <m:sSub>
+                      <m:sSubPr>
+                        <m:ctrlPr>
+                          <a:rPr lang="en-US" altLang="zh-CN" sz="1000" i="1" smtClean="0">
+                            <a:latin typeface="Cambria Math" panose="02040503050406030204" pitchFamily="18" charset="0"/>
+                            <a:ea typeface="PMingLiU" panose="02020500000000000000" pitchFamily="18" charset="-120"/>
+                          </a:rPr>
+                        </m:ctrlPr>
+                      </m:sSubPr>
+                      <m:e>
+                        <m:r>
+                          <a:rPr lang="en-US" altLang="zh-CN" sz="1000" b="0" i="1" smtClean="0">
+                            <a:latin typeface="Cambria Math" panose="02040503050406030204" pitchFamily="18" charset="0"/>
+                            <a:ea typeface="PMingLiU" panose="02020500000000000000" pitchFamily="18" charset="-120"/>
+                          </a:rPr>
+                          <m:t>𝐼𝑛𝑑𝑒𝑥</m:t>
+                        </m:r>
+                      </m:e>
+                      <m:sub>
+                        <m:r>
+                          <a:rPr lang="en-US" altLang="zh-CN" sz="1000" b="0" i="1" smtClean="0">
+                            <a:latin typeface="Cambria Math" panose="02040503050406030204" pitchFamily="18" charset="0"/>
+                            <a:ea typeface="PMingLiU" panose="02020500000000000000" pitchFamily="18" charset="-120"/>
+                          </a:rPr>
+                          <m:t>𝑡</m:t>
+                        </m:r>
+                        <m:r>
+                          <a:rPr lang="en-US" altLang="zh-CN" sz="1000" b="0" i="1" smtClean="0">
+                            <a:latin typeface="Cambria Math" panose="02040503050406030204" pitchFamily="18" charset="0"/>
+                            <a:ea typeface="PMingLiU" panose="02020500000000000000" pitchFamily="18" charset="-120"/>
+                          </a:rPr>
+                          <m:t>+2</m:t>
+                        </m:r>
+                      </m:sub>
+                    </m:sSub>
+                    <m:r>
+                      <a:rPr lang="en-US" altLang="zh-CN" sz="1000" b="0" i="1" smtClean="0">
+                        <a:latin typeface="Cambria Math" panose="02040503050406030204" pitchFamily="18" charset="0"/>
+                        <a:ea typeface="PMingLiU" panose="02020500000000000000" pitchFamily="18" charset="-120"/>
+                      </a:rPr>
+                      <m:t>=1.3</m:t>
+                    </m:r>
+                  </m:oMath>
+                </a14:m>
+                <a:r>
+                  <a:rPr lang="en-US" altLang="zh-CN" sz="1000" dirty="0">
+                    <a:latin typeface="PMingLiU" panose="02020500000000000000" pitchFamily="18" charset="-120"/>
+                    <a:ea typeface="PMingLiU" panose="02020500000000000000" pitchFamily="18" charset="-120"/>
+                  </a:rPr>
+                  <a:t>, Alice</a:t>
+                </a:r>
+                <a:r>
+                  <a:rPr lang="zh-CN" altLang="en-US" sz="1000" dirty="0">
+                    <a:latin typeface="PMingLiU" panose="02020500000000000000" pitchFamily="18" charset="-120"/>
+                    <a:ea typeface="PMingLiU" panose="02020500000000000000" pitchFamily="18" charset="-120"/>
+                  </a:rPr>
+                  <a:t>選擇</a:t>
+                </a:r>
+                <a:r>
+                  <a:rPr lang="en-US" altLang="zh-CN" sz="1000" dirty="0">
+                    <a:latin typeface="PMingLiU" panose="02020500000000000000" pitchFamily="18" charset="-120"/>
+                    <a:ea typeface="PMingLiU" panose="02020500000000000000" pitchFamily="18" charset="-120"/>
+                  </a:rPr>
+                  <a:t>burn</a:t>
+                </a:r>
+                <a:r>
+                  <a:rPr lang="zh-CN" altLang="en-US" sz="1000" dirty="0">
+                    <a:latin typeface="PMingLiU" panose="02020500000000000000" pitchFamily="18" charset="-120"/>
+                    <a:ea typeface="PMingLiU" panose="02020500000000000000" pitchFamily="18" charset="-120"/>
+                  </a:rPr>
+                  <a:t>掉</a:t>
+                </a:r>
+                <a:r>
+                  <a:rPr lang="en-US" altLang="zh-CN" sz="1000" dirty="0">
+                    <a:latin typeface="PMingLiU" panose="02020500000000000000" pitchFamily="18" charset="-120"/>
+                    <a:ea typeface="PMingLiU" panose="02020500000000000000" pitchFamily="18" charset="-120"/>
+                  </a:rPr>
+                  <a:t>50%</a:t>
+                </a:r>
+                <a:r>
+                  <a:rPr lang="zh-CN" altLang="en-US" sz="1000" dirty="0">
+                    <a:latin typeface="PMingLiU" panose="02020500000000000000" pitchFamily="18" charset="-120"/>
+                    <a:ea typeface="PMingLiU" panose="02020500000000000000" pitchFamily="18" charset="-120"/>
+                  </a:rPr>
+                  <a:t>的</a:t>
+                </a:r>
+                <a:r>
+                  <a:rPr lang="en-US" altLang="zh-CN" sz="1000" dirty="0">
+                    <a:latin typeface="PMingLiU" panose="02020500000000000000" pitchFamily="18" charset="-120"/>
+                    <a:ea typeface="PMingLiU" panose="02020500000000000000" pitchFamily="18" charset="-120"/>
+                  </a:rPr>
+                  <a:t>S</a:t>
+                </a:r>
+                <a:r>
+                  <a:rPr lang="zh-CN" altLang="en-US" sz="1000" dirty="0">
+                    <a:latin typeface="PMingLiU" panose="02020500000000000000" pitchFamily="18" charset="-120"/>
+                    <a:ea typeface="PMingLiU" panose="02020500000000000000" pitchFamily="18" charset="-120"/>
+                  </a:rPr>
+                  <a:t>， 表示</a:t>
+                </a:r>
+                <a:r>
+                  <a:rPr lang="en-US" altLang="zh-CN" sz="1000" b="1" dirty="0">
+                    <a:solidFill>
+                      <a:srgbClr val="C00000"/>
+                    </a:solidFill>
+                    <a:latin typeface="PMingLiU" panose="02020500000000000000" pitchFamily="18" charset="-120"/>
+                    <a:ea typeface="PMingLiU" panose="02020500000000000000" pitchFamily="18" charset="-120"/>
+                  </a:rPr>
+                  <a:t>burn</a:t>
+                </a:r>
+                <a:r>
+                  <a:rPr lang="zh-CN" altLang="en-US" sz="1000" b="1" dirty="0">
+                    <a:solidFill>
+                      <a:srgbClr val="C00000"/>
+                    </a:solidFill>
+                    <a:latin typeface="PMingLiU" panose="02020500000000000000" pitchFamily="18" charset="-120"/>
+                    <a:ea typeface="PMingLiU" panose="02020500000000000000" pitchFamily="18" charset="-120"/>
+                  </a:rPr>
+                  <a:t>掉份額的</a:t>
+                </a:r>
+                <a:r>
+                  <a:rPr lang="en-US" altLang="zh-CN" sz="1000" b="1" dirty="0">
+                    <a:solidFill>
+                      <a:srgbClr val="C00000"/>
+                    </a:solidFill>
+                    <a:latin typeface="PMingLiU" panose="02020500000000000000" pitchFamily="18" charset="-120"/>
+                    <a:ea typeface="PMingLiU" panose="02020500000000000000" pitchFamily="18" charset="-120"/>
+                  </a:rPr>
+                  <a:t>50%, </a:t>
+                </a:r>
+                <a:r>
+                  <a:rPr lang="zh-CN" altLang="en-US" sz="1000" dirty="0">
+                    <a:latin typeface="PMingLiU" panose="02020500000000000000" pitchFamily="18" charset="-120"/>
+                    <a:ea typeface="PMingLiU" panose="02020500000000000000" pitchFamily="18" charset="-120"/>
+                  </a:rPr>
+                  <a:t>即</a:t>
+                </a:r>
+                <a14:m>
+                  <m:oMath xmlns:m="http://schemas.openxmlformats.org/officeDocument/2006/math">
+                    <m:sSub>
+                      <m:sSubPr>
+                        <m:ctrlPr>
+                          <a:rPr lang="en-US" altLang="zh-CN" sz="1000" i="1">
+                            <a:latin typeface="Cambria Math" panose="02040503050406030204" pitchFamily="18" charset="0"/>
+                            <a:ea typeface="PMingLiU" panose="02020500000000000000" pitchFamily="18" charset="-120"/>
+                          </a:rPr>
+                        </m:ctrlPr>
+                      </m:sSubPr>
+                      <m:e>
+                        <m:r>
+                          <a:rPr lang="en-US" altLang="zh-CN" sz="1000" b="0" i="1" smtClean="0">
+                            <a:latin typeface="Cambria Math" panose="02040503050406030204" pitchFamily="18" charset="0"/>
+                            <a:ea typeface="PMingLiU" panose="02020500000000000000" pitchFamily="18" charset="-120"/>
+                          </a:rPr>
+                          <m:t>50%∗</m:t>
+                        </m:r>
+                        <m:r>
+                          <m:rPr>
+                            <m:sty m:val="p"/>
+                          </m:rPr>
+                          <a:rPr lang="en-US" altLang="zh-CN" sz="1000" i="1" dirty="0">
+                            <a:latin typeface="Cambria Math" panose="02040503050406030204" pitchFamily="18" charset="0"/>
+                            <a:ea typeface="PMingLiU" panose="02020500000000000000" pitchFamily="18" charset="-120"/>
+                          </a:rPr>
+                          <m:t>s</m:t>
+                        </m:r>
+                        <m:r>
+                          <a:rPr lang="en-US" altLang="zh-CN" sz="1000" i="1" dirty="0">
+                            <a:latin typeface="Cambria Math" panose="02040503050406030204" pitchFamily="18" charset="0"/>
+                            <a:ea typeface="PMingLiU" panose="02020500000000000000" pitchFamily="18" charset="-120"/>
+                          </a:rPr>
+                          <m:t>𝑐𝑎𝑙𝑒𝑑𝑆𝐴𝑚𝑜𝑢𝑛𝑡</m:t>
+                        </m:r>
+                        <m:r>
+                          <a:rPr lang="en-US" altLang="zh-CN" sz="1000" i="1" dirty="0">
+                            <a:latin typeface="Cambria Math" panose="02040503050406030204" pitchFamily="18" charset="0"/>
+                            <a:ea typeface="PMingLiU" panose="02020500000000000000" pitchFamily="18" charset="-120"/>
+                          </a:rPr>
+                          <m:t>∗</m:t>
+                        </m:r>
+                        <m:r>
+                          <a:rPr lang="en-US" altLang="zh-CN" sz="1000" i="1">
+                            <a:latin typeface="Cambria Math" panose="02040503050406030204" pitchFamily="18" charset="0"/>
+                            <a:ea typeface="PMingLiU" panose="02020500000000000000" pitchFamily="18" charset="-120"/>
+                          </a:rPr>
+                          <m:t>𝐼𝑛𝑑𝑒𝑥</m:t>
+                        </m:r>
+                      </m:e>
+                      <m:sub>
+                        <m:r>
+                          <a:rPr lang="en-US" altLang="zh-CN" sz="1000" i="1">
+                            <a:latin typeface="Cambria Math" panose="02040503050406030204" pitchFamily="18" charset="0"/>
+                            <a:ea typeface="PMingLiU" panose="02020500000000000000" pitchFamily="18" charset="-120"/>
+                          </a:rPr>
+                          <m:t>𝑡</m:t>
+                        </m:r>
+                        <m:r>
+                          <a:rPr lang="en-US" altLang="zh-CN" sz="1000" i="1">
+                            <a:latin typeface="Cambria Math" panose="02040503050406030204" pitchFamily="18" charset="0"/>
+                            <a:ea typeface="PMingLiU" panose="02020500000000000000" pitchFamily="18" charset="-120"/>
+                          </a:rPr>
+                          <m:t>+2</m:t>
+                        </m:r>
+                      </m:sub>
+                    </m:sSub>
+                    <m:r>
+                      <a:rPr lang="en-US" altLang="zh-CN" sz="1000" i="1">
+                        <a:latin typeface="Cambria Math" panose="02040503050406030204" pitchFamily="18" charset="0"/>
+                        <a:ea typeface="PMingLiU" panose="02020500000000000000" pitchFamily="18" charset="-120"/>
+                      </a:rPr>
+                      <m:t>=</m:t>
+                    </m:r>
+                    <m:r>
+                      <a:rPr lang="en-US" altLang="zh-CN" sz="1000" b="0" i="1" smtClean="0">
+                        <a:latin typeface="Cambria Math" panose="02040503050406030204" pitchFamily="18" charset="0"/>
+                        <a:ea typeface="PMingLiU" panose="02020500000000000000" pitchFamily="18" charset="-120"/>
+                      </a:rPr>
+                      <m:t>50%∗</m:t>
+                    </m:r>
+                    <m:r>
+                      <a:rPr lang="en-US" altLang="zh-CN" sz="1000" i="1">
+                        <a:latin typeface="Cambria Math" panose="02040503050406030204" pitchFamily="18" charset="0"/>
+                        <a:ea typeface="PMingLiU" panose="02020500000000000000" pitchFamily="18" charset="-120"/>
+                      </a:rPr>
+                      <m:t>90.91∗1.</m:t>
+                    </m:r>
+                    <m:r>
+                      <a:rPr lang="en-US" altLang="zh-CN" sz="1000" b="0" i="1" smtClean="0">
+                        <a:latin typeface="Cambria Math" panose="02040503050406030204" pitchFamily="18" charset="0"/>
+                        <a:ea typeface="PMingLiU" panose="02020500000000000000" pitchFamily="18" charset="-120"/>
+                      </a:rPr>
+                      <m:t>3</m:t>
+                    </m:r>
+                    <m:r>
+                      <a:rPr lang="en-US" altLang="zh-CN" sz="1000" i="1">
+                        <a:latin typeface="Cambria Math" panose="02040503050406030204" pitchFamily="18" charset="0"/>
+                        <a:ea typeface="PMingLiU" panose="02020500000000000000" pitchFamily="18" charset="-120"/>
+                      </a:rPr>
+                      <m:t>=</m:t>
+                    </m:r>
+                    <m:r>
+                      <a:rPr lang="en-US" altLang="zh-CN" sz="1000" b="0" i="1" smtClean="0">
+                        <a:latin typeface="Cambria Math" panose="02040503050406030204" pitchFamily="18" charset="0"/>
+                        <a:ea typeface="PMingLiU" panose="02020500000000000000" pitchFamily="18" charset="-120"/>
+                      </a:rPr>
+                      <m:t>5</m:t>
+                    </m:r>
+                    <m:r>
+                      <a:rPr lang="en-US" altLang="zh-CN" sz="1000" i="1">
+                        <a:latin typeface="Cambria Math" panose="02040503050406030204" pitchFamily="18" charset="0"/>
+                        <a:ea typeface="PMingLiU" panose="02020500000000000000" pitchFamily="18" charset="-120"/>
+                      </a:rPr>
+                      <m:t>9.09 </m:t>
+                    </m:r>
+                  </m:oMath>
+                </a14:m>
+                <a:r>
+                  <a:rPr lang="zh-CN" altLang="en-US" sz="1000" dirty="0">
+                    <a:latin typeface="PMingLiU" panose="02020500000000000000" pitchFamily="18" charset="-120"/>
+                    <a:ea typeface="PMingLiU" panose="02020500000000000000" pitchFamily="18" charset="-120"/>
+                  </a:rPr>
+                  <a:t>，</a:t>
+                </a:r>
+                <a:endParaRPr lang="en-US" altLang="zh-CN" sz="1000" dirty="0">
+                  <a:latin typeface="PMingLiU" panose="02020500000000000000" pitchFamily="18" charset="-120"/>
+                  <a:ea typeface="PMingLiU" panose="02020500000000000000" pitchFamily="18" charset="-120"/>
+                </a:endParaRPr>
+              </a:p>
+              <a:p>
+                <a:pPr lvl="2">
+                  <a:buFont typeface="Wingdings" panose="05000000000000000000" pitchFamily="2" charset="2"/>
+                  <a:buChar char="ü"/>
+                </a:pPr>
+                <a:r>
+                  <a:rPr lang="zh-CN" altLang="en-US" sz="1000" dirty="0">
+                    <a:latin typeface="PMingLiU" panose="02020500000000000000" pitchFamily="18" charset="-120"/>
+                    <a:ea typeface="PMingLiU" panose="02020500000000000000" pitchFamily="18" charset="-120"/>
+                  </a:rPr>
+                  <a:t>其中</a:t>
+                </a:r>
+                <a:r>
+                  <a:rPr lang="en-US" altLang="zh-CN" sz="1000" dirty="0">
+                    <a:latin typeface="PMingLiU" panose="02020500000000000000" pitchFamily="18" charset="-120"/>
+                    <a:ea typeface="PMingLiU" panose="02020500000000000000" pitchFamily="18" charset="-120"/>
+                  </a:rPr>
+                  <a:t>50</a:t>
+                </a:r>
+                <a:r>
+                  <a:rPr lang="zh-CN" altLang="en-US" sz="1000" dirty="0">
+                    <a:latin typeface="PMingLiU" panose="02020500000000000000" pitchFamily="18" charset="-120"/>
+                    <a:ea typeface="PMingLiU" panose="02020500000000000000" pitchFamily="18" charset="-120"/>
+                  </a:rPr>
+                  <a:t>表示本金，</a:t>
+                </a:r>
+                <a:r>
+                  <a:rPr lang="en-US" altLang="zh-CN" sz="1000" dirty="0">
+                    <a:latin typeface="PMingLiU" panose="02020500000000000000" pitchFamily="18" charset="-120"/>
+                    <a:ea typeface="PMingLiU" panose="02020500000000000000" pitchFamily="18" charset="-120"/>
+                  </a:rPr>
+                  <a:t>9.09</a:t>
+                </a:r>
+                <a:r>
+                  <a:rPr lang="zh-CN" altLang="en-US" sz="1000" dirty="0">
+                    <a:latin typeface="PMingLiU" panose="02020500000000000000" pitchFamily="18" charset="-120"/>
+                    <a:ea typeface="PMingLiU" panose="02020500000000000000" pitchFamily="18" charset="-120"/>
+                  </a:rPr>
+                  <a:t>表示由</a:t>
+                </a:r>
+                <a:r>
+                  <a:rPr lang="en-US" altLang="zh-CN" sz="1000" dirty="0">
+                    <a:latin typeface="PMingLiU" panose="02020500000000000000" pitchFamily="18" charset="-120"/>
+                    <a:ea typeface="PMingLiU" panose="02020500000000000000" pitchFamily="18" charset="-120"/>
+                  </a:rPr>
+                  <a:t>50</a:t>
+                </a:r>
+                <a:r>
+                  <a:rPr lang="zh-CN" altLang="en-US" sz="1000" dirty="0">
+                    <a:latin typeface="PMingLiU" panose="02020500000000000000" pitchFamily="18" charset="-120"/>
+                    <a:ea typeface="PMingLiU" panose="02020500000000000000" pitchFamily="18" charset="-120"/>
+                  </a:rPr>
+                  <a:t>本金纍計出來的利息。</a:t>
+                </a:r>
+                <a:endParaRPr lang="en-US" altLang="zh-CN" sz="1000" dirty="0">
+                  <a:latin typeface="PMingLiU" panose="02020500000000000000" pitchFamily="18" charset="-120"/>
+                  <a:ea typeface="PMingLiU" panose="02020500000000000000" pitchFamily="18" charset="-120"/>
+                </a:endParaRPr>
+              </a:p>
+              <a:p>
+                <a:pPr lvl="1"/>
+                <a:r>
+                  <a:rPr lang="zh-CN" altLang="en-US" sz="1400" dirty="0">
+                    <a:latin typeface="PMingLiU" panose="02020500000000000000" pitchFamily="18" charset="-120"/>
+                    <a:ea typeface="PMingLiU" panose="02020500000000000000" pitchFamily="18" charset="-120"/>
+                  </a:rPr>
+                  <a:t>何時</a:t>
+                </a:r>
+                <a:r>
+                  <a:rPr lang="en-US" altLang="zh-CN" sz="1400" dirty="0">
+                    <a:latin typeface="PMingLiU" panose="02020500000000000000" pitchFamily="18" charset="-120"/>
+                    <a:ea typeface="PMingLiU" panose="02020500000000000000" pitchFamily="18" charset="-120"/>
+                  </a:rPr>
+                  <a:t>update Global Index </a:t>
+                </a:r>
+                <a:r>
+                  <a:rPr lang="en-US" altLang="zh-CN" sz="1400" dirty="0">
+                    <a:latin typeface="PMingLiU" panose="02020500000000000000" pitchFamily="18" charset="-120"/>
+                    <a:ea typeface="PMingLiU" panose="02020500000000000000" pitchFamily="18" charset="-120"/>
+                    <a:sym typeface="Wingdings" panose="05000000000000000000" pitchFamily="2" charset="2"/>
+                  </a:rPr>
+                  <a:t></a:t>
+                </a:r>
+                <a:r>
+                  <a:rPr lang="zh-CN" altLang="en-US" sz="1400" dirty="0">
+                    <a:latin typeface="PMingLiU" panose="02020500000000000000" pitchFamily="18" charset="-120"/>
+                    <a:ea typeface="PMingLiU" panose="02020500000000000000" pitchFamily="18" charset="-120"/>
+                    <a:sym typeface="Wingdings" panose="05000000000000000000" pitchFamily="2" charset="2"/>
+                  </a:rPr>
+                  <a:t>任何改變利率或債務規模的操作前均需</a:t>
+                </a:r>
+                <a:r>
+                  <a:rPr lang="en-US" altLang="zh-CN" sz="1400" dirty="0">
+                    <a:latin typeface="PMingLiU" panose="02020500000000000000" pitchFamily="18" charset="-120"/>
+                    <a:ea typeface="PMingLiU" panose="02020500000000000000" pitchFamily="18" charset="-120"/>
+                    <a:sym typeface="Wingdings" panose="05000000000000000000" pitchFamily="2" charset="2"/>
+                  </a:rPr>
+                  <a:t>update</a:t>
+                </a:r>
+              </a:p>
+              <a:p>
+                <a:pPr lvl="2">
+                  <a:buFont typeface="Wingdings" panose="05000000000000000000" pitchFamily="2" charset="2"/>
+                  <a:buChar char="ü"/>
+                </a:pPr>
+                <a:r>
+                  <a:rPr lang="zh-CN" altLang="en-US" sz="1000" dirty="0">
+                    <a:latin typeface="PMingLiU" panose="02020500000000000000" pitchFamily="18" charset="-120"/>
+                    <a:ea typeface="PMingLiU" panose="02020500000000000000" pitchFamily="18" charset="-120"/>
+                  </a:rPr>
+                  <a:t>利率改變時</a:t>
+                </a:r>
+                <a:endParaRPr lang="en-US" altLang="zh-CN" sz="1000" dirty="0">
+                  <a:latin typeface="PMingLiU" panose="02020500000000000000" pitchFamily="18" charset="-120"/>
+                  <a:ea typeface="PMingLiU" panose="02020500000000000000" pitchFamily="18" charset="-120"/>
+                </a:endParaRPr>
+              </a:p>
+              <a:p>
+                <a:pPr lvl="2">
+                  <a:buFont typeface="Wingdings" panose="05000000000000000000" pitchFamily="2" charset="2"/>
+                  <a:buChar char="ü"/>
+                </a:pPr>
+                <a:r>
+                  <a:rPr lang="en-US" altLang="zh-CN" sz="1000" dirty="0">
+                    <a:latin typeface="PMingLiU" panose="02020500000000000000" pitchFamily="18" charset="-120"/>
+                    <a:ea typeface="PMingLiU" panose="02020500000000000000" pitchFamily="18" charset="-120"/>
+                  </a:rPr>
+                  <a:t>Mint/burn/swap/liquidation/</a:t>
+                </a:r>
+                <a:r>
+                  <a:rPr lang="en-US" altLang="zh-CN" sz="1000" dirty="0" err="1">
+                    <a:latin typeface="PMingLiU" panose="02020500000000000000" pitchFamily="18" charset="-120"/>
+                    <a:ea typeface="PMingLiU" panose="02020500000000000000" pitchFamily="18" charset="-120"/>
+                  </a:rPr>
+                  <a:t>withdrawInterest</a:t>
+                </a:r>
+                <a:r>
+                  <a:rPr lang="en-US" altLang="zh-CN" sz="1000" dirty="0">
+                    <a:latin typeface="PMingLiU" panose="02020500000000000000" pitchFamily="18" charset="-120"/>
+                    <a:ea typeface="PMingLiU" panose="02020500000000000000" pitchFamily="18" charset="-120"/>
+                  </a:rPr>
+                  <a:t>…</a:t>
+                </a:r>
+              </a:p>
+              <a:p>
+                <a:pPr lvl="2"/>
+                <a:endParaRPr lang="en-US" altLang="zh-CN" sz="1200" dirty="0">
+                  <a:latin typeface="PMingLiU" panose="02020500000000000000" pitchFamily="18" charset="-120"/>
+                  <a:ea typeface="PMingLiU" panose="02020500000000000000" pitchFamily="18" charset="-120"/>
+                </a:endParaRPr>
+              </a:p>
+              <a:p>
+                <a:pPr lvl="2"/>
+                <a:endParaRPr lang="en-US" altLang="zh-CN" sz="1200" dirty="0">
+                  <a:latin typeface="PMingLiU" panose="02020500000000000000" pitchFamily="18" charset="-120"/>
+                  <a:ea typeface="PMingLiU" panose="02020500000000000000" pitchFamily="18" charset="-120"/>
+                </a:endParaRPr>
+              </a:p>
+              <a:p>
+                <a:pPr lvl="2"/>
+                <a:endParaRPr lang="en-US" altLang="zh-CN" sz="1200" dirty="0">
+                  <a:latin typeface="PMingLiU" panose="02020500000000000000" pitchFamily="18" charset="-120"/>
+                  <a:ea typeface="PMingLiU" panose="02020500000000000000" pitchFamily="18" charset="-120"/>
+                </a:endParaRPr>
+              </a:p>
+              <a:p>
+                <a:pPr lvl="1"/>
+                <a:endParaRPr lang="en-US" sz="1600" dirty="0">
+                  <a:latin typeface="PMingLiU" panose="02020500000000000000" pitchFamily="18" charset="-120"/>
+                  <a:ea typeface="PMingLiU" panose="02020500000000000000" pitchFamily="18" charset="-120"/>
+                </a:endParaRPr>
+              </a:p>
+            </p:txBody>
+          </p:sp>
+        </mc:Choice>
+        <mc:Fallback xmlns="">
+          <p:sp>
+            <p:nvSpPr>
+              <p:cNvPr id="3" name="Content Placeholder 2">
+                <a:extLst>
+                  <a:ext uri="{FF2B5EF4-FFF2-40B4-BE49-F238E27FC236}">
+                    <a16:creationId xmlns:a16="http://schemas.microsoft.com/office/drawing/2014/main" id="{E60A29B1-67F6-80ED-2357-1F67CB3A3871}"/>
+                  </a:ext>
+                </a:extLst>
+              </p:cNvPr>
+              <p:cNvSpPr>
+                <a:spLocks noGrp="1" noRot="1" noChangeAspect="1" noMove="1" noResize="1" noEditPoints="1" noAdjustHandles="1" noChangeArrowheads="1" noChangeShapeType="1" noTextEdit="1"/>
+              </p:cNvSpPr>
+              <p:nvPr>
+                <p:ph idx="1"/>
+              </p:nvPr>
+            </p:nvSpPr>
+            <p:spPr>
+              <a:blipFill>
+                <a:blip r:embed="rId2"/>
+                <a:stretch>
+                  <a:fillRect l="-522" t="-1401"/>
+                </a:stretch>
+              </a:blipFill>
+            </p:spPr>
+            <p:txBody>
+              <a:bodyPr/>
+              <a:lstStyle/>
+              <a:p>
+                <a:r>
+                  <a:rPr lang="en-US">
+                    <a:noFill/>
+                  </a:rPr>
+                  <a:t> </a:t>
+                </a:r>
+              </a:p>
+            </p:txBody>
+          </p:sp>
+        </mc:Fallback>
+      </mc:AlternateContent>
     </p:spTree>
     <p:extLst>
       <p:ext uri="{BB962C8B-B14F-4D97-AF65-F5344CB8AC3E}">
@@ -21452,6 +24513,401 @@
     <p:extLst>
       <p:ext uri="{BB962C8B-B14F-4D97-AF65-F5344CB8AC3E}">
         <p14:creationId xmlns:p14="http://schemas.microsoft.com/office/powerpoint/2010/main" val="2889288088"/>
+      </p:ext>
+    </p:extLst>
+  </p:cSld>
+  <p:clrMapOvr>
+    <a:masterClrMapping/>
+  </p:clrMapOvr>
+</p:sld>
+</file>
+
+<file path=ppt/slides/slide20.xml><?xml version="1.0" encoding="utf-8"?>
+<p:sld xmlns:a="http://schemas.openxmlformats.org/drawingml/2006/main" xmlns:r="http://schemas.openxmlformats.org/officeDocument/2006/relationships" xmlns:p="http://schemas.openxmlformats.org/presentationml/2006/main">
+  <p:cSld>
+    <p:spTree>
+      <p:nvGrpSpPr>
+        <p:cNvPr id="1" name=""/>
+        <p:cNvGrpSpPr/>
+        <p:nvPr/>
+      </p:nvGrpSpPr>
+      <p:grpSpPr>
+        <a:xfrm>
+          <a:off x="0" y="0"/>
+          <a:ext cx="0" cy="0"/>
+          <a:chOff x="0" y="0"/>
+          <a:chExt cx="0" cy="0"/>
+        </a:xfrm>
+      </p:grpSpPr>
+      <p:sp>
+        <p:nvSpPr>
+          <p:cNvPr id="2" name="Title 1">
+            <a:extLst>
+              <a:ext uri="{FF2B5EF4-FFF2-40B4-BE49-F238E27FC236}">
+                <a16:creationId xmlns:a16="http://schemas.microsoft.com/office/drawing/2014/main" id="{90B6D504-FE35-8119-7951-AB857D26A010}"/>
+              </a:ext>
+            </a:extLst>
+          </p:cNvPr>
+          <p:cNvSpPr>
+            <a:spLocks noGrp="1"/>
+          </p:cNvSpPr>
+          <p:nvPr>
+            <p:ph type="title"/>
+          </p:nvPr>
+        </p:nvSpPr>
+        <p:spPr/>
+        <p:txBody>
+          <a:bodyPr/>
+          <a:lstStyle/>
+          <a:p>
+            <a:r>
+              <a:rPr lang="zh-CN" altLang="en-US" dirty="0"/>
+              <a:t>智能合約</a:t>
+            </a:r>
+            <a:r>
+              <a:rPr lang="en-US" altLang="zh-CN" dirty="0"/>
+              <a:t>(</a:t>
+            </a:r>
+            <a:r>
+              <a:rPr lang="zh-CN" altLang="en-US" dirty="0"/>
+              <a:t>規範</a:t>
+            </a:r>
+            <a:r>
+              <a:rPr lang="en-US" altLang="zh-CN" dirty="0"/>
+              <a:t>,</a:t>
+            </a:r>
+            <a:r>
+              <a:rPr lang="zh-CN" altLang="en-US" dirty="0"/>
+              <a:t>架構</a:t>
+            </a:r>
+            <a:r>
+              <a:rPr lang="en-US" altLang="zh-CN" dirty="0"/>
+              <a:t>,</a:t>
+            </a:r>
+            <a:r>
+              <a:rPr lang="zh-CN" altLang="en-US" dirty="0"/>
+              <a:t>部署</a:t>
+            </a:r>
+            <a:r>
+              <a:rPr lang="en-US" altLang="zh-CN" dirty="0"/>
+              <a:t>)</a:t>
+            </a:r>
+            <a:endParaRPr lang="en-US" dirty="0"/>
+          </a:p>
+        </p:txBody>
+      </p:sp>
+      <p:sp>
+        <p:nvSpPr>
+          <p:cNvPr id="3" name="Content Placeholder 2">
+            <a:extLst>
+              <a:ext uri="{FF2B5EF4-FFF2-40B4-BE49-F238E27FC236}">
+                <a16:creationId xmlns:a16="http://schemas.microsoft.com/office/drawing/2014/main" id="{E60A29B1-67F6-80ED-2357-1F67CB3A3871}"/>
+              </a:ext>
+            </a:extLst>
+          </p:cNvPr>
+          <p:cNvSpPr>
+            <a:spLocks noGrp="1"/>
+          </p:cNvSpPr>
+          <p:nvPr>
+            <p:ph idx="1"/>
+          </p:nvPr>
+        </p:nvSpPr>
+        <p:spPr/>
+        <p:txBody>
+          <a:bodyPr/>
+          <a:lstStyle/>
+          <a:p>
+            <a:r>
+              <a:rPr lang="en-US" altLang="zh-CN" sz="2000" b="1" dirty="0">
+                <a:latin typeface="PMingLiU" panose="02020500000000000000" pitchFamily="18" charset="-120"/>
+                <a:ea typeface="PMingLiU" panose="02020500000000000000" pitchFamily="18" charset="-120"/>
+              </a:rPr>
+              <a:t>Allowance/transfer</a:t>
+            </a:r>
+            <a:r>
+              <a:rPr lang="zh-CN" altLang="en-US" sz="2000" b="1" dirty="0">
+                <a:latin typeface="PMingLiU" panose="02020500000000000000" pitchFamily="18" charset="-120"/>
+                <a:ea typeface="PMingLiU" panose="02020500000000000000" pitchFamily="18" charset="-120"/>
+              </a:rPr>
+              <a:t>機制</a:t>
+            </a:r>
+            <a:endParaRPr lang="en-US" altLang="zh-CN" sz="2000" b="1" dirty="0">
+              <a:latin typeface="PMingLiU" panose="02020500000000000000" pitchFamily="18" charset="-120"/>
+              <a:ea typeface="PMingLiU" panose="02020500000000000000" pitchFamily="18" charset="-120"/>
+            </a:endParaRPr>
+          </a:p>
+          <a:p>
+            <a:pPr lvl="1"/>
+            <a:r>
+              <a:rPr lang="en-US" altLang="zh-CN" sz="1600" b="1" dirty="0" err="1">
+                <a:latin typeface="PMingLiU" panose="02020500000000000000" pitchFamily="18" charset="-120"/>
+                <a:ea typeface="PMingLiU" panose="02020500000000000000" pitchFamily="18" charset="-120"/>
+              </a:rPr>
+              <a:t>underlyingToken.allowance</a:t>
+            </a:r>
+            <a:r>
+              <a:rPr lang="en-US" altLang="zh-CN" sz="1600" b="1" dirty="0">
+                <a:latin typeface="PMingLiU" panose="02020500000000000000" pitchFamily="18" charset="-120"/>
+                <a:ea typeface="PMingLiU" panose="02020500000000000000" pitchFamily="18" charset="-120"/>
+              </a:rPr>
+              <a:t>(</a:t>
+            </a:r>
+            <a:r>
+              <a:rPr lang="en-US" altLang="zh-CN" sz="1600" b="1" dirty="0" err="1">
+                <a:latin typeface="PMingLiU" panose="02020500000000000000" pitchFamily="18" charset="-120"/>
+                <a:ea typeface="PMingLiU" panose="02020500000000000000" pitchFamily="18" charset="-120"/>
+              </a:rPr>
+              <a:t>msg.sender</a:t>
+            </a:r>
+            <a:r>
+              <a:rPr lang="en-US" altLang="zh-CN" sz="1600" b="1" dirty="0">
+                <a:latin typeface="PMingLiU" panose="02020500000000000000" pitchFamily="18" charset="-120"/>
+                <a:ea typeface="PMingLiU" panose="02020500000000000000" pitchFamily="18" charset="-120"/>
+              </a:rPr>
+              <a:t>, address(this)) //</a:t>
+            </a:r>
+            <a:r>
+              <a:rPr lang="zh-CN" altLang="en-US" sz="1600" b="1" dirty="0">
+                <a:latin typeface="PMingLiU" panose="02020500000000000000" pitchFamily="18" charset="-120"/>
+                <a:ea typeface="PMingLiU" panose="02020500000000000000" pitchFamily="18" charset="-120"/>
+              </a:rPr>
+              <a:t>執行者</a:t>
+            </a:r>
+            <a:r>
+              <a:rPr lang="en-US" altLang="zh-CN" sz="1600" b="1" dirty="0">
+                <a:latin typeface="PMingLiU" panose="02020500000000000000" pitchFamily="18" charset="-120"/>
+                <a:ea typeface="PMingLiU" panose="02020500000000000000" pitchFamily="18" charset="-120"/>
+                <a:sym typeface="Wingdings" panose="05000000000000000000" pitchFamily="2" charset="2"/>
+              </a:rPr>
+              <a:t></a:t>
+            </a:r>
+            <a:r>
+              <a:rPr lang="zh-CN" altLang="en-US" sz="1600" b="1" dirty="0">
+                <a:latin typeface="PMingLiU" panose="02020500000000000000" pitchFamily="18" charset="-120"/>
+                <a:ea typeface="PMingLiU" panose="02020500000000000000" pitchFamily="18" charset="-120"/>
+                <a:sym typeface="Wingdings" panose="05000000000000000000" pitchFamily="2" charset="2"/>
+              </a:rPr>
+              <a:t>當前合約的</a:t>
+            </a:r>
+            <a:r>
+              <a:rPr lang="en-US" altLang="zh-CN" sz="1600" b="1" dirty="0">
+                <a:latin typeface="PMingLiU" panose="02020500000000000000" pitchFamily="18" charset="-120"/>
+                <a:ea typeface="PMingLiU" panose="02020500000000000000" pitchFamily="18" charset="-120"/>
+                <a:sym typeface="Wingdings" panose="05000000000000000000" pitchFamily="2" charset="2"/>
+              </a:rPr>
+              <a:t>allowance</a:t>
+            </a:r>
+            <a:endParaRPr lang="en-US" altLang="zh-CN" sz="1600" b="1" dirty="0">
+              <a:latin typeface="PMingLiU" panose="02020500000000000000" pitchFamily="18" charset="-120"/>
+              <a:ea typeface="PMingLiU" panose="02020500000000000000" pitchFamily="18" charset="-120"/>
+            </a:endParaRPr>
+          </a:p>
+          <a:p>
+            <a:pPr lvl="1"/>
+            <a:r>
+              <a:rPr lang="en-US" altLang="zh-CN" sz="1600" b="1" dirty="0" err="1">
+                <a:latin typeface="PMingLiU" panose="02020500000000000000" pitchFamily="18" charset="-120"/>
+                <a:ea typeface="PMingLiU" panose="02020500000000000000" pitchFamily="18" charset="-120"/>
+              </a:rPr>
+              <a:t>underlyingToken.safeTransferFrom</a:t>
+            </a:r>
+            <a:r>
+              <a:rPr lang="en-US" altLang="zh-CN" sz="1600" b="1" dirty="0">
+                <a:latin typeface="PMingLiU" panose="02020500000000000000" pitchFamily="18" charset="-120"/>
+                <a:ea typeface="PMingLiU" panose="02020500000000000000" pitchFamily="18" charset="-120"/>
+              </a:rPr>
+              <a:t>(</a:t>
+            </a:r>
+            <a:r>
+              <a:rPr lang="en-US" altLang="zh-CN" sz="1600" b="1" dirty="0" err="1">
+                <a:latin typeface="PMingLiU" panose="02020500000000000000" pitchFamily="18" charset="-120"/>
+                <a:ea typeface="PMingLiU" panose="02020500000000000000" pitchFamily="18" charset="-120"/>
+              </a:rPr>
+              <a:t>msg.sender</a:t>
+            </a:r>
+            <a:r>
+              <a:rPr lang="en-US" altLang="zh-CN" sz="1600" b="1" dirty="0">
+                <a:latin typeface="PMingLiU" panose="02020500000000000000" pitchFamily="18" charset="-120"/>
+                <a:ea typeface="PMingLiU" panose="02020500000000000000" pitchFamily="18" charset="-120"/>
+              </a:rPr>
+              <a:t>, receiver, amount) //</a:t>
+            </a:r>
+            <a:r>
+              <a:rPr lang="zh-CN" altLang="en-US" sz="1600" b="1" dirty="0">
+                <a:latin typeface="PMingLiU" panose="02020500000000000000" pitchFamily="18" charset="-120"/>
+                <a:ea typeface="PMingLiU" panose="02020500000000000000" pitchFamily="18" charset="-120"/>
+              </a:rPr>
+              <a:t>執行者</a:t>
+            </a:r>
+            <a:r>
+              <a:rPr lang="en-US" altLang="zh-CN" sz="1600" b="1" dirty="0">
+                <a:latin typeface="PMingLiU" panose="02020500000000000000" pitchFamily="18" charset="-120"/>
+                <a:ea typeface="PMingLiU" panose="02020500000000000000" pitchFamily="18" charset="-120"/>
+                <a:sym typeface="Wingdings" panose="05000000000000000000" pitchFamily="2" charset="2"/>
+              </a:rPr>
+              <a:t></a:t>
+            </a:r>
+            <a:r>
+              <a:rPr lang="zh-CN" altLang="en-US" sz="1600" b="1" dirty="0">
+                <a:latin typeface="PMingLiU" panose="02020500000000000000" pitchFamily="18" charset="-120"/>
+                <a:ea typeface="PMingLiU" panose="02020500000000000000" pitchFamily="18" charset="-120"/>
+                <a:sym typeface="Wingdings" panose="05000000000000000000" pitchFamily="2" charset="2"/>
+              </a:rPr>
+              <a:t>接收者的</a:t>
+            </a:r>
+            <a:r>
+              <a:rPr lang="en-US" altLang="zh-CN" sz="1600" b="1">
+                <a:latin typeface="PMingLiU" panose="02020500000000000000" pitchFamily="18" charset="-120"/>
+                <a:ea typeface="PMingLiU" panose="02020500000000000000" pitchFamily="18" charset="-120"/>
+                <a:sym typeface="Wingdings" panose="05000000000000000000" pitchFamily="2" charset="2"/>
+              </a:rPr>
+              <a:t>transfer</a:t>
+            </a:r>
+          </a:p>
+          <a:p>
+            <a:endParaRPr lang="en-US" altLang="zh-CN" sz="2000" b="1" dirty="0">
+              <a:latin typeface="PMingLiU" panose="02020500000000000000" pitchFamily="18" charset="-120"/>
+              <a:ea typeface="PMingLiU" panose="02020500000000000000" pitchFamily="18" charset="-120"/>
+            </a:endParaRPr>
+          </a:p>
+          <a:p>
+            <a:pPr lvl="1"/>
+            <a:endParaRPr lang="en-US" sz="1600" dirty="0">
+              <a:latin typeface="PMingLiU" panose="02020500000000000000" pitchFamily="18" charset="-120"/>
+              <a:ea typeface="PMingLiU" panose="02020500000000000000" pitchFamily="18" charset="-120"/>
+            </a:endParaRPr>
+          </a:p>
+        </p:txBody>
+      </p:sp>
+    </p:spTree>
+    <p:extLst>
+      <p:ext uri="{BB962C8B-B14F-4D97-AF65-F5344CB8AC3E}">
+        <p14:creationId xmlns:p14="http://schemas.microsoft.com/office/powerpoint/2010/main" val="2217019307"/>
+      </p:ext>
+    </p:extLst>
+  </p:cSld>
+  <p:clrMapOvr>
+    <a:masterClrMapping/>
+  </p:clrMapOvr>
+</p:sld>
+</file>
+
+<file path=ppt/slides/slide21.xml><?xml version="1.0" encoding="utf-8"?>
+<p:sld xmlns:a="http://schemas.openxmlformats.org/drawingml/2006/main" xmlns:r="http://schemas.openxmlformats.org/officeDocument/2006/relationships" xmlns:p="http://schemas.openxmlformats.org/presentationml/2006/main">
+  <p:cSld>
+    <p:spTree>
+      <p:nvGrpSpPr>
+        <p:cNvPr id="1" name=""/>
+        <p:cNvGrpSpPr/>
+        <p:nvPr/>
+      </p:nvGrpSpPr>
+      <p:grpSpPr>
+        <a:xfrm>
+          <a:off x="0" y="0"/>
+          <a:ext cx="0" cy="0"/>
+          <a:chOff x="0" y="0"/>
+          <a:chExt cx="0" cy="0"/>
+        </a:xfrm>
+      </p:grpSpPr>
+      <p:sp>
+        <p:nvSpPr>
+          <p:cNvPr id="2" name="Title 1">
+            <a:extLst>
+              <a:ext uri="{FF2B5EF4-FFF2-40B4-BE49-F238E27FC236}">
+                <a16:creationId xmlns:a16="http://schemas.microsoft.com/office/drawing/2014/main" id="{90B6D504-FE35-8119-7951-AB857D26A010}"/>
+              </a:ext>
+            </a:extLst>
+          </p:cNvPr>
+          <p:cNvSpPr>
+            <a:spLocks noGrp="1"/>
+          </p:cNvSpPr>
+          <p:nvPr>
+            <p:ph type="title"/>
+          </p:nvPr>
+        </p:nvSpPr>
+        <p:spPr/>
+        <p:txBody>
+          <a:bodyPr/>
+          <a:lstStyle/>
+          <a:p>
+            <a:r>
+              <a:rPr lang="zh-CN" altLang="en-US" dirty="0"/>
+              <a:t>智能合約</a:t>
+            </a:r>
+            <a:r>
+              <a:rPr lang="en-US" altLang="zh-CN" dirty="0"/>
+              <a:t>(</a:t>
+            </a:r>
+            <a:r>
+              <a:rPr lang="zh-CN" altLang="en-US" dirty="0"/>
+              <a:t>規範</a:t>
+            </a:r>
+            <a:r>
+              <a:rPr lang="en-US" altLang="zh-CN" dirty="0"/>
+              <a:t>,</a:t>
+            </a:r>
+            <a:r>
+              <a:rPr lang="zh-CN" altLang="en-US" dirty="0"/>
+              <a:t>架構</a:t>
+            </a:r>
+            <a:r>
+              <a:rPr lang="en-US" altLang="zh-CN" dirty="0"/>
+              <a:t>,</a:t>
+            </a:r>
+            <a:r>
+              <a:rPr lang="zh-CN" altLang="en-US" dirty="0"/>
+              <a:t>部署</a:t>
+            </a:r>
+            <a:r>
+              <a:rPr lang="en-US" altLang="zh-CN" dirty="0"/>
+              <a:t>)</a:t>
+            </a:r>
+            <a:endParaRPr lang="en-US" dirty="0"/>
+          </a:p>
+        </p:txBody>
+      </p:sp>
+      <p:sp>
+        <p:nvSpPr>
+          <p:cNvPr id="3" name="Content Placeholder 2">
+            <a:extLst>
+              <a:ext uri="{FF2B5EF4-FFF2-40B4-BE49-F238E27FC236}">
+                <a16:creationId xmlns:a16="http://schemas.microsoft.com/office/drawing/2014/main" id="{E60A29B1-67F6-80ED-2357-1F67CB3A3871}"/>
+              </a:ext>
+            </a:extLst>
+          </p:cNvPr>
+          <p:cNvSpPr>
+            <a:spLocks noGrp="1"/>
+          </p:cNvSpPr>
+          <p:nvPr>
+            <p:ph idx="1"/>
+          </p:nvPr>
+        </p:nvSpPr>
+        <p:spPr/>
+        <p:txBody>
+          <a:bodyPr/>
+          <a:lstStyle/>
+          <a:p>
+            <a:r>
+              <a:rPr lang="en-US" altLang="zh-CN" sz="2000" b="1" dirty="0">
+                <a:latin typeface="PMingLiU" panose="02020500000000000000" pitchFamily="18" charset="-120"/>
+                <a:ea typeface="PMingLiU" panose="02020500000000000000" pitchFamily="18" charset="-120"/>
+              </a:rPr>
+              <a:t>Public/external</a:t>
+            </a:r>
+          </a:p>
+          <a:p>
+            <a:pPr lvl="1"/>
+            <a:endParaRPr lang="en-US" sz="1600" dirty="0">
+              <a:latin typeface="PMingLiU" panose="02020500000000000000" pitchFamily="18" charset="-120"/>
+              <a:ea typeface="PMingLiU" panose="02020500000000000000" pitchFamily="18" charset="-120"/>
+            </a:endParaRPr>
+          </a:p>
+        </p:txBody>
+      </p:sp>
+    </p:spTree>
+    <p:extLst>
+      <p:ext uri="{BB962C8B-B14F-4D97-AF65-F5344CB8AC3E}">
+        <p14:creationId xmlns:p14="http://schemas.microsoft.com/office/powerpoint/2010/main" val="1678520548"/>
       </p:ext>
     </p:extLst>
   </p:cSld>
@@ -25960,6 +29416,114 @@
 <file path=ppt/slides/slide7.xml><?xml version="1.0" encoding="utf-8"?>
 <p:sld xmlns:a="http://schemas.openxmlformats.org/drawingml/2006/main" xmlns:r="http://schemas.openxmlformats.org/officeDocument/2006/relationships" xmlns:p="http://schemas.openxmlformats.org/presentationml/2006/main">
   <p:cSld>
+    <p:spTree>
+      <p:nvGrpSpPr>
+        <p:cNvPr id="1" name=""/>
+        <p:cNvGrpSpPr/>
+        <p:nvPr/>
+      </p:nvGrpSpPr>
+      <p:grpSpPr>
+        <a:xfrm>
+          <a:off x="0" y="0"/>
+          <a:ext cx="0" cy="0"/>
+          <a:chOff x="0" y="0"/>
+          <a:chExt cx="0" cy="0"/>
+        </a:xfrm>
+      </p:grpSpPr>
+      <p:sp>
+        <p:nvSpPr>
+          <p:cNvPr id="2" name="Title 1">
+            <a:extLst>
+              <a:ext uri="{FF2B5EF4-FFF2-40B4-BE49-F238E27FC236}">
+                <a16:creationId xmlns:a16="http://schemas.microsoft.com/office/drawing/2014/main" id="{107BE78B-8D51-011D-974A-AABEC09F906F}"/>
+              </a:ext>
+            </a:extLst>
+          </p:cNvPr>
+          <p:cNvSpPr>
+            <a:spLocks noGrp="1"/>
+          </p:cNvSpPr>
+          <p:nvPr>
+            <p:ph type="title"/>
+          </p:nvPr>
+        </p:nvSpPr>
+        <p:spPr/>
+        <p:txBody>
+          <a:bodyPr/>
+          <a:lstStyle/>
+          <a:p>
+            <a:r>
+              <a:rPr lang="en-US" sz="4400" dirty="0"/>
+              <a:t>Model </a:t>
+            </a:r>
+            <a:r>
+              <a:rPr lang="en-US" sz="4400" dirty="0">
+                <a:latin typeface="Abadi" panose="020B0604020104020204" pitchFamily="34" charset="0"/>
+              </a:rPr>
+              <a:t>Ⅱ</a:t>
+            </a:r>
+            <a:r>
+              <a:rPr lang="en-US" altLang="zh-CN" sz="4400" dirty="0"/>
+              <a:t>——Interest Rate Model</a:t>
+            </a:r>
+            <a:endParaRPr lang="en-US" dirty="0"/>
+          </a:p>
+        </p:txBody>
+      </p:sp>
+      <p:sp>
+        <p:nvSpPr>
+          <p:cNvPr id="3" name="Content Placeholder 2">
+            <a:extLst>
+              <a:ext uri="{FF2B5EF4-FFF2-40B4-BE49-F238E27FC236}">
+                <a16:creationId xmlns:a16="http://schemas.microsoft.com/office/drawing/2014/main" id="{57DB10B0-F83C-DAF3-25F5-EDC779462EC2}"/>
+              </a:ext>
+            </a:extLst>
+          </p:cNvPr>
+          <p:cNvSpPr>
+            <a:spLocks noGrp="1"/>
+          </p:cNvSpPr>
+          <p:nvPr>
+            <p:ph idx="1"/>
+          </p:nvPr>
+        </p:nvSpPr>
+        <p:spPr/>
+        <p:txBody>
+          <a:bodyPr/>
+          <a:lstStyle/>
+          <a:p>
+            <a:r>
+              <a:rPr lang="en-US" dirty="0"/>
+              <a:t>S</a:t>
+            </a:r>
+            <a:r>
+              <a:rPr lang="en-US" altLang="zh-CN" dirty="0"/>
+              <a:t>mart Contract</a:t>
+            </a:r>
+          </a:p>
+          <a:p>
+            <a:pPr lvl="1"/>
+            <a:r>
+              <a:rPr lang="en-US" dirty="0"/>
+              <a:t>Lazy Evaluation + Global Index</a:t>
+            </a:r>
+          </a:p>
+        </p:txBody>
+      </p:sp>
+    </p:spTree>
+    <p:extLst>
+      <p:ext uri="{BB962C8B-B14F-4D97-AF65-F5344CB8AC3E}">
+        <p14:creationId xmlns:p14="http://schemas.microsoft.com/office/powerpoint/2010/main" val="2680598906"/>
+      </p:ext>
+    </p:extLst>
+  </p:cSld>
+  <p:clrMapOvr>
+    <a:masterClrMapping/>
+  </p:clrMapOvr>
+</p:sld>
+</file>
+
+<file path=ppt/slides/slide8.xml><?xml version="1.0" encoding="utf-8"?>
+<p:sld xmlns:a="http://schemas.openxmlformats.org/drawingml/2006/main" xmlns:r="http://schemas.openxmlformats.org/officeDocument/2006/relationships" xmlns:p="http://schemas.openxmlformats.org/presentationml/2006/main">
+  <p:cSld>
     <p:bg>
       <p:bgPr>
         <a:solidFill>
@@ -26380,7 +29944,7 @@
 </p:sld>
 </file>
 
-<file path=ppt/slides/slide8.xml><?xml version="1.0" encoding="utf-8"?>
+<file path=ppt/slides/slide9.xml><?xml version="1.0" encoding="utf-8"?>
 <p:sld xmlns:a="http://schemas.openxmlformats.org/drawingml/2006/main" xmlns:r="http://schemas.openxmlformats.org/officeDocument/2006/relationships" xmlns:p="http://schemas.openxmlformats.org/presentationml/2006/main">
   <p:cSld>
     <p:spTree>
@@ -26471,1422 +30035,6 @@
     <p:extLst>
       <p:ext uri="{BB962C8B-B14F-4D97-AF65-F5344CB8AC3E}">
         <p14:creationId xmlns:p14="http://schemas.microsoft.com/office/powerpoint/2010/main" val="789578163"/>
-      </p:ext>
-    </p:extLst>
-  </p:cSld>
-  <p:clrMapOvr>
-    <a:masterClrMapping/>
-  </p:clrMapOvr>
-</p:sld>
-</file>
-
-<file path=ppt/slides/slide9.xml><?xml version="1.0" encoding="utf-8"?>
-<p:sld xmlns:a="http://schemas.openxmlformats.org/drawingml/2006/main" xmlns:r="http://schemas.openxmlformats.org/officeDocument/2006/relationships" xmlns:p="http://schemas.openxmlformats.org/presentationml/2006/main">
-  <p:cSld>
-    <p:spTree>
-      <p:nvGrpSpPr>
-        <p:cNvPr id="1" name=""/>
-        <p:cNvGrpSpPr/>
-        <p:nvPr/>
-      </p:nvGrpSpPr>
-      <p:grpSpPr>
-        <a:xfrm>
-          <a:off x="0" y="0"/>
-          <a:ext cx="0" cy="0"/>
-          <a:chOff x="0" y="0"/>
-          <a:chExt cx="0" cy="0"/>
-        </a:xfrm>
-      </p:grpSpPr>
-      <p:sp>
-        <p:nvSpPr>
-          <p:cNvPr id="2" name="Title 1">
-            <a:extLst>
-              <a:ext uri="{FF2B5EF4-FFF2-40B4-BE49-F238E27FC236}">
-                <a16:creationId xmlns:a16="http://schemas.microsoft.com/office/drawing/2014/main" id="{06495D84-7197-9E06-A96E-BBD7A76329B0}"/>
-              </a:ext>
-            </a:extLst>
-          </p:cNvPr>
-          <p:cNvSpPr>
-            <a:spLocks noGrp="1"/>
-          </p:cNvSpPr>
-          <p:nvPr>
-            <p:ph type="title"/>
-          </p:nvPr>
-        </p:nvSpPr>
-        <p:spPr/>
-        <p:txBody>
-          <a:bodyPr/>
-          <a:lstStyle/>
-          <a:p>
-            <a:r>
-              <a:rPr lang="en-US" dirty="0"/>
-              <a:t>Model </a:t>
-            </a:r>
-            <a:r>
-              <a:rPr lang="en-US" dirty="0">
-                <a:latin typeface="Abadi" panose="020B0604020104020204" pitchFamily="34" charset="0"/>
-              </a:rPr>
-              <a:t>Ⅴ</a:t>
-            </a:r>
-            <a:r>
-              <a:rPr lang="en-US" altLang="zh-CN" dirty="0"/>
-              <a:t>——Liquidation</a:t>
-            </a:r>
-            <a:endParaRPr lang="en-US" dirty="0"/>
-          </a:p>
-        </p:txBody>
-      </p:sp>
-      <p:sp>
-        <p:nvSpPr>
-          <p:cNvPr id="4" name="Rounded Rectangle 3">
-            <a:extLst>
-              <a:ext uri="{FF2B5EF4-FFF2-40B4-BE49-F238E27FC236}">
-                <a16:creationId xmlns:a16="http://schemas.microsoft.com/office/drawing/2014/main" id="{42C8E76A-10E7-3760-6D84-B7E3ED9A8BEF}"/>
-              </a:ext>
-            </a:extLst>
-          </p:cNvPr>
-          <p:cNvSpPr/>
-          <p:nvPr/>
-        </p:nvSpPr>
-        <p:spPr>
-          <a:xfrm>
-            <a:off x="7664382" y="1679337"/>
-            <a:ext cx="2677884" cy="865414"/>
-          </a:xfrm>
-          <a:prstGeom prst="roundRect">
-            <a:avLst/>
-          </a:prstGeom>
-          <a:solidFill>
-            <a:schemeClr val="accent6"/>
-          </a:solidFill>
-        </p:spPr>
-        <p:style>
-          <a:lnRef idx="2">
-            <a:schemeClr val="accent1">
-              <a:shade val="15000"/>
-            </a:schemeClr>
-          </a:lnRef>
-          <a:fillRef idx="1">
-            <a:schemeClr val="accent1"/>
-          </a:fillRef>
-          <a:effectRef idx="0">
-            <a:schemeClr val="accent1"/>
-          </a:effectRef>
-          <a:fontRef idx="minor">
-            <a:schemeClr val="lt1"/>
-          </a:fontRef>
-        </p:style>
-        <p:txBody>
-          <a:bodyPr rtlCol="0" anchor="ctr"/>
-          <a:lstStyle/>
-          <a:p>
-            <a:pPr algn="ctr"/>
-            <a:r>
-              <a:rPr lang="en-US" dirty="0"/>
-              <a:t>Keeper</a:t>
-            </a:r>
-          </a:p>
-        </p:txBody>
-      </p:sp>
-      <p:sp>
-        <p:nvSpPr>
-          <p:cNvPr id="5" name="Rounded Rectangle 4">
-            <a:extLst>
-              <a:ext uri="{FF2B5EF4-FFF2-40B4-BE49-F238E27FC236}">
-                <a16:creationId xmlns:a16="http://schemas.microsoft.com/office/drawing/2014/main" id="{38444ACA-2414-4E78-262D-F78D0A36DE01}"/>
-              </a:ext>
-            </a:extLst>
-          </p:cNvPr>
-          <p:cNvSpPr/>
-          <p:nvPr/>
-        </p:nvSpPr>
-        <p:spPr>
-          <a:xfrm>
-            <a:off x="2316772" y="1692258"/>
-            <a:ext cx="2865665" cy="865414"/>
-          </a:xfrm>
-          <a:prstGeom prst="roundRect">
-            <a:avLst/>
-          </a:prstGeom>
-          <a:solidFill>
-            <a:schemeClr val="accent4"/>
-          </a:solidFill>
-        </p:spPr>
-        <p:style>
-          <a:lnRef idx="2">
-            <a:schemeClr val="accent1">
-              <a:shade val="15000"/>
-            </a:schemeClr>
-          </a:lnRef>
-          <a:fillRef idx="1">
-            <a:schemeClr val="accent1"/>
-          </a:fillRef>
-          <a:effectRef idx="0">
-            <a:schemeClr val="accent1"/>
-          </a:effectRef>
-          <a:fontRef idx="minor">
-            <a:schemeClr val="lt1"/>
-          </a:fontRef>
-        </p:style>
-        <p:txBody>
-          <a:bodyPr rtlCol="0" anchor="ctr"/>
-          <a:lstStyle/>
-          <a:p>
-            <a:pPr algn="ctr"/>
-            <a:endParaRPr lang="en-US" dirty="0"/>
-          </a:p>
-        </p:txBody>
-      </p:sp>
-      <p:sp>
-        <p:nvSpPr>
-          <p:cNvPr id="6" name="Rounded Rectangle 5">
-            <a:extLst>
-              <a:ext uri="{FF2B5EF4-FFF2-40B4-BE49-F238E27FC236}">
-                <a16:creationId xmlns:a16="http://schemas.microsoft.com/office/drawing/2014/main" id="{1D8CA94B-B8AD-F6C6-706E-D996349E92A5}"/>
-              </a:ext>
-            </a:extLst>
-          </p:cNvPr>
-          <p:cNvSpPr/>
-          <p:nvPr/>
-        </p:nvSpPr>
-        <p:spPr>
-          <a:xfrm>
-            <a:off x="2358203" y="3675631"/>
-            <a:ext cx="5225143" cy="2423345"/>
-          </a:xfrm>
-          <a:prstGeom prst="roundRect">
-            <a:avLst/>
-          </a:prstGeom>
-          <a:solidFill>
-            <a:schemeClr val="accent2"/>
-          </a:solidFill>
-          <a:ln>
-            <a:solidFill>
-              <a:schemeClr val="tx1"/>
-            </a:solidFill>
-          </a:ln>
-        </p:spPr>
-        <p:style>
-          <a:lnRef idx="2">
-            <a:schemeClr val="accent1">
-              <a:shade val="15000"/>
-            </a:schemeClr>
-          </a:lnRef>
-          <a:fillRef idx="1">
-            <a:schemeClr val="accent1"/>
-          </a:fillRef>
-          <a:effectRef idx="0">
-            <a:schemeClr val="accent1"/>
-          </a:effectRef>
-          <a:fontRef idx="minor">
-            <a:schemeClr val="lt1"/>
-          </a:fontRef>
-        </p:style>
-        <p:txBody>
-          <a:bodyPr rtlCol="0" anchor="ctr"/>
-          <a:lstStyle/>
-          <a:p>
-            <a:pPr algn="ctr"/>
-            <a:endParaRPr lang="en-US"/>
-          </a:p>
-        </p:txBody>
-      </p:sp>
-      <p:sp>
-        <p:nvSpPr>
-          <p:cNvPr id="7" name="TextBox 6">
-            <a:extLst>
-              <a:ext uri="{FF2B5EF4-FFF2-40B4-BE49-F238E27FC236}">
-                <a16:creationId xmlns:a16="http://schemas.microsoft.com/office/drawing/2014/main" id="{5B8EFBDA-390B-3E49-686A-85880D57964E}"/>
-              </a:ext>
-            </a:extLst>
-          </p:cNvPr>
-          <p:cNvSpPr txBox="1"/>
-          <p:nvPr/>
-        </p:nvSpPr>
-        <p:spPr>
-          <a:xfrm>
-            <a:off x="2462025" y="4061889"/>
-            <a:ext cx="1657350" cy="369332"/>
-          </a:xfrm>
-          <a:prstGeom prst="rect">
-            <a:avLst/>
-          </a:prstGeom>
-          <a:noFill/>
-        </p:spPr>
-        <p:txBody>
-          <a:bodyPr wrap="square" rtlCol="0">
-            <a:spAutoFit/>
-          </a:bodyPr>
-          <a:lstStyle/>
-          <a:p>
-            <a:r>
-              <a:rPr lang="en-US" dirty="0"/>
-              <a:t>Custodian</a:t>
-            </a:r>
-          </a:p>
-        </p:txBody>
-      </p:sp>
-      <p:sp>
-        <p:nvSpPr>
-          <p:cNvPr id="8" name="Rounded Rectangle 7">
-            <a:extLst>
-              <a:ext uri="{FF2B5EF4-FFF2-40B4-BE49-F238E27FC236}">
-                <a16:creationId xmlns:a16="http://schemas.microsoft.com/office/drawing/2014/main" id="{2D656626-A99F-0516-98A4-E7E2CF8EB9DB}"/>
-              </a:ext>
-            </a:extLst>
-          </p:cNvPr>
-          <p:cNvSpPr/>
-          <p:nvPr/>
-        </p:nvSpPr>
-        <p:spPr>
-          <a:xfrm>
-            <a:off x="2629328" y="4588669"/>
-            <a:ext cx="4428472" cy="1365093"/>
-          </a:xfrm>
-          <a:prstGeom prst="roundRect">
-            <a:avLst/>
-          </a:prstGeom>
-        </p:spPr>
-        <p:style>
-          <a:lnRef idx="2">
-            <a:schemeClr val="accent1">
-              <a:shade val="15000"/>
-            </a:schemeClr>
-          </a:lnRef>
-          <a:fillRef idx="1">
-            <a:schemeClr val="accent1"/>
-          </a:fillRef>
-          <a:effectRef idx="0">
-            <a:schemeClr val="accent1"/>
-          </a:effectRef>
-          <a:fontRef idx="minor">
-            <a:schemeClr val="lt1"/>
-          </a:fontRef>
-        </p:style>
-        <p:txBody>
-          <a:bodyPr rtlCol="0" anchor="ctr"/>
-          <a:lstStyle/>
-          <a:p>
-            <a:pPr algn="ctr"/>
-            <a:endParaRPr lang="en-US" dirty="0"/>
-          </a:p>
-        </p:txBody>
-      </p:sp>
-      <p:sp>
-        <p:nvSpPr>
-          <p:cNvPr id="9" name="TextBox 9">
-            <a:extLst>
-              <a:ext uri="{FF2B5EF4-FFF2-40B4-BE49-F238E27FC236}">
-                <a16:creationId xmlns:a16="http://schemas.microsoft.com/office/drawing/2014/main" id="{0FF26A65-3175-DCEB-4E9F-A19EB5228536}"/>
-              </a:ext>
-            </a:extLst>
-          </p:cNvPr>
-          <p:cNvSpPr txBox="1"/>
-          <p:nvPr/>
-        </p:nvSpPr>
-        <p:spPr>
-          <a:xfrm>
-            <a:off x="2831126" y="4628589"/>
-            <a:ext cx="1257300" cy="369332"/>
-          </a:xfrm>
-          <a:prstGeom prst="rect">
-            <a:avLst/>
-          </a:prstGeom>
-          <a:noFill/>
-        </p:spPr>
-        <p:txBody>
-          <a:bodyPr wrap="square" rtlCol="0">
-            <a:spAutoFit/>
-          </a:bodyPr>
-          <a:lstStyle/>
-          <a:p>
-            <a:r>
-              <a:rPr lang="en-US" dirty="0"/>
-              <a:t>Auction</a:t>
-            </a:r>
-          </a:p>
-        </p:txBody>
-      </p:sp>
-      <p:sp>
-        <p:nvSpPr>
-          <p:cNvPr id="10" name="TextBox 12">
-            <a:extLst>
-              <a:ext uri="{FF2B5EF4-FFF2-40B4-BE49-F238E27FC236}">
-                <a16:creationId xmlns:a16="http://schemas.microsoft.com/office/drawing/2014/main" id="{31F02621-03A9-786A-2854-638296197E54}"/>
-              </a:ext>
-            </a:extLst>
-          </p:cNvPr>
-          <p:cNvSpPr txBox="1"/>
-          <p:nvPr/>
-        </p:nvSpPr>
-        <p:spPr>
-          <a:xfrm>
-            <a:off x="5364065" y="1820077"/>
-            <a:ext cx="2073728" cy="276999"/>
-          </a:xfrm>
-          <a:prstGeom prst="rect">
-            <a:avLst/>
-          </a:prstGeom>
-          <a:noFill/>
-        </p:spPr>
-        <p:txBody>
-          <a:bodyPr wrap="square" rtlCol="0">
-            <a:spAutoFit/>
-          </a:bodyPr>
-          <a:lstStyle/>
-          <a:p>
-            <a:r>
-              <a:rPr lang="en-SG" sz="1200" dirty="0"/>
-              <a:t>①</a:t>
-            </a:r>
-            <a:r>
-              <a:rPr lang="en-US" sz="1200" dirty="0"/>
-              <a:t>Bark</a:t>
-            </a:r>
-          </a:p>
-        </p:txBody>
-      </p:sp>
-      <p:sp>
-        <p:nvSpPr>
-          <p:cNvPr id="11" name="TextBox 13">
-            <a:extLst>
-              <a:ext uri="{FF2B5EF4-FFF2-40B4-BE49-F238E27FC236}">
-                <a16:creationId xmlns:a16="http://schemas.microsoft.com/office/drawing/2014/main" id="{E5EC2324-C1F6-C4B1-7475-C8EAD22AEBCD}"/>
-              </a:ext>
-            </a:extLst>
-          </p:cNvPr>
-          <p:cNvSpPr txBox="1"/>
-          <p:nvPr/>
-        </p:nvSpPr>
-        <p:spPr>
-          <a:xfrm>
-            <a:off x="2723952" y="1874977"/>
-            <a:ext cx="2363503" cy="369332"/>
-          </a:xfrm>
-          <a:prstGeom prst="rect">
-            <a:avLst/>
-          </a:prstGeom>
-          <a:noFill/>
-        </p:spPr>
-        <p:txBody>
-          <a:bodyPr wrap="square" rtlCol="0">
-            <a:spAutoFit/>
-          </a:bodyPr>
-          <a:lstStyle/>
-          <a:p>
-            <a:r>
-              <a:rPr lang="en-US" dirty="0">
-                <a:solidFill>
-                  <a:schemeClr val="bg1"/>
-                </a:solidFill>
-              </a:rPr>
-              <a:t>User</a:t>
-            </a:r>
-            <a:r>
-              <a:rPr lang="en-SG" dirty="0">
-                <a:solidFill>
-                  <a:schemeClr val="bg1"/>
-                </a:solidFill>
-              </a:rPr>
-              <a:t> </a:t>
-            </a:r>
-            <a:r>
-              <a:rPr lang="en-US" altLang="zh-CN" dirty="0">
-                <a:solidFill>
-                  <a:schemeClr val="bg1"/>
-                </a:solidFill>
-              </a:rPr>
-              <a:t>L token</a:t>
-            </a:r>
-            <a:endParaRPr lang="en-US" dirty="0">
-              <a:solidFill>
-                <a:schemeClr val="bg1"/>
-              </a:solidFill>
-            </a:endParaRPr>
-          </a:p>
-        </p:txBody>
-      </p:sp>
-      <p:sp>
-        <p:nvSpPr>
-          <p:cNvPr id="12" name="Oval 17">
-            <a:extLst>
-              <a:ext uri="{FF2B5EF4-FFF2-40B4-BE49-F238E27FC236}">
-                <a16:creationId xmlns:a16="http://schemas.microsoft.com/office/drawing/2014/main" id="{C0B85151-2080-E726-8E89-75E75159E966}"/>
-              </a:ext>
-            </a:extLst>
-          </p:cNvPr>
-          <p:cNvSpPr/>
-          <p:nvPr/>
-        </p:nvSpPr>
-        <p:spPr>
-          <a:xfrm>
-            <a:off x="831636" y="2805712"/>
-            <a:ext cx="2049236" cy="844514"/>
-          </a:xfrm>
-          <a:prstGeom prst="ellipse">
-            <a:avLst/>
-          </a:prstGeom>
-          <a:solidFill>
-            <a:schemeClr val="accent4">
-              <a:lumMod val="60000"/>
-              <a:lumOff val="40000"/>
-            </a:schemeClr>
-          </a:solidFill>
-        </p:spPr>
-        <p:style>
-          <a:lnRef idx="2">
-            <a:schemeClr val="accent1">
-              <a:shade val="15000"/>
-            </a:schemeClr>
-          </a:lnRef>
-          <a:fillRef idx="1">
-            <a:schemeClr val="accent1"/>
-          </a:fillRef>
-          <a:effectRef idx="0">
-            <a:schemeClr val="accent1"/>
-          </a:effectRef>
-          <a:fontRef idx="minor">
-            <a:schemeClr val="lt1"/>
-          </a:fontRef>
-        </p:style>
-        <p:txBody>
-          <a:bodyPr rtlCol="0" anchor="ctr"/>
-          <a:lstStyle/>
-          <a:p>
-            <a:pPr algn="ctr"/>
-            <a:endParaRPr lang="en-US" dirty="0"/>
-          </a:p>
-        </p:txBody>
-      </p:sp>
-      <p:sp>
-        <p:nvSpPr>
-          <p:cNvPr id="13" name="TextBox 18">
-            <a:extLst>
-              <a:ext uri="{FF2B5EF4-FFF2-40B4-BE49-F238E27FC236}">
-                <a16:creationId xmlns:a16="http://schemas.microsoft.com/office/drawing/2014/main" id="{C6DEB884-DD06-BC5B-042E-DCA411A0A931}"/>
-              </a:ext>
-            </a:extLst>
-          </p:cNvPr>
-          <p:cNvSpPr txBox="1"/>
-          <p:nvPr/>
-        </p:nvSpPr>
-        <p:spPr>
-          <a:xfrm>
-            <a:off x="1356818" y="2999812"/>
-            <a:ext cx="1224643" cy="461665"/>
-          </a:xfrm>
-          <a:prstGeom prst="rect">
-            <a:avLst/>
-          </a:prstGeom>
-          <a:noFill/>
-        </p:spPr>
-        <p:txBody>
-          <a:bodyPr wrap="square" rtlCol="0">
-            <a:spAutoFit/>
-          </a:bodyPr>
-          <a:lstStyle/>
-          <a:p>
-            <a:r>
-              <a:rPr lang="en-US" sz="1200" dirty="0">
-                <a:solidFill>
-                  <a:schemeClr val="bg1"/>
-                </a:solidFill>
-              </a:rPr>
-              <a:t>Burn  L token</a:t>
-            </a:r>
-          </a:p>
-          <a:p>
-            <a:r>
-              <a:rPr lang="en-US" sz="1200" dirty="0">
-                <a:solidFill>
-                  <a:schemeClr val="bg1"/>
-                </a:solidFill>
-              </a:rPr>
-              <a:t>Burn  S token</a:t>
-            </a:r>
-          </a:p>
-        </p:txBody>
-      </p:sp>
-      <p:cxnSp>
-        <p:nvCxnSpPr>
-          <p:cNvPr id="14" name="Elbow Connector 24">
-            <a:extLst>
-              <a:ext uri="{FF2B5EF4-FFF2-40B4-BE49-F238E27FC236}">
-                <a16:creationId xmlns:a16="http://schemas.microsoft.com/office/drawing/2014/main" id="{9EEE1B21-8443-779E-1838-54F8573C0C22}"/>
-              </a:ext>
-            </a:extLst>
-          </p:cNvPr>
-          <p:cNvCxnSpPr>
-            <a:cxnSpLocks/>
-          </p:cNvCxnSpPr>
-          <p:nvPr/>
-        </p:nvCxnSpPr>
-        <p:spPr>
-          <a:xfrm rot="10800000" flipV="1">
-            <a:off x="1770804" y="2065071"/>
-            <a:ext cx="1060322" cy="761222"/>
-          </a:xfrm>
-          <a:prstGeom prst="bentConnector4">
-            <a:avLst>
-              <a:gd name="adj1" fmla="val 82594"/>
-              <a:gd name="adj2" fmla="val 169"/>
-            </a:avLst>
-          </a:prstGeom>
-          <a:ln>
-            <a:tailEnd type="triangle"/>
-          </a:ln>
-        </p:spPr>
-        <p:style>
-          <a:lnRef idx="2">
-            <a:schemeClr val="dk1"/>
-          </a:lnRef>
-          <a:fillRef idx="0">
-            <a:schemeClr val="dk1"/>
-          </a:fillRef>
-          <a:effectRef idx="1">
-            <a:schemeClr val="dk1"/>
-          </a:effectRef>
-          <a:fontRef idx="minor">
-            <a:schemeClr val="tx1"/>
-          </a:fontRef>
-        </p:style>
-      </p:cxnSp>
-      <p:sp>
-        <p:nvSpPr>
-          <p:cNvPr id="15" name="TextBox 38">
-            <a:extLst>
-              <a:ext uri="{FF2B5EF4-FFF2-40B4-BE49-F238E27FC236}">
-                <a16:creationId xmlns:a16="http://schemas.microsoft.com/office/drawing/2014/main" id="{E9AC1FCF-FA4A-98B7-DE63-9C91C74F1C0C}"/>
-              </a:ext>
-            </a:extLst>
-          </p:cNvPr>
-          <p:cNvSpPr txBox="1"/>
-          <p:nvPr/>
-        </p:nvSpPr>
-        <p:spPr>
-          <a:xfrm>
-            <a:off x="3682614" y="2826294"/>
-            <a:ext cx="1220255" cy="646331"/>
-          </a:xfrm>
-          <a:prstGeom prst="rect">
-            <a:avLst/>
-          </a:prstGeom>
-          <a:noFill/>
-        </p:spPr>
-        <p:txBody>
-          <a:bodyPr wrap="square" rtlCol="0">
-            <a:spAutoFit/>
-          </a:bodyPr>
-          <a:lstStyle/>
-          <a:p>
-            <a:r>
-              <a:rPr lang="en-SG" sz="1200" dirty="0"/>
-              <a:t>② </a:t>
-            </a:r>
-          </a:p>
-          <a:p>
-            <a:r>
-              <a:rPr lang="en-SG" sz="1200" dirty="0"/>
-              <a:t>Remaining</a:t>
-            </a:r>
-          </a:p>
-          <a:p>
-            <a:r>
-              <a:rPr lang="en-US" altLang="zh-CN" sz="1200" dirty="0"/>
-              <a:t>Tokenized gold</a:t>
-            </a:r>
-            <a:endParaRPr lang="en-US" sz="1200" dirty="0"/>
-          </a:p>
-        </p:txBody>
-      </p:sp>
-      <p:sp>
-        <p:nvSpPr>
-          <p:cNvPr id="16" name="TextBox 43">
-            <a:extLst>
-              <a:ext uri="{FF2B5EF4-FFF2-40B4-BE49-F238E27FC236}">
-                <a16:creationId xmlns:a16="http://schemas.microsoft.com/office/drawing/2014/main" id="{A08E8D2A-F7DD-FDCF-02D6-55A21F4C444C}"/>
-              </a:ext>
-            </a:extLst>
-          </p:cNvPr>
-          <p:cNvSpPr txBox="1"/>
-          <p:nvPr/>
-        </p:nvSpPr>
-        <p:spPr>
-          <a:xfrm>
-            <a:off x="6543773" y="2764809"/>
-            <a:ext cx="950491" cy="276999"/>
-          </a:xfrm>
-          <a:prstGeom prst="rect">
-            <a:avLst/>
-          </a:prstGeom>
-          <a:noFill/>
-        </p:spPr>
-        <p:txBody>
-          <a:bodyPr wrap="square" rtlCol="0">
-            <a:spAutoFit/>
-          </a:bodyPr>
-          <a:lstStyle/>
-          <a:p>
-            <a:r>
-              <a:rPr lang="en-SG" sz="1200" dirty="0"/>
-              <a:t>② </a:t>
-            </a:r>
-            <a:r>
-              <a:rPr lang="en-US" sz="1200" dirty="0"/>
-              <a:t>reward</a:t>
-            </a:r>
-          </a:p>
-        </p:txBody>
-      </p:sp>
-      <p:cxnSp>
-        <p:nvCxnSpPr>
-          <p:cNvPr id="17" name="Straight Arrow Connector 45">
-            <a:extLst>
-              <a:ext uri="{FF2B5EF4-FFF2-40B4-BE49-F238E27FC236}">
-                <a16:creationId xmlns:a16="http://schemas.microsoft.com/office/drawing/2014/main" id="{0A939705-C138-C39A-340E-CF7971C7627A}"/>
-              </a:ext>
-            </a:extLst>
-          </p:cNvPr>
-          <p:cNvCxnSpPr/>
-          <p:nvPr/>
-        </p:nvCxnSpPr>
-        <p:spPr>
-          <a:xfrm flipH="1">
-            <a:off x="6487630" y="2448131"/>
-            <a:ext cx="2025837" cy="2341014"/>
-          </a:xfrm>
-          <a:prstGeom prst="straightConnector1">
-            <a:avLst/>
-          </a:prstGeom>
-          <a:ln>
-            <a:tailEnd type="triangle"/>
-          </a:ln>
-        </p:spPr>
-        <p:style>
-          <a:lnRef idx="2">
-            <a:schemeClr val="dk1"/>
-          </a:lnRef>
-          <a:fillRef idx="0">
-            <a:schemeClr val="dk1"/>
-          </a:fillRef>
-          <a:effectRef idx="1">
-            <a:schemeClr val="dk1"/>
-          </a:effectRef>
-          <a:fontRef idx="minor">
-            <a:schemeClr val="tx1"/>
-          </a:fontRef>
-        </p:style>
-      </p:cxnSp>
-      <p:sp>
-        <p:nvSpPr>
-          <p:cNvPr id="18" name="TextBox 48">
-            <a:extLst>
-              <a:ext uri="{FF2B5EF4-FFF2-40B4-BE49-F238E27FC236}">
-                <a16:creationId xmlns:a16="http://schemas.microsoft.com/office/drawing/2014/main" id="{FA9A962C-97F7-354A-3133-A5A7F17253A0}"/>
-              </a:ext>
-            </a:extLst>
-          </p:cNvPr>
-          <p:cNvSpPr txBox="1"/>
-          <p:nvPr/>
-        </p:nvSpPr>
-        <p:spPr>
-          <a:xfrm>
-            <a:off x="7266423" y="3123952"/>
-            <a:ext cx="890455" cy="276999"/>
-          </a:xfrm>
-          <a:prstGeom prst="rect">
-            <a:avLst/>
-          </a:prstGeom>
-          <a:noFill/>
-        </p:spPr>
-        <p:txBody>
-          <a:bodyPr wrap="square" rtlCol="0">
-            <a:spAutoFit/>
-          </a:bodyPr>
-          <a:lstStyle/>
-          <a:p>
-            <a:r>
-              <a:rPr lang="en-US" sz="1200" dirty="0"/>
-              <a:t>reset</a:t>
-            </a:r>
-          </a:p>
-        </p:txBody>
-      </p:sp>
-      <p:sp>
-        <p:nvSpPr>
-          <p:cNvPr id="19" name="Rounded Rectangle 49">
-            <a:extLst>
-              <a:ext uri="{FF2B5EF4-FFF2-40B4-BE49-F238E27FC236}">
-                <a16:creationId xmlns:a16="http://schemas.microsoft.com/office/drawing/2014/main" id="{2BF62FA1-B91F-47EF-EC08-D2F91F3D396A}"/>
-              </a:ext>
-            </a:extLst>
-          </p:cNvPr>
-          <p:cNvSpPr/>
-          <p:nvPr/>
-        </p:nvSpPr>
-        <p:spPr>
-          <a:xfrm>
-            <a:off x="9514866" y="4726267"/>
-            <a:ext cx="1050558" cy="1315282"/>
-          </a:xfrm>
-          <a:prstGeom prst="roundRect">
-            <a:avLst/>
-          </a:prstGeom>
-          <a:solidFill>
-            <a:schemeClr val="accent6"/>
-          </a:solidFill>
-        </p:spPr>
-        <p:style>
-          <a:lnRef idx="2">
-            <a:schemeClr val="accent1">
-              <a:shade val="15000"/>
-            </a:schemeClr>
-          </a:lnRef>
-          <a:fillRef idx="1">
-            <a:schemeClr val="accent1"/>
-          </a:fillRef>
-          <a:effectRef idx="0">
-            <a:schemeClr val="accent1"/>
-          </a:effectRef>
-          <a:fontRef idx="minor">
-            <a:schemeClr val="lt1"/>
-          </a:fontRef>
-        </p:style>
-        <p:txBody>
-          <a:bodyPr rtlCol="0" anchor="ctr"/>
-          <a:lstStyle/>
-          <a:p>
-            <a:pPr algn="ctr"/>
-            <a:r>
-              <a:rPr lang="en-US" dirty="0"/>
-              <a:t>Bidder</a:t>
-            </a:r>
-          </a:p>
-        </p:txBody>
-      </p:sp>
-      <p:cxnSp>
-        <p:nvCxnSpPr>
-          <p:cNvPr id="20" name="Straight Arrow Connector 51">
-            <a:extLst>
-              <a:ext uri="{FF2B5EF4-FFF2-40B4-BE49-F238E27FC236}">
-                <a16:creationId xmlns:a16="http://schemas.microsoft.com/office/drawing/2014/main" id="{3926F1CE-21F6-153F-95FB-4D3E9F66FEAA}"/>
-              </a:ext>
-            </a:extLst>
-          </p:cNvPr>
-          <p:cNvCxnSpPr/>
-          <p:nvPr/>
-        </p:nvCxnSpPr>
-        <p:spPr>
-          <a:xfrm>
-            <a:off x="6952212" y="5167138"/>
-            <a:ext cx="2759528" cy="0"/>
-          </a:xfrm>
-          <a:prstGeom prst="straightConnector1">
-            <a:avLst/>
-          </a:prstGeom>
-          <a:ln>
-            <a:tailEnd type="triangle"/>
-          </a:ln>
-        </p:spPr>
-        <p:style>
-          <a:lnRef idx="2">
-            <a:schemeClr val="dk1"/>
-          </a:lnRef>
-          <a:fillRef idx="0">
-            <a:schemeClr val="dk1"/>
-          </a:fillRef>
-          <a:effectRef idx="1">
-            <a:schemeClr val="dk1"/>
-          </a:effectRef>
-          <a:fontRef idx="minor">
-            <a:schemeClr val="tx1"/>
-          </a:fontRef>
-        </p:style>
-      </p:cxnSp>
-      <p:sp>
-        <p:nvSpPr>
-          <p:cNvPr id="21" name="TextBox 57">
-            <a:extLst>
-              <a:ext uri="{FF2B5EF4-FFF2-40B4-BE49-F238E27FC236}">
-                <a16:creationId xmlns:a16="http://schemas.microsoft.com/office/drawing/2014/main" id="{5CCC166E-C011-F2E7-0B37-BA518B0B1753}"/>
-              </a:ext>
-            </a:extLst>
-          </p:cNvPr>
-          <p:cNvSpPr txBox="1"/>
-          <p:nvPr/>
-        </p:nvSpPr>
-        <p:spPr>
-          <a:xfrm>
-            <a:off x="7685120" y="4895412"/>
-            <a:ext cx="1675753" cy="276999"/>
-          </a:xfrm>
-          <a:prstGeom prst="rect">
-            <a:avLst/>
-          </a:prstGeom>
-          <a:noFill/>
-        </p:spPr>
-        <p:txBody>
-          <a:bodyPr wrap="square" rtlCol="0">
-            <a:spAutoFit/>
-          </a:bodyPr>
-          <a:lstStyle/>
-          <a:p>
-            <a:r>
-              <a:rPr lang="en-SG" sz="1200" dirty="0"/>
-              <a:t>③Buy tokenized gold</a:t>
-            </a:r>
-            <a:endParaRPr lang="en-US" sz="1200" dirty="0"/>
-          </a:p>
-        </p:txBody>
-      </p:sp>
-      <p:sp>
-        <p:nvSpPr>
-          <p:cNvPr id="22" name="TextBox 58">
-            <a:extLst>
-              <a:ext uri="{FF2B5EF4-FFF2-40B4-BE49-F238E27FC236}">
-                <a16:creationId xmlns:a16="http://schemas.microsoft.com/office/drawing/2014/main" id="{16F7C2BD-8A0C-C563-67FB-737CC67A47F8}"/>
-              </a:ext>
-            </a:extLst>
-          </p:cNvPr>
-          <p:cNvSpPr txBox="1"/>
-          <p:nvPr/>
-        </p:nvSpPr>
-        <p:spPr>
-          <a:xfrm>
-            <a:off x="7685121" y="5438865"/>
-            <a:ext cx="1891688" cy="276999"/>
-          </a:xfrm>
-          <a:prstGeom prst="rect">
-            <a:avLst/>
-          </a:prstGeom>
-          <a:noFill/>
-        </p:spPr>
-        <p:txBody>
-          <a:bodyPr wrap="square" rtlCol="0">
-            <a:spAutoFit/>
-          </a:bodyPr>
-          <a:lstStyle/>
-          <a:p>
-            <a:r>
-              <a:rPr lang="en-SG" sz="1200" dirty="0"/>
-              <a:t>③</a:t>
-            </a:r>
-            <a:r>
-              <a:rPr lang="en-US" sz="1200" dirty="0"/>
-              <a:t>Pay S token</a:t>
-            </a:r>
-          </a:p>
-        </p:txBody>
-      </p:sp>
-      <p:sp>
-        <p:nvSpPr>
-          <p:cNvPr id="23" name="Rounded Rectangle 60">
-            <a:extLst>
-              <a:ext uri="{FF2B5EF4-FFF2-40B4-BE49-F238E27FC236}">
-                <a16:creationId xmlns:a16="http://schemas.microsoft.com/office/drawing/2014/main" id="{5530153B-50B2-1913-BE61-5DA1869E00B2}"/>
-              </a:ext>
-            </a:extLst>
-          </p:cNvPr>
-          <p:cNvSpPr/>
-          <p:nvPr/>
-        </p:nvSpPr>
-        <p:spPr>
-          <a:xfrm>
-            <a:off x="4544309" y="4895470"/>
-            <a:ext cx="2063150" cy="1011634"/>
-          </a:xfrm>
-          <a:prstGeom prst="roundRect">
-            <a:avLst/>
-          </a:prstGeom>
-          <a:solidFill>
-            <a:schemeClr val="accent1">
-              <a:lumMod val="20000"/>
-              <a:lumOff val="80000"/>
-            </a:schemeClr>
-          </a:solidFill>
-        </p:spPr>
-        <p:style>
-          <a:lnRef idx="2">
-            <a:schemeClr val="accent1">
-              <a:shade val="15000"/>
-            </a:schemeClr>
-          </a:lnRef>
-          <a:fillRef idx="1">
-            <a:schemeClr val="accent1"/>
-          </a:fillRef>
-          <a:effectRef idx="0">
-            <a:schemeClr val="accent1"/>
-          </a:effectRef>
-          <a:fontRef idx="minor">
-            <a:schemeClr val="lt1"/>
-          </a:fontRef>
-        </p:style>
-        <p:txBody>
-          <a:bodyPr rtlCol="0" anchor="ctr"/>
-          <a:lstStyle/>
-          <a:p>
-            <a:pPr algn="ctr"/>
-            <a:endParaRPr lang="en-US"/>
-          </a:p>
-        </p:txBody>
-      </p:sp>
-      <p:sp>
-        <p:nvSpPr>
-          <p:cNvPr id="24" name="TextBox 61">
-            <a:extLst>
-              <a:ext uri="{FF2B5EF4-FFF2-40B4-BE49-F238E27FC236}">
-                <a16:creationId xmlns:a16="http://schemas.microsoft.com/office/drawing/2014/main" id="{1EB7D471-2BB6-A733-7023-B03B374C88E8}"/>
-              </a:ext>
-            </a:extLst>
-          </p:cNvPr>
-          <p:cNvSpPr txBox="1"/>
-          <p:nvPr/>
-        </p:nvSpPr>
-        <p:spPr>
-          <a:xfrm>
-            <a:off x="4827763" y="5227294"/>
-            <a:ext cx="1730623" cy="307777"/>
-          </a:xfrm>
-          <a:prstGeom prst="rect">
-            <a:avLst/>
-          </a:prstGeom>
-          <a:noFill/>
-        </p:spPr>
-        <p:txBody>
-          <a:bodyPr wrap="square" rtlCol="0">
-            <a:spAutoFit/>
-          </a:bodyPr>
-          <a:lstStyle/>
-          <a:p>
-            <a:r>
-              <a:rPr lang="en-US" sz="1400" dirty="0"/>
-              <a:t>S token</a:t>
-            </a:r>
-          </a:p>
-        </p:txBody>
-      </p:sp>
-      <p:cxnSp>
-        <p:nvCxnSpPr>
-          <p:cNvPr id="25" name="Straight Arrow Connector 64">
-            <a:extLst>
-              <a:ext uri="{FF2B5EF4-FFF2-40B4-BE49-F238E27FC236}">
-                <a16:creationId xmlns:a16="http://schemas.microsoft.com/office/drawing/2014/main" id="{32FD0CAE-38AF-11E4-90B3-DA1664ECC657}"/>
-              </a:ext>
-            </a:extLst>
-          </p:cNvPr>
-          <p:cNvCxnSpPr/>
-          <p:nvPr/>
-        </p:nvCxnSpPr>
-        <p:spPr>
-          <a:xfrm flipH="1">
-            <a:off x="6325438" y="5773531"/>
-            <a:ext cx="3386302" cy="0"/>
-          </a:xfrm>
-          <a:prstGeom prst="straightConnector1">
-            <a:avLst/>
-          </a:prstGeom>
-          <a:ln>
-            <a:tailEnd type="triangle"/>
-          </a:ln>
-        </p:spPr>
-        <p:style>
-          <a:lnRef idx="2">
-            <a:schemeClr val="dk1"/>
-          </a:lnRef>
-          <a:fillRef idx="0">
-            <a:schemeClr val="dk1"/>
-          </a:fillRef>
-          <a:effectRef idx="1">
-            <a:schemeClr val="dk1"/>
-          </a:effectRef>
-          <a:fontRef idx="minor">
-            <a:schemeClr val="tx1"/>
-          </a:fontRef>
-        </p:style>
-      </p:cxnSp>
-      <p:cxnSp>
-        <p:nvCxnSpPr>
-          <p:cNvPr id="26" name="Elbow Connector 69">
-            <a:extLst>
-              <a:ext uri="{FF2B5EF4-FFF2-40B4-BE49-F238E27FC236}">
-                <a16:creationId xmlns:a16="http://schemas.microsoft.com/office/drawing/2014/main" id="{E0E8ACBA-2158-A4A9-867F-2C1DB528CD54}"/>
-              </a:ext>
-            </a:extLst>
-          </p:cNvPr>
-          <p:cNvCxnSpPr>
-            <a:cxnSpLocks/>
-          </p:cNvCxnSpPr>
-          <p:nvPr/>
-        </p:nvCxnSpPr>
-        <p:spPr>
-          <a:xfrm rot="10800000">
-            <a:off x="1759602" y="3432517"/>
-            <a:ext cx="2900322" cy="2341014"/>
-          </a:xfrm>
-          <a:prstGeom prst="bentConnector3">
-            <a:avLst>
-              <a:gd name="adj1" fmla="val 100106"/>
-            </a:avLst>
-          </a:prstGeom>
-          <a:ln>
-            <a:tailEnd type="triangle"/>
-          </a:ln>
-        </p:spPr>
-        <p:style>
-          <a:lnRef idx="2">
-            <a:schemeClr val="dk1"/>
-          </a:lnRef>
-          <a:fillRef idx="0">
-            <a:schemeClr val="dk1"/>
-          </a:fillRef>
-          <a:effectRef idx="1">
-            <a:schemeClr val="dk1"/>
-          </a:effectRef>
-          <a:fontRef idx="minor">
-            <a:schemeClr val="tx1"/>
-          </a:fontRef>
-        </p:style>
-      </p:cxnSp>
-      <p:cxnSp>
-        <p:nvCxnSpPr>
-          <p:cNvPr id="27" name="Straight Arrow Connector 74">
-            <a:extLst>
-              <a:ext uri="{FF2B5EF4-FFF2-40B4-BE49-F238E27FC236}">
-                <a16:creationId xmlns:a16="http://schemas.microsoft.com/office/drawing/2014/main" id="{F8D42FF2-8363-D6DD-27C7-36DF766FAF84}"/>
-              </a:ext>
-            </a:extLst>
-          </p:cNvPr>
-          <p:cNvCxnSpPr/>
-          <p:nvPr/>
-        </p:nvCxnSpPr>
-        <p:spPr>
-          <a:xfrm flipH="1" flipV="1">
-            <a:off x="3708673" y="2428934"/>
-            <a:ext cx="13226" cy="2278136"/>
-          </a:xfrm>
-          <a:prstGeom prst="straightConnector1">
-            <a:avLst/>
-          </a:prstGeom>
-          <a:ln>
-            <a:tailEnd type="triangle"/>
-          </a:ln>
-        </p:spPr>
-        <p:style>
-          <a:lnRef idx="2">
-            <a:schemeClr val="dk1"/>
-          </a:lnRef>
-          <a:fillRef idx="0">
-            <a:schemeClr val="dk1"/>
-          </a:fillRef>
-          <a:effectRef idx="1">
-            <a:schemeClr val="dk1"/>
-          </a:effectRef>
-          <a:fontRef idx="minor">
-            <a:schemeClr val="tx1"/>
-          </a:fontRef>
-        </p:style>
-      </p:cxnSp>
-      <p:sp>
-        <p:nvSpPr>
-          <p:cNvPr id="28" name="Rounded Rectangle 81">
-            <a:extLst>
-              <a:ext uri="{FF2B5EF4-FFF2-40B4-BE49-F238E27FC236}">
-                <a16:creationId xmlns:a16="http://schemas.microsoft.com/office/drawing/2014/main" id="{4A76D577-7409-2A4B-30AF-C4A475B8D6E7}"/>
-              </a:ext>
-            </a:extLst>
-          </p:cNvPr>
-          <p:cNvSpPr/>
-          <p:nvPr/>
-        </p:nvSpPr>
-        <p:spPr>
-          <a:xfrm>
-            <a:off x="5386477" y="3873489"/>
-            <a:ext cx="1223997" cy="566154"/>
-          </a:xfrm>
-          <a:prstGeom prst="roundRect">
-            <a:avLst/>
-          </a:prstGeom>
-          <a:solidFill>
-            <a:schemeClr val="accent3"/>
-          </a:solidFill>
-          <a:ln>
-            <a:solidFill>
-              <a:schemeClr val="tx1"/>
-            </a:solidFill>
-          </a:ln>
-        </p:spPr>
-        <p:style>
-          <a:lnRef idx="2">
-            <a:schemeClr val="accent1">
-              <a:shade val="15000"/>
-            </a:schemeClr>
-          </a:lnRef>
-          <a:fillRef idx="1">
-            <a:schemeClr val="accent1"/>
-          </a:fillRef>
-          <a:effectRef idx="0">
-            <a:schemeClr val="accent1"/>
-          </a:effectRef>
-          <a:fontRef idx="minor">
-            <a:schemeClr val="lt1"/>
-          </a:fontRef>
-        </p:style>
-        <p:txBody>
-          <a:bodyPr rtlCol="0" anchor="ctr"/>
-          <a:lstStyle/>
-          <a:p>
-            <a:pPr algn="ctr"/>
-            <a:endParaRPr lang="en-US"/>
-          </a:p>
-        </p:txBody>
-      </p:sp>
-      <p:sp>
-        <p:nvSpPr>
-          <p:cNvPr id="29" name="TextBox 82">
-            <a:extLst>
-              <a:ext uri="{FF2B5EF4-FFF2-40B4-BE49-F238E27FC236}">
-                <a16:creationId xmlns:a16="http://schemas.microsoft.com/office/drawing/2014/main" id="{2F1CBD18-2DD2-2FA9-81B7-AD30AE48AAB8}"/>
-              </a:ext>
-            </a:extLst>
-          </p:cNvPr>
-          <p:cNvSpPr txBox="1"/>
-          <p:nvPr/>
-        </p:nvSpPr>
-        <p:spPr>
-          <a:xfrm>
-            <a:off x="5550698" y="3910553"/>
-            <a:ext cx="1126596" cy="307777"/>
-          </a:xfrm>
-          <a:prstGeom prst="rect">
-            <a:avLst/>
-          </a:prstGeom>
-          <a:noFill/>
-        </p:spPr>
-        <p:txBody>
-          <a:bodyPr wrap="square" rtlCol="0">
-            <a:spAutoFit/>
-          </a:bodyPr>
-          <a:lstStyle/>
-          <a:p>
-            <a:r>
-              <a:rPr lang="en-US" sz="1400" dirty="0"/>
-              <a:t>Penalty</a:t>
-            </a:r>
-          </a:p>
-        </p:txBody>
-      </p:sp>
-      <p:cxnSp>
-        <p:nvCxnSpPr>
-          <p:cNvPr id="30" name="Elbow Connector 84">
-            <a:extLst>
-              <a:ext uri="{FF2B5EF4-FFF2-40B4-BE49-F238E27FC236}">
-                <a16:creationId xmlns:a16="http://schemas.microsoft.com/office/drawing/2014/main" id="{58C2179C-1BB1-19C4-0E6B-242B996E1968}"/>
-              </a:ext>
-            </a:extLst>
-          </p:cNvPr>
-          <p:cNvCxnSpPr/>
-          <p:nvPr/>
-        </p:nvCxnSpPr>
-        <p:spPr>
-          <a:xfrm rot="10800000" flipV="1">
-            <a:off x="4941534" y="2120625"/>
-            <a:ext cx="2918791" cy="2605642"/>
-          </a:xfrm>
-          <a:prstGeom prst="bentConnector3">
-            <a:avLst>
-              <a:gd name="adj1" fmla="val 100069"/>
-            </a:avLst>
-          </a:prstGeom>
-          <a:ln>
-            <a:tailEnd type="triangle"/>
-          </a:ln>
-        </p:spPr>
-        <p:style>
-          <a:lnRef idx="2">
-            <a:schemeClr val="dk1"/>
-          </a:lnRef>
-          <a:fillRef idx="0">
-            <a:schemeClr val="dk1"/>
-          </a:fillRef>
-          <a:effectRef idx="1">
-            <a:schemeClr val="dk1"/>
-          </a:effectRef>
-          <a:fontRef idx="minor">
-            <a:schemeClr val="tx1"/>
-          </a:fontRef>
-        </p:style>
-      </p:cxnSp>
-      <p:cxnSp>
-        <p:nvCxnSpPr>
-          <p:cNvPr id="31" name="Straight Arrow Connector 88">
-            <a:extLst>
-              <a:ext uri="{FF2B5EF4-FFF2-40B4-BE49-F238E27FC236}">
-                <a16:creationId xmlns:a16="http://schemas.microsoft.com/office/drawing/2014/main" id="{D12D7218-6A25-0CD2-F0D5-3631A4272FD7}"/>
-              </a:ext>
-            </a:extLst>
-          </p:cNvPr>
-          <p:cNvCxnSpPr/>
-          <p:nvPr/>
-        </p:nvCxnSpPr>
-        <p:spPr>
-          <a:xfrm flipV="1">
-            <a:off x="6412524" y="2316150"/>
-            <a:ext cx="1545771" cy="1729368"/>
-          </a:xfrm>
-          <a:prstGeom prst="straightConnector1">
-            <a:avLst/>
-          </a:prstGeom>
-          <a:ln>
-            <a:tailEnd type="triangle"/>
-          </a:ln>
-        </p:spPr>
-        <p:style>
-          <a:lnRef idx="2">
-            <a:schemeClr val="dk1"/>
-          </a:lnRef>
-          <a:fillRef idx="0">
-            <a:schemeClr val="dk1"/>
-          </a:fillRef>
-          <a:effectRef idx="1">
-            <a:schemeClr val="dk1"/>
-          </a:effectRef>
-          <a:fontRef idx="minor">
-            <a:schemeClr val="tx1"/>
-          </a:fontRef>
-        </p:style>
-      </p:cxnSp>
-      <p:sp>
-        <p:nvSpPr>
-          <p:cNvPr id="32" name="TextBox 92">
-            <a:extLst>
-              <a:ext uri="{FF2B5EF4-FFF2-40B4-BE49-F238E27FC236}">
-                <a16:creationId xmlns:a16="http://schemas.microsoft.com/office/drawing/2014/main" id="{15CD0A0D-1074-FE09-2F24-CF3E071AEE62}"/>
-              </a:ext>
-            </a:extLst>
-          </p:cNvPr>
-          <p:cNvSpPr txBox="1"/>
-          <p:nvPr/>
-        </p:nvSpPr>
-        <p:spPr>
-          <a:xfrm>
-            <a:off x="1465133" y="2266867"/>
-            <a:ext cx="396993" cy="553998"/>
-          </a:xfrm>
-          <a:prstGeom prst="rect">
-            <a:avLst/>
-          </a:prstGeom>
-          <a:noFill/>
-        </p:spPr>
-        <p:txBody>
-          <a:bodyPr wrap="square" rtlCol="0">
-            <a:spAutoFit/>
-          </a:bodyPr>
-          <a:lstStyle/>
-          <a:p>
-            <a:r>
-              <a:rPr lang="en-SG" sz="1200" dirty="0"/>
-              <a:t>② </a:t>
-            </a:r>
-          </a:p>
-          <a:p>
-            <a:endParaRPr lang="en-US" dirty="0"/>
-          </a:p>
-        </p:txBody>
-      </p:sp>
-      <p:sp>
-        <p:nvSpPr>
-          <p:cNvPr id="33" name="TextBox 93">
-            <a:extLst>
-              <a:ext uri="{FF2B5EF4-FFF2-40B4-BE49-F238E27FC236}">
-                <a16:creationId xmlns:a16="http://schemas.microsoft.com/office/drawing/2014/main" id="{FA61EC19-68E9-DC0E-CD12-5F0C9CFF8F63}"/>
-              </a:ext>
-            </a:extLst>
-          </p:cNvPr>
-          <p:cNvSpPr txBox="1"/>
-          <p:nvPr/>
-        </p:nvSpPr>
-        <p:spPr>
-          <a:xfrm>
-            <a:off x="1406752" y="4906468"/>
-            <a:ext cx="473529" cy="276999"/>
-          </a:xfrm>
-          <a:prstGeom prst="rect">
-            <a:avLst/>
-          </a:prstGeom>
-          <a:noFill/>
-        </p:spPr>
-        <p:txBody>
-          <a:bodyPr wrap="square" rtlCol="0">
-            <a:spAutoFit/>
-          </a:bodyPr>
-          <a:lstStyle/>
-          <a:p>
-            <a:r>
-              <a:rPr lang="en-SG" sz="1200" dirty="0"/>
-              <a:t>④</a:t>
-            </a:r>
-          </a:p>
-        </p:txBody>
-      </p:sp>
-      <p:sp>
-        <p:nvSpPr>
-          <p:cNvPr id="34" name="TextBox 33">
-            <a:extLst>
-              <a:ext uri="{FF2B5EF4-FFF2-40B4-BE49-F238E27FC236}">
-                <a16:creationId xmlns:a16="http://schemas.microsoft.com/office/drawing/2014/main" id="{9A2AF04B-FA45-BDFC-1678-EB0A64EDE79E}"/>
-              </a:ext>
-            </a:extLst>
-          </p:cNvPr>
-          <p:cNvSpPr txBox="1"/>
-          <p:nvPr/>
-        </p:nvSpPr>
-        <p:spPr>
-          <a:xfrm>
-            <a:off x="1180658" y="6377518"/>
-            <a:ext cx="10724667" cy="369332"/>
-          </a:xfrm>
-          <a:prstGeom prst="rect">
-            <a:avLst/>
-          </a:prstGeom>
-          <a:noFill/>
-        </p:spPr>
-        <p:txBody>
-          <a:bodyPr wrap="none" rtlCol="0">
-            <a:spAutoFit/>
-          </a:bodyPr>
-          <a:lstStyle/>
-          <a:p>
-            <a:r>
-              <a:rPr lang="en-US" i="1" dirty="0">
-                <a:solidFill>
-                  <a:srgbClr val="7030A0"/>
-                </a:solidFill>
-              </a:rPr>
-              <a:t>NOTE: The liquidation model determines the optimal liquidation boundary based on system parameters </a:t>
-            </a:r>
-            <a:r>
-              <a:rPr lang="en-US" altLang="zh-CN" i="1" dirty="0">
-                <a:solidFill>
-                  <a:srgbClr val="7030A0"/>
-                </a:solidFill>
-              </a:rPr>
-              <a:t>for users</a:t>
-            </a:r>
-            <a:r>
-              <a:rPr lang="en-US" i="1" dirty="0">
-                <a:solidFill>
-                  <a:srgbClr val="7030A0"/>
-                </a:solidFill>
-              </a:rPr>
-              <a:t>.</a:t>
-            </a:r>
-          </a:p>
-        </p:txBody>
-      </p:sp>
-    </p:spTree>
-    <p:extLst>
-      <p:ext uri="{BB962C8B-B14F-4D97-AF65-F5344CB8AC3E}">
-        <p14:creationId xmlns:p14="http://schemas.microsoft.com/office/powerpoint/2010/main" val="3157216977"/>
       </p:ext>
     </p:extLst>
   </p:cSld>
